--- a/ppt/Data_Structrue_Tutorial/Data Structrue Tutorial.pptx
+++ b/ppt/Data_Structrue_Tutorial/Data Structrue Tutorial.pptx
@@ -5,14 +5,24 @@
     <p:sldMasterId id="2147483648" r:id="rId1"/>
   </p:sldMasterIdLst>
   <p:notesMasterIdLst>
-    <p:notesMasterId r:id="rId5"/>
+    <p:notesMasterId r:id="rId15"/>
   </p:notesMasterIdLst>
   <p:handoutMasterIdLst>
-    <p:handoutMasterId r:id="rId6"/>
+    <p:handoutMasterId r:id="rId16"/>
   </p:handoutMasterIdLst>
   <p:sldIdLst>
     <p:sldId id="257" r:id="rId3"/>
     <p:sldId id="258" r:id="rId4"/>
+    <p:sldId id="259" r:id="rId5"/>
+    <p:sldId id="260" r:id="rId6"/>
+    <p:sldId id="265" r:id="rId7"/>
+    <p:sldId id="267" r:id="rId8"/>
+    <p:sldId id="268" r:id="rId9"/>
+    <p:sldId id="271" r:id="rId10"/>
+    <p:sldId id="272" r:id="rId11"/>
+    <p:sldId id="273" r:id="rId12"/>
+    <p:sldId id="274" r:id="rId13"/>
+    <p:sldId id="275" r:id="rId14"/>
   </p:sldIdLst>
   <p:sldSz cx="12192000" cy="6858000"/>
   <p:notesSz cx="7103745" cy="10234295"/>
@@ -119,7 +129,7 @@
             <a:srgbClr val="A4A3A4"/>
           </p15:clr>
         </p15:guide>
-        <p15:guide id="2" pos="3840" userDrawn="1">
+        <p15:guide id="2" pos="2505" userDrawn="1">
           <p15:clr>
             <a:srgbClr val="A4A3A4"/>
           </p15:clr>
@@ -639,6 +649,54 @@
     </a:lvl9pPr>
   </p:notesStyle>
 </p:notesMaster>
+</file>
+
+<file path=ppt/notesSlides/notesSlide1.xml><?xml version="1.0" encoding="utf-8"?>
+<p:notes xmlns:a="http://schemas.openxmlformats.org/drawingml/2006/main" xmlns:r="http://schemas.openxmlformats.org/officeDocument/2006/relationships" xmlns:p="http://schemas.openxmlformats.org/presentationml/2006/main">
+  <p:cSld>
+    <p:spTree>
+      <p:nvGrpSpPr>
+        <p:cNvPr id="1" name=""/>
+        <p:cNvGrpSpPr/>
+        <p:nvPr/>
+      </p:nvGrpSpPr>
+      <p:grpSpPr/>
+      <p:sp>
+        <p:nvSpPr>
+          <p:cNvPr id="2" name="幻灯片图像占位符 1"/>
+          <p:cNvSpPr>
+            <a:spLocks noGrp="1"/>
+          </p:cNvSpPr>
+          <p:nvPr>
+            <p:ph type="sldImg" idx="2"/>
+          </p:nvPr>
+        </p:nvSpPr>
+        <p:spPr/>
+      </p:sp>
+      <p:sp>
+        <p:nvSpPr>
+          <p:cNvPr id="3" name="文本占位符 2"/>
+          <p:cNvSpPr>
+            <a:spLocks noGrp="1"/>
+          </p:cNvSpPr>
+          <p:nvPr>
+            <p:ph type="body" idx="3"/>
+          </p:nvPr>
+        </p:nvSpPr>
+        <p:spPr/>
+        <p:txBody>
+          <a:bodyPr/>
+          <a:p>
+            <a:endParaRPr lang="zh-CN" altLang="en-US"/>
+          </a:p>
+        </p:txBody>
+      </p:sp>
+    </p:spTree>
+  </p:cSld>
+  <p:clrMapOvr>
+    <a:masterClrMapping/>
+  </p:clrMapOvr>
+</p:notes>
 </file>
 
 <file path=ppt/slideLayouts/slideLayout1.xml><?xml version="1.0" encoding="utf-8"?>
@@ -3577,7 +3635,7 @@
               <a:rPr lang="en-US" altLang="zh-CN" sz="1800" dirty="0">
                 <a:latin typeface="Courier" pitchFamily="2" charset="0"/>
               </a:rPr>
-              <a:t>https://github.com/Kicamon/Note</a:t>
+              <a:t>https://github.com/Kicamon</a:t>
             </a:r>
             <a:endParaRPr lang="en-US" altLang="zh-CN" sz="1800" dirty="0">
               <a:latin typeface="Courier" pitchFamily="2" charset="0"/>
@@ -3590,6 +3648,570 @@
           </a:p>
         </p:txBody>
       </p:sp>
+    </p:spTree>
+  </p:cSld>
+  <p:clrMapOvr>
+    <a:masterClrMapping/>
+  </p:clrMapOvr>
+</p:sld>
+</file>
+
+<file path=ppt/slides/slide10.xml><?xml version="1.0" encoding="utf-8"?>
+<p:sld xmlns:a="http://schemas.openxmlformats.org/drawingml/2006/main" xmlns:r="http://schemas.openxmlformats.org/officeDocument/2006/relationships" xmlns:p="http://schemas.openxmlformats.org/presentationml/2006/main">
+  <p:cSld>
+    <p:spTree>
+      <p:nvGrpSpPr>
+        <p:cNvPr id="1" name=""/>
+        <p:cNvGrpSpPr/>
+        <p:nvPr/>
+      </p:nvGrpSpPr>
+      <p:grpSpPr/>
+      <p:pic>
+        <p:nvPicPr>
+          <p:cNvPr id="21" name="图片 20"/>
+          <p:cNvPicPr>
+            <a:picLocks noChangeAspect="1"/>
+          </p:cNvPicPr>
+          <p:nvPr/>
+        </p:nvPicPr>
+        <p:blipFill>
+          <a:blip r:embed="rId1"/>
+          <a:stretch>
+            <a:fillRect/>
+          </a:stretch>
+        </p:blipFill>
+        <p:spPr>
+          <a:xfrm>
+            <a:off x="2873375" y="1360170"/>
+            <a:ext cx="6445885" cy="4893310"/>
+          </a:xfrm>
+          <a:prstGeom prst="rect">
+            <a:avLst/>
+          </a:prstGeom>
+        </p:spPr>
+      </p:pic>
+      <p:sp>
+        <p:nvSpPr>
+          <p:cNvPr id="11" name="文本框 10"/>
+          <p:cNvSpPr txBox="1"/>
+          <p:nvPr/>
+        </p:nvSpPr>
+        <p:spPr>
+          <a:xfrm>
+            <a:off x="285115" y="0"/>
+            <a:ext cx="3749040" cy="866140"/>
+          </a:xfrm>
+          <a:prstGeom prst="rect">
+            <a:avLst/>
+          </a:prstGeom>
+          <a:noFill/>
+        </p:spPr>
+        <p:txBody>
+          <a:bodyPr wrap="square" rtlCol="0">
+            <a:spAutoFit/>
+          </a:bodyPr>
+          <a:p>
+            <a:pPr indent="0">
+              <a:lnSpc>
+                <a:spcPct val="180000"/>
+              </a:lnSpc>
+              <a:buFont typeface="Arial" panose="020B0604020202020204" pitchFamily="34" charset="0"/>
+              <a:buNone/>
+            </a:pPr>
+            <a:r>
+              <a:rPr lang="en-US" altLang="zh-CN" sz="2800">
+                <a:latin typeface="楷体" panose="02010609060101010101" charset="-122"/>
+                <a:ea typeface="楷体" panose="02010609060101010101" charset="-122"/>
+                <a:cs typeface="楷体" panose="02010609060101010101" charset="-122"/>
+              </a:rPr>
+              <a:t>C</a:t>
+            </a:r>
+            <a:r>
+              <a:rPr lang="zh-CN" altLang="en-US" sz="2800">
+                <a:latin typeface="楷体" panose="02010609060101010101" charset="-122"/>
+                <a:ea typeface="楷体" panose="02010609060101010101" charset="-122"/>
+                <a:cs typeface="楷体" panose="02010609060101010101" charset="-122"/>
+              </a:rPr>
+              <a:t>语言数组模拟</a:t>
+            </a:r>
+            <a:endParaRPr lang="zh-CN" altLang="en-US" sz="2800">
+              <a:latin typeface="楷体" panose="02010609060101010101" charset="-122"/>
+              <a:ea typeface="楷体" panose="02010609060101010101" charset="-122"/>
+              <a:cs typeface="楷体" panose="02010609060101010101" charset="-122"/>
+            </a:endParaRPr>
+          </a:p>
+        </p:txBody>
+      </p:sp>
+      <p:sp>
+        <p:nvSpPr>
+          <p:cNvPr id="2" name="矩形 1"/>
+          <p:cNvSpPr/>
+          <p:nvPr/>
+        </p:nvSpPr>
+        <p:spPr>
+          <a:xfrm>
+            <a:off x="4416425" y="1395730"/>
+            <a:ext cx="666115" cy="417830"/>
+          </a:xfrm>
+          <a:prstGeom prst="rect">
+            <a:avLst/>
+          </a:prstGeom>
+          <a:noFill/>
+          <a:ln w="53975">
+            <a:solidFill>
+              <a:schemeClr val="bg1"/>
+            </a:solidFill>
+          </a:ln>
+          <a:extLst>
+            <a:ext uri="{909E8E84-426E-40DD-AFC4-6F175D3DCCD1}">
+              <a14:hiddenFill xmlns:a14="http://schemas.microsoft.com/office/drawing/2010/main">
+                <a:solidFill>
+                  <a:srgbClr val="FFFF00"/>
+                </a:solidFill>
+              </a14:hiddenFill>
+            </a:ext>
+          </a:extLst>
+        </p:spPr>
+        <p:style>
+          <a:lnRef idx="2">
+            <a:schemeClr val="accent1">
+              <a:lumMod val="75000"/>
+            </a:schemeClr>
+          </a:lnRef>
+          <a:fillRef idx="1">
+            <a:schemeClr val="accent1"/>
+          </a:fillRef>
+          <a:effectRef idx="0">
+            <a:srgbClr val="FFFFFF"/>
+          </a:effectRef>
+          <a:fontRef idx="minor">
+            <a:schemeClr val="lt1"/>
+          </a:fontRef>
+        </p:style>
+        <p:txBody>
+          <a:bodyPr rtlCol="0" anchor="ctr"/>
+          <a:p>
+            <a:pPr algn="ctr"/>
+            <a:endParaRPr lang="zh-CN" altLang="en-US"/>
+          </a:p>
+        </p:txBody>
+      </p:sp>
+    </p:spTree>
+  </p:cSld>
+  <p:clrMapOvr>
+    <a:masterClrMapping/>
+  </p:clrMapOvr>
+  <mc:AlternateContent xmlns:mc="http://schemas.openxmlformats.org/markup-compatibility/2006" xmlns:p159="http://schemas.microsoft.com/office/powerpoint/2015/09/main">
+    <mc:Choice Requires="p159">
+      <p:transition xmlns:p14="http://schemas.microsoft.com/office/powerpoint/2010/main" spd="slow" p14:dur="2000">
+        <p159:morph option="byObject"/>
+      </p:transition>
+    </mc:Choice>
+    <mc:Fallback>
+      <p:transition spd="slow">
+        <p:fade/>
+      </p:transition>
+    </mc:Fallback>
+  </mc:AlternateContent>
+  <p:timing>
+    <p:tnLst>
+      <p:par>
+        <p:cTn id="1" dur="indefinite" restart="never" nodeType="tmRoot">
+          <p:childTnLst>
+            <p:seq concurrent="1" nextAc="seek">
+              <p:cTn id="2" dur="indefinite" nodeType="mainSeq">
+                <p:childTnLst>
+                  <p:par>
+                    <p:cTn id="3" fill="hold">
+                      <p:stCondLst>
+                        <p:cond delay="indefinite"/>
+                      </p:stCondLst>
+                      <p:childTnLst>
+                        <p:par>
+                          <p:cTn id="4" fill="hold">
+                            <p:stCondLst>
+                              <p:cond delay="0"/>
+                            </p:stCondLst>
+                            <p:childTnLst>
+                              <p:par>
+                                <p:cTn id="5" presetID="18" presetClass="entr" presetSubtype="12" fill="hold" grpId="0" nodeType="clickEffect">
+                                  <p:stCondLst>
+                                    <p:cond delay="0"/>
+                                  </p:stCondLst>
+                                  <p:childTnLst>
+                                    <p:set>
+                                      <p:cBhvr>
+                                        <p:cTn id="6" dur="1" fill="hold">
+                                          <p:stCondLst>
+                                            <p:cond delay="0"/>
+                                          </p:stCondLst>
+                                        </p:cTn>
+                                        <p:tgtEl>
+                                          <p:spTgt spid="2"/>
+                                        </p:tgtEl>
+                                        <p:attrNameLst>
+                                          <p:attrName>style.visibility</p:attrName>
+                                        </p:attrNameLst>
+                                      </p:cBhvr>
+                                      <p:to>
+                                        <p:strVal val="visible"/>
+                                      </p:to>
+                                    </p:set>
+                                    <p:animEffect transition="in" filter="strips(downLeft)">
+                                      <p:cBhvr>
+                                        <p:cTn id="7" dur="500"/>
+                                        <p:tgtEl>
+                                          <p:spTgt spid="2"/>
+                                        </p:tgtEl>
+                                      </p:cBhvr>
+                                    </p:animEffect>
+                                  </p:childTnLst>
+                                </p:cTn>
+                              </p:par>
+                            </p:childTnLst>
+                          </p:cTn>
+                        </p:par>
+                      </p:childTnLst>
+                    </p:cTn>
+                  </p:par>
+                </p:childTnLst>
+              </p:cTn>
+              <p:prevCondLst>
+                <p:cond evt="onPrev" delay="0">
+                  <p:tgtEl>
+                    <p:sldTgt/>
+                  </p:tgtEl>
+                </p:cond>
+              </p:prevCondLst>
+              <p:nextCondLst>
+                <p:cond evt="onNext" delay="0">
+                  <p:tgtEl>
+                    <p:sldTgt/>
+                  </p:tgtEl>
+                </p:cond>
+              </p:nextCondLst>
+            </p:seq>
+          </p:childTnLst>
+        </p:cTn>
+      </p:par>
+    </p:tnLst>
+    <p:bldLst>
+      <p:bldP spid="2" grpId="0" animBg="1"/>
+    </p:bldLst>
+  </p:timing>
+</p:sld>
+</file>
+
+<file path=ppt/slides/slide11.xml><?xml version="1.0" encoding="utf-8"?>
+<p:sld xmlns:a="http://schemas.openxmlformats.org/drawingml/2006/main" xmlns:r="http://schemas.openxmlformats.org/officeDocument/2006/relationships" xmlns:p="http://schemas.openxmlformats.org/presentationml/2006/main">
+  <p:cSld>
+    <p:spTree>
+      <p:nvGrpSpPr>
+        <p:cNvPr id="1" name=""/>
+        <p:cNvGrpSpPr/>
+        <p:nvPr/>
+      </p:nvGrpSpPr>
+      <p:grpSpPr/>
+      <p:sp>
+        <p:nvSpPr>
+          <p:cNvPr id="11" name="文本框 10"/>
+          <p:cNvSpPr txBox="1"/>
+          <p:nvPr/>
+        </p:nvSpPr>
+        <p:spPr>
+          <a:xfrm>
+            <a:off x="285115" y="0"/>
+            <a:ext cx="3749040" cy="866140"/>
+          </a:xfrm>
+          <a:prstGeom prst="rect">
+            <a:avLst/>
+          </a:prstGeom>
+          <a:noFill/>
+        </p:spPr>
+        <p:txBody>
+          <a:bodyPr wrap="square" rtlCol="0">
+            <a:spAutoFit/>
+          </a:bodyPr>
+          <a:p>
+            <a:pPr lvl="0" indent="0" algn="l">
+              <a:lnSpc>
+                <a:spcPct val="180000"/>
+              </a:lnSpc>
+              <a:buClrTx/>
+              <a:buSzTx/>
+              <a:buFont typeface="Arial" panose="020B0604020202020204" pitchFamily="34" charset="0"/>
+              <a:buNone/>
+            </a:pPr>
+            <a:r>
+              <a:rPr lang="en-US" altLang="zh-CN" sz="2800">
+                <a:latin typeface="楷体" panose="02010609060101010101" charset="-122"/>
+                <a:ea typeface="楷体" panose="02010609060101010101" charset="-122"/>
+                <a:cs typeface="楷体" panose="02010609060101010101" charset="-122"/>
+                <a:sym typeface="+mn-ea"/>
+              </a:rPr>
+              <a:t>C</a:t>
+            </a:r>
+            <a:r>
+              <a:rPr lang="zh-CN" altLang="en-US" sz="2800">
+                <a:latin typeface="楷体" panose="02010609060101010101" charset="-122"/>
+                <a:ea typeface="楷体" panose="02010609060101010101" charset="-122"/>
+                <a:cs typeface="楷体" panose="02010609060101010101" charset="-122"/>
+                <a:sym typeface="+mn-ea"/>
+              </a:rPr>
+              <a:t>语言结构体实现</a:t>
+            </a:r>
+            <a:endParaRPr lang="zh-CN" altLang="en-US" sz="2800">
+              <a:latin typeface="楷体" panose="02010609060101010101" charset="-122"/>
+              <a:ea typeface="楷体" panose="02010609060101010101" charset="-122"/>
+              <a:cs typeface="楷体" panose="02010609060101010101" charset="-122"/>
+            </a:endParaRPr>
+          </a:p>
+        </p:txBody>
+      </p:sp>
+      <p:sp>
+        <p:nvSpPr>
+          <p:cNvPr id="3" name="圆角矩形 2"/>
+          <p:cNvSpPr/>
+          <p:nvPr/>
+        </p:nvSpPr>
+        <p:spPr>
+          <a:xfrm>
+            <a:off x="1553845" y="2557145"/>
+            <a:ext cx="1901825" cy="1962785"/>
+          </a:xfrm>
+          <a:prstGeom prst="roundRect">
+            <a:avLst/>
+          </a:prstGeom>
+          <a:solidFill>
+            <a:srgbClr val="85BBE7"/>
+          </a:solidFill>
+          <a:ln>
+            <a:noFill/>
+          </a:ln>
+        </p:spPr>
+        <p:style>
+          <a:lnRef idx="2">
+            <a:schemeClr val="accent1">
+              <a:lumMod val="75000"/>
+            </a:schemeClr>
+          </a:lnRef>
+          <a:fillRef idx="1">
+            <a:schemeClr val="accent1"/>
+          </a:fillRef>
+          <a:effectRef idx="0">
+            <a:srgbClr val="FFFFFF"/>
+          </a:effectRef>
+          <a:fontRef idx="minor">
+            <a:schemeClr val="lt1"/>
+          </a:fontRef>
+        </p:style>
+        <p:txBody>
+          <a:bodyPr vertOverflow="overflow" horzOverflow="overflow" vert="horz" wrap="square" numCol="1" spcCol="0" rtlCol="0" fromWordArt="0" anchor="ctr" anchorCtr="0" forceAA="0" compatLnSpc="1">
+            <a:noAutofit/>
+          </a:bodyPr>
+          <a:p>
+            <a:pPr lvl="0" algn="ctr">
+              <a:buClrTx/>
+              <a:buSzTx/>
+              <a:buFontTx/>
+            </a:pPr>
+            <a:r>
+              <a:rPr lang="zh-CN" altLang="en-US" sz="3200" b="1">
+                <a:solidFill>
+                  <a:schemeClr val="tx1"/>
+                </a:solidFill>
+                <a:latin typeface="微软雅黑" panose="020B0503020204020204" charset="-122"/>
+                <a:ea typeface="微软雅黑" panose="020B0503020204020204" charset="-122"/>
+                <a:sym typeface="+mn-ea"/>
+              </a:rPr>
+              <a:t>指针</a:t>
+            </a:r>
+            <a:endParaRPr lang="zh-CN" altLang="en-US" sz="3200" b="1">
+              <a:solidFill>
+                <a:schemeClr val="tx1"/>
+              </a:solidFill>
+              <a:latin typeface="微软雅黑" panose="020B0503020204020204" charset="-122"/>
+              <a:ea typeface="微软雅黑" panose="020B0503020204020204" charset="-122"/>
+              <a:sym typeface="+mn-ea"/>
+            </a:endParaRPr>
+          </a:p>
+        </p:txBody>
+      </p:sp>
+      <p:sp>
+        <p:nvSpPr>
+          <p:cNvPr id="4" name="圆角矩形 3"/>
+          <p:cNvSpPr/>
+          <p:nvPr/>
+        </p:nvSpPr>
+        <p:spPr>
+          <a:xfrm>
+            <a:off x="5281295" y="2557145"/>
+            <a:ext cx="1901825" cy="1962150"/>
+          </a:xfrm>
+          <a:prstGeom prst="roundRect">
+            <a:avLst/>
+          </a:prstGeom>
+          <a:solidFill>
+            <a:srgbClr val="85BBE7"/>
+          </a:solidFill>
+          <a:ln>
+            <a:noFill/>
+          </a:ln>
+        </p:spPr>
+        <p:style>
+          <a:lnRef idx="2">
+            <a:schemeClr val="accent1">
+              <a:lumMod val="75000"/>
+            </a:schemeClr>
+          </a:lnRef>
+          <a:fillRef idx="1">
+            <a:schemeClr val="accent1"/>
+          </a:fillRef>
+          <a:effectRef idx="0">
+            <a:srgbClr val="FFFFFF"/>
+          </a:effectRef>
+          <a:fontRef idx="minor">
+            <a:schemeClr val="lt1"/>
+          </a:fontRef>
+        </p:style>
+        <p:txBody>
+          <a:bodyPr vertOverflow="overflow" horzOverflow="overflow" vert="horz" wrap="square" numCol="1" spcCol="0" rtlCol="0" fromWordArt="0" anchor="ctr" anchorCtr="0" forceAA="0" compatLnSpc="1">
+            <a:noAutofit/>
+          </a:bodyPr>
+          <a:p>
+            <a:pPr lvl="0" algn="ctr">
+              <a:buClrTx/>
+              <a:buSzTx/>
+              <a:buFontTx/>
+            </a:pPr>
+            <a:r>
+              <a:rPr lang="zh-CN" altLang="en-US" sz="3200" b="1">
+                <a:solidFill>
+                  <a:schemeClr val="tx1"/>
+                </a:solidFill>
+                <a:latin typeface="微软雅黑" panose="020B0503020204020204" charset="-122"/>
+                <a:ea typeface="微软雅黑" panose="020B0503020204020204" charset="-122"/>
+                <a:sym typeface="+mn-ea"/>
+              </a:rPr>
+              <a:t>结构体</a:t>
+            </a:r>
+            <a:endParaRPr lang="zh-CN" altLang="en-US" sz="3200" b="1">
+              <a:solidFill>
+                <a:schemeClr val="tx1"/>
+              </a:solidFill>
+              <a:latin typeface="微软雅黑" panose="020B0503020204020204" charset="-122"/>
+              <a:ea typeface="微软雅黑" panose="020B0503020204020204" charset="-122"/>
+              <a:sym typeface="+mn-ea"/>
+            </a:endParaRPr>
+          </a:p>
+        </p:txBody>
+      </p:sp>
+      <p:sp>
+        <p:nvSpPr>
+          <p:cNvPr id="5" name="圆角矩形 4"/>
+          <p:cNvSpPr/>
+          <p:nvPr/>
+        </p:nvSpPr>
+        <p:spPr>
+          <a:xfrm>
+            <a:off x="9008745" y="2557145"/>
+            <a:ext cx="1901825" cy="1962150"/>
+          </a:xfrm>
+          <a:prstGeom prst="roundRect">
+            <a:avLst/>
+          </a:prstGeom>
+          <a:solidFill>
+            <a:srgbClr val="85BBE7"/>
+          </a:solidFill>
+          <a:ln>
+            <a:noFill/>
+          </a:ln>
+        </p:spPr>
+        <p:style>
+          <a:lnRef idx="2">
+            <a:schemeClr val="accent1">
+              <a:lumMod val="75000"/>
+            </a:schemeClr>
+          </a:lnRef>
+          <a:fillRef idx="1">
+            <a:schemeClr val="accent1"/>
+          </a:fillRef>
+          <a:effectRef idx="0">
+            <a:srgbClr val="FFFFFF"/>
+          </a:effectRef>
+          <a:fontRef idx="minor">
+            <a:schemeClr val="lt1"/>
+          </a:fontRef>
+        </p:style>
+        <p:txBody>
+          <a:bodyPr vertOverflow="overflow" horzOverflow="overflow" vert="horz" wrap="square" numCol="1" spcCol="0" rtlCol="0" fromWordArt="0" anchor="ctr" anchorCtr="0" forceAA="0" compatLnSpc="1">
+            <a:noAutofit/>
+          </a:bodyPr>
+          <a:p>
+            <a:pPr lvl="0" algn="ctr">
+              <a:buClrTx/>
+              <a:buSzTx/>
+              <a:buFontTx/>
+            </a:pPr>
+            <a:r>
+              <a:rPr lang="zh-CN" altLang="en-US" sz="3200" b="1">
+                <a:solidFill>
+                  <a:schemeClr val="tx1"/>
+                </a:solidFill>
+                <a:latin typeface="微软雅黑" panose="020B0503020204020204" charset="-122"/>
+                <a:ea typeface="微软雅黑" panose="020B0503020204020204" charset="-122"/>
+                <a:sym typeface="+mn-ea"/>
+              </a:rPr>
+              <a:t>内存</a:t>
+            </a:r>
+            <a:endParaRPr lang="zh-CN" altLang="en-US" sz="3200" b="1">
+              <a:solidFill>
+                <a:schemeClr val="tx1"/>
+              </a:solidFill>
+              <a:latin typeface="微软雅黑" panose="020B0503020204020204" charset="-122"/>
+              <a:ea typeface="微软雅黑" panose="020B0503020204020204" charset="-122"/>
+              <a:sym typeface="+mn-ea"/>
+            </a:endParaRPr>
+          </a:p>
+        </p:txBody>
+      </p:sp>
+    </p:spTree>
+  </p:cSld>
+  <p:clrMapOvr>
+    <a:masterClrMapping/>
+  </p:clrMapOvr>
+  <mc:AlternateContent xmlns:mc="http://schemas.openxmlformats.org/markup-compatibility/2006" xmlns:p159="http://schemas.microsoft.com/office/powerpoint/2015/09/main">
+    <mc:Choice Requires="p159">
+      <p:transition xmlns:p14="http://schemas.microsoft.com/office/powerpoint/2010/main" spd="slow" p14:dur="2000">
+        <p159:morph option="byObject"/>
+      </p:transition>
+    </mc:Choice>
+    <mc:Fallback>
+      <p:transition spd="slow">
+        <p:fade/>
+      </p:transition>
+    </mc:Fallback>
+  </mc:AlternateContent>
+  <p:timing>
+    <p:tnLst>
+      <p:par>
+        <p:cTn id="1" dur="indefinite" restart="never" nodeType="tmRoot"/>
+      </p:par>
+    </p:tnLst>
+  </p:timing>
+</p:sld>
+</file>
+
+<file path=ppt/slides/slide12.xml><?xml version="1.0" encoding="utf-8"?>
+<p:sld xmlns:a="http://schemas.openxmlformats.org/drawingml/2006/main" xmlns:r="http://schemas.openxmlformats.org/officeDocument/2006/relationships" xmlns:p="http://schemas.openxmlformats.org/presentationml/2006/main">
+  <p:cSld>
+    <p:spTree>
+      <p:nvGrpSpPr>
+        <p:cNvPr id="1" name=""/>
+        <p:cNvGrpSpPr/>
+        <p:nvPr/>
+      </p:nvGrpSpPr>
+      <p:grpSpPr/>
     </p:spTree>
   </p:cSld>
   <p:clrMapOvr>
@@ -3616,7 +4238,7 @@
         </p:nvSpPr>
         <p:spPr>
           <a:xfrm>
-            <a:off x="6790055" y="0"/>
+            <a:off x="6718935" y="0"/>
             <a:ext cx="10817225" cy="6859270"/>
           </a:xfrm>
           <a:prstGeom prst="ellipse">
@@ -3850,7 +4472,7 @@
         <p:spPr>
           <a:xfrm>
             <a:off x="1664970" y="2693035"/>
-            <a:ext cx="3749040" cy="3192145"/>
+            <a:ext cx="3749040" cy="866140"/>
           </a:xfrm>
           <a:prstGeom prst="rect">
             <a:avLst/>
@@ -3899,11 +4521,35 @@
               <a:cs typeface="楷体" panose="02010609060101010101" charset="-122"/>
             </a:endParaRPr>
           </a:p>
-          <a:p>
-            <a:pPr marL="285750" indent="-285750">
+        </p:txBody>
+      </p:sp>
+      <p:sp>
+        <p:nvSpPr>
+          <p:cNvPr id="2" name="文本框 1"/>
+          <p:cNvSpPr txBox="1"/>
+          <p:nvPr/>
+        </p:nvSpPr>
+        <p:spPr>
+          <a:xfrm>
+            <a:off x="1664970" y="3622040"/>
+            <a:ext cx="3830955" cy="866140"/>
+          </a:xfrm>
+          <a:prstGeom prst="rect">
+            <a:avLst/>
+          </a:prstGeom>
+          <a:noFill/>
+        </p:spPr>
+        <p:txBody>
+          <a:bodyPr wrap="square" rtlCol="0">
+            <a:spAutoFit/>
+          </a:bodyPr>
+          <a:p>
+            <a:pPr marL="285750" lvl="0" indent="-285750" algn="l">
               <a:lnSpc>
                 <a:spcPct val="180000"/>
               </a:lnSpc>
+              <a:buClrTx/>
+              <a:buSzTx/>
               <a:buFont typeface="Arial" panose="020B0604020202020204" pitchFamily="34" charset="0"/>
               <a:buChar char="•"/>
             </a:pPr>
@@ -3912,24 +4558,57 @@
                 <a:latin typeface="楷体" panose="02010609060101010101" charset="-122"/>
                 <a:ea typeface="楷体" panose="02010609060101010101" charset="-122"/>
                 <a:cs typeface="楷体" panose="02010609060101010101" charset="-122"/>
+                <a:sym typeface="+mn-ea"/>
               </a:rPr>
-              <a:t>图片</a:t>
-            </a:r>
-            <a:r>
-              <a:rPr lang="en-US" altLang="zh-CN" sz="2800">
-                <a:latin typeface="楷体" panose="02010609060101010101" charset="-122"/>
-                <a:ea typeface="楷体" panose="02010609060101010101" charset="-122"/>
-                <a:cs typeface="楷体" panose="02010609060101010101" charset="-122"/>
-              </a:rPr>
-              <a:t>+</a:t>
-            </a:r>
+              <a:t>图片+动画讲解原理</a:t>
+            </a:r>
+            <a:endParaRPr lang="zh-CN" altLang="en-US" sz="2800">
+              <a:latin typeface="楷体" panose="02010609060101010101" charset="-122"/>
+              <a:ea typeface="楷体" panose="02010609060101010101" charset="-122"/>
+              <a:cs typeface="楷体" panose="02010609060101010101" charset="-122"/>
+              <a:sym typeface="+mn-ea"/>
+            </a:endParaRPr>
+          </a:p>
+        </p:txBody>
+      </p:sp>
+      <p:sp>
+        <p:nvSpPr>
+          <p:cNvPr id="3" name="文本框 2"/>
+          <p:cNvSpPr txBox="1"/>
+          <p:nvPr/>
+        </p:nvSpPr>
+        <p:spPr>
+          <a:xfrm>
+            <a:off x="1664970" y="4551045"/>
+            <a:ext cx="3337560" cy="866140"/>
+          </a:xfrm>
+          <a:prstGeom prst="rect">
+            <a:avLst/>
+          </a:prstGeom>
+          <a:noFill/>
+        </p:spPr>
+        <p:txBody>
+          <a:bodyPr wrap="square" rtlCol="0">
+            <a:spAutoFit/>
+          </a:bodyPr>
+          <a:p>
+            <a:pPr marL="285750" indent="-285750" algn="l">
+              <a:lnSpc>
+                <a:spcPct val="180000"/>
+              </a:lnSpc>
+              <a:buClrTx/>
+              <a:buSzTx/>
+              <a:buFont typeface="Arial" panose="020B0604020202020204" pitchFamily="34" charset="0"/>
+              <a:buChar char="•"/>
+            </a:pPr>
             <a:r>
               <a:rPr lang="zh-CN" altLang="en-US" sz="2800">
                 <a:latin typeface="楷体" panose="02010609060101010101" charset="-122"/>
                 <a:ea typeface="楷体" panose="02010609060101010101" charset="-122"/>
                 <a:cs typeface="楷体" panose="02010609060101010101" charset="-122"/>
+                <a:sym typeface="+mn-ea"/>
               </a:rPr>
-              <a:t>动画讲解原理</a:t>
+              <a:t>代码实现讲解</a:t>
             </a:r>
             <a:endParaRPr lang="zh-CN" altLang="en-US" sz="2800">
               <a:latin typeface="楷体" panose="02010609060101010101" charset="-122"/>
@@ -3937,11 +4616,35 @@
               <a:cs typeface="楷体" panose="02010609060101010101" charset="-122"/>
             </a:endParaRPr>
           </a:p>
-          <a:p>
-            <a:pPr marL="285750" indent="-285750">
+        </p:txBody>
+      </p:sp>
+      <p:sp>
+        <p:nvSpPr>
+          <p:cNvPr id="6" name="文本框 5"/>
+          <p:cNvSpPr txBox="1"/>
+          <p:nvPr/>
+        </p:nvSpPr>
+        <p:spPr>
+          <a:xfrm>
+            <a:off x="1664970" y="5480050"/>
+            <a:ext cx="2581910" cy="866140"/>
+          </a:xfrm>
+          <a:prstGeom prst="rect">
+            <a:avLst/>
+          </a:prstGeom>
+          <a:noFill/>
+        </p:spPr>
+        <p:txBody>
+          <a:bodyPr wrap="square" rtlCol="0">
+            <a:spAutoFit/>
+          </a:bodyPr>
+          <a:p>
+            <a:pPr marL="285750" indent="-285750" algn="l">
               <a:lnSpc>
                 <a:spcPct val="180000"/>
               </a:lnSpc>
+              <a:buClrTx/>
+              <a:buSzTx/>
               <a:buFont typeface="Arial" panose="020B0604020202020204" pitchFamily="34" charset="0"/>
               <a:buChar char="•"/>
             </a:pPr>
@@ -3950,28 +4653,7 @@
                 <a:latin typeface="楷体" panose="02010609060101010101" charset="-122"/>
                 <a:ea typeface="楷体" panose="02010609060101010101" charset="-122"/>
                 <a:cs typeface="楷体" panose="02010609060101010101" charset="-122"/>
-              </a:rPr>
-              <a:t>代码实现讲解</a:t>
-            </a:r>
-            <a:endParaRPr lang="zh-CN" altLang="en-US" sz="2800">
-              <a:latin typeface="楷体" panose="02010609060101010101" charset="-122"/>
-              <a:ea typeface="楷体" panose="02010609060101010101" charset="-122"/>
-              <a:cs typeface="楷体" panose="02010609060101010101" charset="-122"/>
-            </a:endParaRPr>
-          </a:p>
-          <a:p>
-            <a:pPr marL="285750" indent="-285750">
-              <a:lnSpc>
-                <a:spcPct val="180000"/>
-              </a:lnSpc>
-              <a:buFont typeface="Arial" panose="020B0604020202020204" pitchFamily="34" charset="0"/>
-              <a:buChar char="•"/>
-            </a:pPr>
-            <a:r>
-              <a:rPr lang="zh-CN" altLang="en-US" sz="2800">
-                <a:latin typeface="楷体" panose="02010609060101010101" charset="-122"/>
-                <a:ea typeface="楷体" panose="02010609060101010101" charset="-122"/>
-                <a:cs typeface="楷体" panose="02010609060101010101" charset="-122"/>
+                <a:sym typeface="+mn-ea"/>
               </a:rPr>
               <a:t>题目应用</a:t>
             </a:r>
@@ -4000,6 +4682,4803 @@
       </p:transition>
     </mc:Fallback>
   </mc:AlternateContent>
+  <p:timing>
+    <p:tnLst>
+      <p:par>
+        <p:cTn id="1" dur="indefinite" restart="never" nodeType="tmRoot">
+          <p:childTnLst>
+            <p:seq concurrent="1" nextAc="seek">
+              <p:cTn id="2" dur="indefinite" nodeType="mainSeq">
+                <p:childTnLst>
+                  <p:par>
+                    <p:cTn id="3" fill="hold">
+                      <p:stCondLst>
+                        <p:cond delay="indefinite"/>
+                      </p:stCondLst>
+                      <p:childTnLst>
+                        <p:par>
+                          <p:cTn id="4" fill="hold">
+                            <p:stCondLst>
+                              <p:cond delay="0"/>
+                            </p:stCondLst>
+                            <p:childTnLst>
+                              <p:par>
+                                <p:cTn id="5" presetID="22" presetClass="entr" presetSubtype="4" fill="hold" grpId="0" nodeType="clickEffect">
+                                  <p:stCondLst>
+                                    <p:cond delay="0"/>
+                                  </p:stCondLst>
+                                  <p:childTnLst>
+                                    <p:set>
+                                      <p:cBhvr>
+                                        <p:cTn id="6" dur="1" fill="hold">
+                                          <p:stCondLst>
+                                            <p:cond delay="0"/>
+                                          </p:stCondLst>
+                                        </p:cTn>
+                                        <p:tgtEl>
+                                          <p:spTgt spid="11"/>
+                                        </p:tgtEl>
+                                        <p:attrNameLst>
+                                          <p:attrName>style.visibility</p:attrName>
+                                        </p:attrNameLst>
+                                      </p:cBhvr>
+                                      <p:to>
+                                        <p:strVal val="visible"/>
+                                      </p:to>
+                                    </p:set>
+                                    <p:animEffect transition="in" filter="wipe(down)">
+                                      <p:cBhvr>
+                                        <p:cTn id="7" dur="500"/>
+                                        <p:tgtEl>
+                                          <p:spTgt spid="11"/>
+                                        </p:tgtEl>
+                                      </p:cBhvr>
+                                    </p:animEffect>
+                                  </p:childTnLst>
+                                </p:cTn>
+                              </p:par>
+                            </p:childTnLst>
+                          </p:cTn>
+                        </p:par>
+                      </p:childTnLst>
+                    </p:cTn>
+                  </p:par>
+                  <p:par>
+                    <p:cTn id="8" fill="hold">
+                      <p:stCondLst>
+                        <p:cond delay="indefinite"/>
+                      </p:stCondLst>
+                      <p:childTnLst>
+                        <p:par>
+                          <p:cTn id="9" fill="hold">
+                            <p:stCondLst>
+                              <p:cond delay="0"/>
+                            </p:stCondLst>
+                            <p:childTnLst>
+                              <p:par>
+                                <p:cTn id="10" presetID="22" presetClass="entr" presetSubtype="4" fill="hold" grpId="0" nodeType="clickEffect">
+                                  <p:stCondLst>
+                                    <p:cond delay="0"/>
+                                  </p:stCondLst>
+                                  <p:childTnLst>
+                                    <p:set>
+                                      <p:cBhvr>
+                                        <p:cTn id="11" dur="1" fill="hold">
+                                          <p:stCondLst>
+                                            <p:cond delay="0"/>
+                                          </p:stCondLst>
+                                        </p:cTn>
+                                        <p:tgtEl>
+                                          <p:spTgt spid="2"/>
+                                        </p:tgtEl>
+                                        <p:attrNameLst>
+                                          <p:attrName>style.visibility</p:attrName>
+                                        </p:attrNameLst>
+                                      </p:cBhvr>
+                                      <p:to>
+                                        <p:strVal val="visible"/>
+                                      </p:to>
+                                    </p:set>
+                                    <p:animEffect transition="in" filter="wipe(down)">
+                                      <p:cBhvr>
+                                        <p:cTn id="12" dur="500"/>
+                                        <p:tgtEl>
+                                          <p:spTgt spid="2"/>
+                                        </p:tgtEl>
+                                      </p:cBhvr>
+                                    </p:animEffect>
+                                  </p:childTnLst>
+                                </p:cTn>
+                              </p:par>
+                            </p:childTnLst>
+                          </p:cTn>
+                        </p:par>
+                      </p:childTnLst>
+                    </p:cTn>
+                  </p:par>
+                  <p:par>
+                    <p:cTn id="13" fill="hold">
+                      <p:stCondLst>
+                        <p:cond delay="indefinite"/>
+                      </p:stCondLst>
+                      <p:childTnLst>
+                        <p:par>
+                          <p:cTn id="14" fill="hold">
+                            <p:stCondLst>
+                              <p:cond delay="0"/>
+                            </p:stCondLst>
+                            <p:childTnLst>
+                              <p:par>
+                                <p:cTn id="15" presetID="22" presetClass="entr" presetSubtype="4" fill="hold" grpId="0" nodeType="clickEffect">
+                                  <p:stCondLst>
+                                    <p:cond delay="0"/>
+                                  </p:stCondLst>
+                                  <p:childTnLst>
+                                    <p:set>
+                                      <p:cBhvr>
+                                        <p:cTn id="16" dur="1" fill="hold">
+                                          <p:stCondLst>
+                                            <p:cond delay="0"/>
+                                          </p:stCondLst>
+                                        </p:cTn>
+                                        <p:tgtEl>
+                                          <p:spTgt spid="3"/>
+                                        </p:tgtEl>
+                                        <p:attrNameLst>
+                                          <p:attrName>style.visibility</p:attrName>
+                                        </p:attrNameLst>
+                                      </p:cBhvr>
+                                      <p:to>
+                                        <p:strVal val="visible"/>
+                                      </p:to>
+                                    </p:set>
+                                    <p:animEffect transition="in" filter="wipe(down)">
+                                      <p:cBhvr>
+                                        <p:cTn id="17" dur="500"/>
+                                        <p:tgtEl>
+                                          <p:spTgt spid="3"/>
+                                        </p:tgtEl>
+                                      </p:cBhvr>
+                                    </p:animEffect>
+                                  </p:childTnLst>
+                                </p:cTn>
+                              </p:par>
+                            </p:childTnLst>
+                          </p:cTn>
+                        </p:par>
+                      </p:childTnLst>
+                    </p:cTn>
+                  </p:par>
+                  <p:par>
+                    <p:cTn id="18" fill="hold">
+                      <p:stCondLst>
+                        <p:cond delay="indefinite"/>
+                      </p:stCondLst>
+                      <p:childTnLst>
+                        <p:par>
+                          <p:cTn id="19" fill="hold">
+                            <p:stCondLst>
+                              <p:cond delay="0"/>
+                            </p:stCondLst>
+                            <p:childTnLst>
+                              <p:par>
+                                <p:cTn id="20" presetID="22" presetClass="entr" presetSubtype="4" fill="hold" grpId="0" nodeType="clickEffect">
+                                  <p:stCondLst>
+                                    <p:cond delay="0"/>
+                                  </p:stCondLst>
+                                  <p:childTnLst>
+                                    <p:set>
+                                      <p:cBhvr>
+                                        <p:cTn id="21" dur="1" fill="hold">
+                                          <p:stCondLst>
+                                            <p:cond delay="0"/>
+                                          </p:stCondLst>
+                                        </p:cTn>
+                                        <p:tgtEl>
+                                          <p:spTgt spid="6"/>
+                                        </p:tgtEl>
+                                        <p:attrNameLst>
+                                          <p:attrName>style.visibility</p:attrName>
+                                        </p:attrNameLst>
+                                      </p:cBhvr>
+                                      <p:to>
+                                        <p:strVal val="visible"/>
+                                      </p:to>
+                                    </p:set>
+                                    <p:animEffect transition="in" filter="wipe(down)">
+                                      <p:cBhvr>
+                                        <p:cTn id="22" dur="500"/>
+                                        <p:tgtEl>
+                                          <p:spTgt spid="6"/>
+                                        </p:tgtEl>
+                                      </p:cBhvr>
+                                    </p:animEffect>
+                                  </p:childTnLst>
+                                </p:cTn>
+                              </p:par>
+                            </p:childTnLst>
+                          </p:cTn>
+                        </p:par>
+                      </p:childTnLst>
+                    </p:cTn>
+                  </p:par>
+                </p:childTnLst>
+              </p:cTn>
+              <p:prevCondLst>
+                <p:cond evt="onPrev" delay="0">
+                  <p:tgtEl>
+                    <p:sldTgt/>
+                  </p:tgtEl>
+                </p:cond>
+              </p:prevCondLst>
+              <p:nextCondLst>
+                <p:cond evt="onNext" delay="0">
+                  <p:tgtEl>
+                    <p:sldTgt/>
+                  </p:tgtEl>
+                </p:cond>
+              </p:nextCondLst>
+            </p:seq>
+          </p:childTnLst>
+        </p:cTn>
+      </p:par>
+    </p:tnLst>
+    <p:bldLst>
+      <p:bldP spid="11" grpId="0"/>
+      <p:bldP spid="2" grpId="0"/>
+      <p:bldP spid="3" grpId="0"/>
+      <p:bldP spid="6" grpId="0"/>
+    </p:bldLst>
+  </p:timing>
+</p:sld>
+</file>
+
+<file path=ppt/slides/slide3.xml><?xml version="1.0" encoding="utf-8"?>
+<p:sld xmlns:a="http://schemas.openxmlformats.org/drawingml/2006/main" xmlns:r="http://schemas.openxmlformats.org/officeDocument/2006/relationships" xmlns:p="http://schemas.openxmlformats.org/presentationml/2006/main">
+  <p:cSld>
+    <p:spTree>
+      <p:nvGrpSpPr>
+        <p:cNvPr id="1" name=""/>
+        <p:cNvGrpSpPr/>
+        <p:nvPr/>
+      </p:nvGrpSpPr>
+      <p:grpSpPr/>
+      <p:sp>
+        <p:nvSpPr>
+          <p:cNvPr id="13" name="标题 12"/>
+          <p:cNvSpPr>
+            <a:spLocks noGrp="1"/>
+          </p:cNvSpPr>
+          <p:nvPr>
+            <p:ph type="ctrTitle"/>
+          </p:nvPr>
+        </p:nvSpPr>
+        <p:spPr>
+          <a:xfrm>
+            <a:off x="4215765" y="2542540"/>
+            <a:ext cx="3759835" cy="1772920"/>
+          </a:xfrm>
+        </p:spPr>
+        <p:txBody>
+          <a:bodyPr>
+            <a:noAutofit/>
+          </a:bodyPr>
+          <a:p>
+            <a:pPr algn="ctr">
+              <a:lnSpc>
+                <a:spcPct val="130000"/>
+              </a:lnSpc>
+              <a:buClrTx/>
+              <a:buSzTx/>
+              <a:buFontTx/>
+            </a:pPr>
+            <a:r>
+              <a:rPr lang="en-US" altLang="zh-CN" sz="6000" b="1" dirty="0">
+                <a:latin typeface="微软雅黑" panose="020B0503020204020204" charset="-122"/>
+                <a:ea typeface="微软雅黑" panose="020B0503020204020204" charset="-122"/>
+              </a:rPr>
+              <a:t>Stack</a:t>
+            </a:r>
+            <a:endParaRPr lang="en-US" altLang="zh-CN" sz="6000" b="1" dirty="0">
+              <a:latin typeface="微软雅黑" panose="020B0503020204020204" charset="-122"/>
+              <a:ea typeface="微软雅黑" panose="020B0503020204020204" charset="-122"/>
+            </a:endParaRPr>
+          </a:p>
+        </p:txBody>
+      </p:sp>
+      <p:sp>
+        <p:nvSpPr>
+          <p:cNvPr id="39" name="文本框 38"/>
+          <p:cNvSpPr txBox="1"/>
+          <p:nvPr/>
+        </p:nvSpPr>
+        <p:spPr>
+          <a:xfrm>
+            <a:off x="1088390" y="7226935"/>
+            <a:ext cx="3463290" cy="4154170"/>
+          </a:xfrm>
+          <a:prstGeom prst="rect">
+            <a:avLst/>
+          </a:prstGeom>
+          <a:noFill/>
+        </p:spPr>
+        <p:txBody>
+          <a:bodyPr wrap="square" rtlCol="0">
+            <a:spAutoFit/>
+          </a:bodyPr>
+          <a:p>
+            <a:pPr algn="just"/>
+            <a:r>
+              <a:rPr lang="zh-CN" altLang="en-US" sz="2400">
+                <a:latin typeface="微软雅黑" panose="020B0503020204020204" charset="-122"/>
+                <a:ea typeface="微软雅黑" panose="020B0503020204020204" charset="-122"/>
+                <a:cs typeface="微软雅黑" panose="020B0503020204020204" charset="-122"/>
+              </a:rPr>
+              <a:t>栈（stack）是一种“</a:t>
+            </a:r>
+            <a:r>
+              <a:rPr lang="zh-CN" altLang="en-US" sz="2400" b="1">
+                <a:solidFill>
+                  <a:srgbClr val="FF0000"/>
+                </a:solidFill>
+                <a:latin typeface="微软雅黑" panose="020B0503020204020204" charset="-122"/>
+                <a:ea typeface="微软雅黑" panose="020B0503020204020204" charset="-122"/>
+                <a:cs typeface="微软雅黑" panose="020B0503020204020204" charset="-122"/>
+              </a:rPr>
+              <a:t>后进先出</a:t>
+            </a:r>
+            <a:r>
+              <a:rPr lang="zh-CN" altLang="en-US" sz="2400">
+                <a:latin typeface="微软雅黑" panose="020B0503020204020204" charset="-122"/>
+                <a:ea typeface="微软雅黑" panose="020B0503020204020204" charset="-122"/>
+                <a:cs typeface="微软雅黑" panose="020B0503020204020204" charset="-122"/>
+              </a:rPr>
+              <a:t>”（LIFO）的数据结构，它是一种运算受限的线性表，只允许在一端进行插入和删除元素的操作，这一端被称为栈顶(top)。另一端称为栈底(bottom)。向栈中添加元素称为入栈（push），移除元素称为出栈（pop）。﻿</a:t>
+            </a:r>
+            <a:endParaRPr lang="zh-CN" altLang="en-US" sz="2400">
+              <a:latin typeface="微软雅黑" panose="020B0503020204020204" charset="-122"/>
+              <a:ea typeface="微软雅黑" panose="020B0503020204020204" charset="-122"/>
+              <a:cs typeface="微软雅黑" panose="020B0503020204020204" charset="-122"/>
+            </a:endParaRPr>
+          </a:p>
+        </p:txBody>
+      </p:sp>
+      <p:grpSp>
+        <p:nvGrpSpPr>
+          <p:cNvPr id="47" name="组合 46"/>
+          <p:cNvGrpSpPr/>
+          <p:nvPr/>
+        </p:nvGrpSpPr>
+        <p:grpSpPr>
+          <a:xfrm>
+            <a:off x="12543155" y="216535"/>
+            <a:ext cx="4204970" cy="6036310"/>
+            <a:chOff x="10480" y="341"/>
+            <a:chExt cx="6622" cy="9506"/>
+          </a:xfrm>
+        </p:grpSpPr>
+        <p:grpSp>
+          <p:nvGrpSpPr>
+            <p:cNvPr id="48" name="组合 47"/>
+            <p:cNvGrpSpPr/>
+            <p:nvPr/>
+          </p:nvGrpSpPr>
+          <p:grpSpPr>
+            <a:xfrm>
+              <a:off x="10480" y="341"/>
+              <a:ext cx="6622" cy="9506"/>
+              <a:chOff x="10480" y="341"/>
+              <a:chExt cx="6622" cy="9506"/>
+            </a:xfrm>
+          </p:grpSpPr>
+          <p:sp>
+            <p:nvSpPr>
+              <p:cNvPr id="49" name="矩形 48"/>
+              <p:cNvSpPr/>
+              <p:nvPr/>
+            </p:nvSpPr>
+            <p:spPr>
+              <a:xfrm>
+                <a:off x="10623" y="954"/>
+                <a:ext cx="6337" cy="8893"/>
+              </a:xfrm>
+              <a:prstGeom prst="rect">
+                <a:avLst/>
+              </a:prstGeom>
+              <a:noFill/>
+              <a:ln w="73025">
+                <a:solidFill>
+                  <a:schemeClr val="accent6"/>
+                </a:solidFill>
+              </a:ln>
+            </p:spPr>
+            <p:style>
+              <a:lnRef idx="2">
+                <a:schemeClr val="accent1">
+                  <a:lumMod val="75000"/>
+                </a:schemeClr>
+              </a:lnRef>
+              <a:fillRef idx="1">
+                <a:schemeClr val="accent1"/>
+              </a:fillRef>
+              <a:effectRef idx="0">
+                <a:srgbClr val="FFFFFF"/>
+              </a:effectRef>
+              <a:fontRef idx="minor">
+                <a:schemeClr val="lt1"/>
+              </a:fontRef>
+            </p:style>
+            <p:txBody>
+              <a:bodyPr rtlCol="0" anchor="ctr"/>
+              <a:p>
+                <a:pPr algn="ctr"/>
+                <a:endParaRPr lang="zh-CN" altLang="en-US"/>
+              </a:p>
+            </p:txBody>
+          </p:sp>
+          <p:sp>
+            <p:nvSpPr>
+              <p:cNvPr id="50" name="矩形 49"/>
+              <p:cNvSpPr/>
+              <p:nvPr/>
+            </p:nvSpPr>
+            <p:spPr>
+              <a:xfrm>
+                <a:off x="10480" y="341"/>
+                <a:ext cx="6622" cy="1286"/>
+              </a:xfrm>
+              <a:prstGeom prst="rect">
+                <a:avLst/>
+              </a:prstGeom>
+              <a:solidFill>
+                <a:schemeClr val="bg1"/>
+              </a:solidFill>
+              <a:ln>
+                <a:noFill/>
+              </a:ln>
+            </p:spPr>
+            <p:style>
+              <a:lnRef idx="2">
+                <a:schemeClr val="accent1">
+                  <a:lumMod val="75000"/>
+                </a:schemeClr>
+              </a:lnRef>
+              <a:fillRef idx="1">
+                <a:schemeClr val="accent1"/>
+              </a:fillRef>
+              <a:effectRef idx="0">
+                <a:srgbClr val="FFFFFF"/>
+              </a:effectRef>
+              <a:fontRef idx="minor">
+                <a:schemeClr val="lt1"/>
+              </a:fontRef>
+            </p:style>
+            <p:txBody>
+              <a:bodyPr rtlCol="0" anchor="ctr"/>
+              <a:p>
+                <a:pPr algn="ctr"/>
+                <a:endParaRPr lang="zh-CN" altLang="en-US"/>
+              </a:p>
+            </p:txBody>
+          </p:sp>
+        </p:grpSp>
+        <p:sp>
+          <p:nvSpPr>
+            <p:cNvPr id="51" name="圆角矩形 50"/>
+            <p:cNvSpPr/>
+            <p:nvPr/>
+          </p:nvSpPr>
+          <p:spPr>
+            <a:xfrm>
+              <a:off x="10766" y="8075"/>
+              <a:ext cx="6066" cy="1635"/>
+            </a:xfrm>
+            <a:prstGeom prst="roundRect">
+              <a:avLst/>
+            </a:prstGeom>
+            <a:solidFill>
+              <a:schemeClr val="accent6"/>
+            </a:solidFill>
+            <a:ln>
+              <a:solidFill>
+                <a:schemeClr val="accent6"/>
+              </a:solidFill>
+            </a:ln>
+          </p:spPr>
+          <p:style>
+            <a:lnRef idx="2">
+              <a:schemeClr val="accent1">
+                <a:lumMod val="75000"/>
+              </a:schemeClr>
+            </a:lnRef>
+            <a:fillRef idx="1">
+              <a:schemeClr val="accent1"/>
+            </a:fillRef>
+            <a:effectRef idx="0">
+              <a:srgbClr val="FFFFFF"/>
+            </a:effectRef>
+            <a:fontRef idx="minor">
+              <a:schemeClr val="lt1"/>
+            </a:fontRef>
+          </p:style>
+          <p:txBody>
+            <a:bodyPr rtlCol="0" anchor="ctr"/>
+            <a:p>
+              <a:pPr algn="ctr"/>
+              <a:endParaRPr lang="zh-CN" altLang="en-US"/>
+            </a:p>
+          </p:txBody>
+        </p:sp>
+        <p:sp>
+          <p:nvSpPr>
+            <p:cNvPr id="52" name="圆角矩形 51"/>
+            <p:cNvSpPr/>
+            <p:nvPr/>
+          </p:nvSpPr>
+          <p:spPr>
+            <a:xfrm>
+              <a:off x="10766" y="6211"/>
+              <a:ext cx="6066" cy="1635"/>
+            </a:xfrm>
+            <a:prstGeom prst="roundRect">
+              <a:avLst/>
+            </a:prstGeom>
+            <a:solidFill>
+              <a:schemeClr val="accent6"/>
+            </a:solidFill>
+            <a:ln>
+              <a:solidFill>
+                <a:schemeClr val="accent6"/>
+              </a:solidFill>
+            </a:ln>
+          </p:spPr>
+          <p:style>
+            <a:lnRef idx="2">
+              <a:schemeClr val="accent1">
+                <a:lumMod val="75000"/>
+              </a:schemeClr>
+            </a:lnRef>
+            <a:fillRef idx="1">
+              <a:schemeClr val="accent1"/>
+            </a:fillRef>
+            <a:effectRef idx="0">
+              <a:srgbClr val="FFFFFF"/>
+            </a:effectRef>
+            <a:fontRef idx="minor">
+              <a:schemeClr val="lt1"/>
+            </a:fontRef>
+          </p:style>
+          <p:txBody>
+            <a:bodyPr rtlCol="0" anchor="ctr"/>
+            <a:p>
+              <a:pPr algn="ctr"/>
+              <a:endParaRPr lang="zh-CN" altLang="en-US"/>
+            </a:p>
+          </p:txBody>
+        </p:sp>
+        <p:sp>
+          <p:nvSpPr>
+            <p:cNvPr id="53" name="圆角矩形 52"/>
+            <p:cNvSpPr/>
+            <p:nvPr/>
+          </p:nvSpPr>
+          <p:spPr>
+            <a:xfrm>
+              <a:off x="10766" y="4347"/>
+              <a:ext cx="6066" cy="1635"/>
+            </a:xfrm>
+            <a:prstGeom prst="roundRect">
+              <a:avLst/>
+            </a:prstGeom>
+            <a:solidFill>
+              <a:schemeClr val="accent6"/>
+            </a:solidFill>
+            <a:ln>
+              <a:solidFill>
+                <a:schemeClr val="accent6"/>
+              </a:solidFill>
+            </a:ln>
+          </p:spPr>
+          <p:style>
+            <a:lnRef idx="2">
+              <a:schemeClr val="accent1">
+                <a:lumMod val="75000"/>
+              </a:schemeClr>
+            </a:lnRef>
+            <a:fillRef idx="1">
+              <a:schemeClr val="accent1"/>
+            </a:fillRef>
+            <a:effectRef idx="0">
+              <a:srgbClr val="FFFFFF"/>
+            </a:effectRef>
+            <a:fontRef idx="minor">
+              <a:schemeClr val="lt1"/>
+            </a:fontRef>
+          </p:style>
+          <p:txBody>
+            <a:bodyPr rtlCol="0" anchor="ctr"/>
+            <a:p>
+              <a:pPr algn="ctr"/>
+              <a:endParaRPr lang="zh-CN" altLang="en-US"/>
+            </a:p>
+          </p:txBody>
+        </p:sp>
+      </p:grpSp>
+    </p:spTree>
+  </p:cSld>
+  <p:clrMapOvr>
+    <a:masterClrMapping/>
+  </p:clrMapOvr>
+  <mc:AlternateContent xmlns:mc="http://schemas.openxmlformats.org/markup-compatibility/2006" xmlns:p159="http://schemas.microsoft.com/office/powerpoint/2015/09/main">
+    <mc:Choice Requires="p159">
+      <p:transition xmlns:p14="http://schemas.microsoft.com/office/powerpoint/2010/main" spd="slow" p14:dur="2000">
+        <p159:morph option="byObject"/>
+      </p:transition>
+    </mc:Choice>
+    <mc:Fallback>
+      <p:transition spd="slow">
+        <p:fade/>
+      </p:transition>
+    </mc:Fallback>
+  </mc:AlternateContent>
+</p:sld>
+</file>
+
+<file path=ppt/slides/slide4.xml><?xml version="1.0" encoding="utf-8"?>
+<p:sld xmlns:a="http://schemas.openxmlformats.org/drawingml/2006/main" xmlns:r="http://schemas.openxmlformats.org/officeDocument/2006/relationships" xmlns:p="http://schemas.openxmlformats.org/presentationml/2006/main">
+  <p:cSld>
+    <p:spTree>
+      <p:nvGrpSpPr>
+        <p:cNvPr id="1" name=""/>
+        <p:cNvGrpSpPr/>
+        <p:nvPr/>
+      </p:nvGrpSpPr>
+      <p:grpSpPr/>
+      <p:sp>
+        <p:nvSpPr>
+          <p:cNvPr id="4" name="文本框 3"/>
+          <p:cNvSpPr txBox="1"/>
+          <p:nvPr/>
+        </p:nvSpPr>
+        <p:spPr>
+          <a:xfrm>
+            <a:off x="1027430" y="792480"/>
+            <a:ext cx="1253490" cy="1291590"/>
+          </a:xfrm>
+          <a:prstGeom prst="rect">
+            <a:avLst/>
+          </a:prstGeom>
+          <a:noFill/>
+        </p:spPr>
+        <p:txBody>
+          <a:bodyPr wrap="square" rtlCol="0">
+            <a:spAutoFit/>
+          </a:bodyPr>
+          <a:p>
+            <a:pPr algn="l">
+              <a:lnSpc>
+                <a:spcPct val="130000"/>
+              </a:lnSpc>
+              <a:buClrTx/>
+              <a:buSzTx/>
+              <a:buFontTx/>
+            </a:pPr>
+            <a:r>
+              <a:rPr lang="en-US" altLang="zh-CN" sz="6000" b="1" dirty="0">
+                <a:effectLst>
+                  <a:outerShdw blurRad="38100" dist="38100" dir="2700000" algn="tl">
+                    <a:srgbClr val="000000">
+                      <a:alpha val="43137"/>
+                    </a:srgbClr>
+                  </a:outerShdw>
+                </a:effectLst>
+                <a:latin typeface="微软雅黑" panose="020B0503020204020204" charset="-122"/>
+                <a:ea typeface="微软雅黑" panose="020B0503020204020204" charset="-122"/>
+                <a:cs typeface="+mj-cs"/>
+              </a:rPr>
+              <a:t>栈</a:t>
+            </a:r>
+            <a:r>
+              <a:rPr lang="zh-CN" altLang="en-US" sz="6000" b="1" dirty="0">
+                <a:effectLst>
+                  <a:outerShdw blurRad="38100" dist="38100" dir="2700000" algn="tl">
+                    <a:srgbClr val="000000">
+                      <a:alpha val="43137"/>
+                    </a:srgbClr>
+                  </a:outerShdw>
+                </a:effectLst>
+                <a:latin typeface="微软雅黑" panose="020B0503020204020204" charset="-122"/>
+                <a:ea typeface="微软雅黑" panose="020B0503020204020204" charset="-122"/>
+                <a:cs typeface="+mj-cs"/>
+              </a:rPr>
+              <a:t>：</a:t>
+            </a:r>
+            <a:endParaRPr lang="en-US" altLang="zh-CN" sz="6000" b="1" dirty="0">
+              <a:effectLst>
+                <a:outerShdw blurRad="38100" dist="38100" dir="2700000" algn="tl">
+                  <a:srgbClr val="000000">
+                    <a:alpha val="43137"/>
+                  </a:srgbClr>
+                </a:outerShdw>
+              </a:effectLst>
+              <a:latin typeface="微软雅黑" panose="020B0503020204020204" charset="-122"/>
+              <a:ea typeface="微软雅黑" panose="020B0503020204020204" charset="-122"/>
+              <a:cs typeface="+mj-cs"/>
+            </a:endParaRPr>
+          </a:p>
+        </p:txBody>
+      </p:sp>
+      <p:grpSp>
+        <p:nvGrpSpPr>
+          <p:cNvPr id="3" name="组合 2"/>
+          <p:cNvGrpSpPr/>
+          <p:nvPr/>
+        </p:nvGrpSpPr>
+        <p:grpSpPr>
+          <a:xfrm>
+            <a:off x="6654800" y="216535"/>
+            <a:ext cx="4204970" cy="6036310"/>
+            <a:chOff x="10480" y="341"/>
+            <a:chExt cx="6622" cy="9506"/>
+          </a:xfrm>
+        </p:grpSpPr>
+        <p:grpSp>
+          <p:nvGrpSpPr>
+            <p:cNvPr id="8" name="组合 7"/>
+            <p:cNvGrpSpPr/>
+            <p:nvPr/>
+          </p:nvGrpSpPr>
+          <p:grpSpPr>
+            <a:xfrm>
+              <a:off x="10480" y="341"/>
+              <a:ext cx="6622" cy="9506"/>
+              <a:chOff x="10480" y="341"/>
+              <a:chExt cx="6622" cy="9506"/>
+            </a:xfrm>
+          </p:grpSpPr>
+          <p:sp>
+            <p:nvSpPr>
+              <p:cNvPr id="6" name="矩形 5"/>
+              <p:cNvSpPr/>
+              <p:nvPr/>
+            </p:nvSpPr>
+            <p:spPr>
+              <a:xfrm>
+                <a:off x="10623" y="954"/>
+                <a:ext cx="6337" cy="8893"/>
+              </a:xfrm>
+              <a:prstGeom prst="rect">
+                <a:avLst/>
+              </a:prstGeom>
+              <a:noFill/>
+              <a:ln w="73025">
+                <a:solidFill>
+                  <a:schemeClr val="accent6"/>
+                </a:solidFill>
+              </a:ln>
+            </p:spPr>
+            <p:style>
+              <a:lnRef idx="2">
+                <a:schemeClr val="accent1">
+                  <a:lumMod val="75000"/>
+                </a:schemeClr>
+              </a:lnRef>
+              <a:fillRef idx="1">
+                <a:schemeClr val="accent1"/>
+              </a:fillRef>
+              <a:effectRef idx="0">
+                <a:srgbClr val="FFFFFF"/>
+              </a:effectRef>
+              <a:fontRef idx="minor">
+                <a:schemeClr val="lt1"/>
+              </a:fontRef>
+            </p:style>
+            <p:txBody>
+              <a:bodyPr rtlCol="0" anchor="ctr"/>
+              <a:p>
+                <a:pPr algn="ctr"/>
+                <a:endParaRPr lang="zh-CN" altLang="en-US"/>
+              </a:p>
+            </p:txBody>
+          </p:sp>
+          <p:sp>
+            <p:nvSpPr>
+              <p:cNvPr id="7" name="矩形 6"/>
+              <p:cNvSpPr/>
+              <p:nvPr/>
+            </p:nvSpPr>
+            <p:spPr>
+              <a:xfrm>
+                <a:off x="10480" y="341"/>
+                <a:ext cx="6622" cy="1286"/>
+              </a:xfrm>
+              <a:prstGeom prst="rect">
+                <a:avLst/>
+              </a:prstGeom>
+              <a:solidFill>
+                <a:schemeClr val="bg1"/>
+              </a:solidFill>
+              <a:ln>
+                <a:noFill/>
+              </a:ln>
+            </p:spPr>
+            <p:style>
+              <a:lnRef idx="2">
+                <a:schemeClr val="accent1">
+                  <a:lumMod val="75000"/>
+                </a:schemeClr>
+              </a:lnRef>
+              <a:fillRef idx="1">
+                <a:schemeClr val="accent1"/>
+              </a:fillRef>
+              <a:effectRef idx="0">
+                <a:srgbClr val="FFFFFF"/>
+              </a:effectRef>
+              <a:fontRef idx="minor">
+                <a:schemeClr val="lt1"/>
+              </a:fontRef>
+            </p:style>
+            <p:txBody>
+              <a:bodyPr rtlCol="0" anchor="ctr"/>
+              <a:p>
+                <a:pPr algn="ctr"/>
+                <a:endParaRPr lang="zh-CN" altLang="en-US"/>
+              </a:p>
+            </p:txBody>
+          </p:sp>
+        </p:grpSp>
+        <p:sp>
+          <p:nvSpPr>
+            <p:cNvPr id="9" name="圆角矩形 8"/>
+            <p:cNvSpPr/>
+            <p:nvPr/>
+          </p:nvSpPr>
+          <p:spPr>
+            <a:xfrm>
+              <a:off x="10766" y="8075"/>
+              <a:ext cx="6066" cy="1635"/>
+            </a:xfrm>
+            <a:prstGeom prst="roundRect">
+              <a:avLst/>
+            </a:prstGeom>
+            <a:solidFill>
+              <a:schemeClr val="accent6"/>
+            </a:solidFill>
+            <a:ln>
+              <a:solidFill>
+                <a:schemeClr val="accent6"/>
+              </a:solidFill>
+            </a:ln>
+          </p:spPr>
+          <p:style>
+            <a:lnRef idx="2">
+              <a:schemeClr val="accent1">
+                <a:lumMod val="75000"/>
+              </a:schemeClr>
+            </a:lnRef>
+            <a:fillRef idx="1">
+              <a:schemeClr val="accent1"/>
+            </a:fillRef>
+            <a:effectRef idx="0">
+              <a:srgbClr val="FFFFFF"/>
+            </a:effectRef>
+            <a:fontRef idx="minor">
+              <a:schemeClr val="lt1"/>
+            </a:fontRef>
+          </p:style>
+          <p:txBody>
+            <a:bodyPr rtlCol="0" anchor="ctr"/>
+            <a:p>
+              <a:pPr algn="ctr"/>
+              <a:endParaRPr lang="zh-CN" altLang="en-US"/>
+            </a:p>
+          </p:txBody>
+        </p:sp>
+        <p:sp>
+          <p:nvSpPr>
+            <p:cNvPr id="10" name="圆角矩形 9"/>
+            <p:cNvSpPr/>
+            <p:nvPr/>
+          </p:nvSpPr>
+          <p:spPr>
+            <a:xfrm>
+              <a:off x="10766" y="6211"/>
+              <a:ext cx="6066" cy="1635"/>
+            </a:xfrm>
+            <a:prstGeom prst="roundRect">
+              <a:avLst/>
+            </a:prstGeom>
+            <a:solidFill>
+              <a:schemeClr val="accent6"/>
+            </a:solidFill>
+            <a:ln>
+              <a:solidFill>
+                <a:schemeClr val="accent6"/>
+              </a:solidFill>
+            </a:ln>
+          </p:spPr>
+          <p:style>
+            <a:lnRef idx="2">
+              <a:schemeClr val="accent1">
+                <a:lumMod val="75000"/>
+              </a:schemeClr>
+            </a:lnRef>
+            <a:fillRef idx="1">
+              <a:schemeClr val="accent1"/>
+            </a:fillRef>
+            <a:effectRef idx="0">
+              <a:srgbClr val="FFFFFF"/>
+            </a:effectRef>
+            <a:fontRef idx="minor">
+              <a:schemeClr val="lt1"/>
+            </a:fontRef>
+          </p:style>
+          <p:txBody>
+            <a:bodyPr rtlCol="0" anchor="ctr"/>
+            <a:p>
+              <a:pPr algn="ctr"/>
+              <a:endParaRPr lang="zh-CN" altLang="en-US"/>
+            </a:p>
+          </p:txBody>
+        </p:sp>
+        <p:sp>
+          <p:nvSpPr>
+            <p:cNvPr id="11" name="圆角矩形 10"/>
+            <p:cNvSpPr/>
+            <p:nvPr/>
+          </p:nvSpPr>
+          <p:spPr>
+            <a:xfrm>
+              <a:off x="10766" y="4347"/>
+              <a:ext cx="6066" cy="1635"/>
+            </a:xfrm>
+            <a:prstGeom prst="roundRect">
+              <a:avLst/>
+            </a:prstGeom>
+            <a:solidFill>
+              <a:schemeClr val="accent6"/>
+            </a:solidFill>
+            <a:ln>
+              <a:solidFill>
+                <a:schemeClr val="accent6"/>
+              </a:solidFill>
+            </a:ln>
+          </p:spPr>
+          <p:style>
+            <a:lnRef idx="2">
+              <a:schemeClr val="accent1">
+                <a:lumMod val="75000"/>
+              </a:schemeClr>
+            </a:lnRef>
+            <a:fillRef idx="1">
+              <a:schemeClr val="accent1"/>
+            </a:fillRef>
+            <a:effectRef idx="0">
+              <a:srgbClr val="FFFFFF"/>
+            </a:effectRef>
+            <a:fontRef idx="minor">
+              <a:schemeClr val="lt1"/>
+            </a:fontRef>
+          </p:style>
+          <p:txBody>
+            <a:bodyPr rtlCol="0" anchor="ctr"/>
+            <a:p>
+              <a:pPr algn="ctr"/>
+              <a:endParaRPr lang="zh-CN" altLang="en-US"/>
+            </a:p>
+          </p:txBody>
+        </p:sp>
+      </p:grpSp>
+      <p:sp>
+        <p:nvSpPr>
+          <p:cNvPr id="13" name="标题 12"/>
+          <p:cNvSpPr>
+            <a:spLocks noGrp="1"/>
+          </p:cNvSpPr>
+          <p:nvPr>
+            <p:ph type="ctrTitle"/>
+          </p:nvPr>
+        </p:nvSpPr>
+        <p:spPr>
+          <a:xfrm>
+            <a:off x="1417320" y="605790"/>
+            <a:ext cx="3759835" cy="1772920"/>
+          </a:xfrm>
+        </p:spPr>
+        <p:txBody>
+          <a:bodyPr>
+            <a:noAutofit/>
+          </a:bodyPr>
+          <a:p>
+            <a:pPr algn="ctr">
+              <a:lnSpc>
+                <a:spcPct val="130000"/>
+              </a:lnSpc>
+              <a:buClrTx/>
+              <a:buSzTx/>
+              <a:buFontTx/>
+            </a:pPr>
+            <a:r>
+              <a:rPr lang="en-US" altLang="zh-CN" sz="6000" b="1" dirty="0">
+                <a:latin typeface="微软雅黑" panose="020B0503020204020204" charset="-122"/>
+                <a:ea typeface="微软雅黑" panose="020B0503020204020204" charset="-122"/>
+              </a:rPr>
+              <a:t>Stack</a:t>
+            </a:r>
+            <a:endParaRPr lang="en-US" altLang="zh-CN" sz="6000" b="1" dirty="0">
+              <a:latin typeface="微软雅黑" panose="020B0503020204020204" charset="-122"/>
+              <a:ea typeface="微软雅黑" panose="020B0503020204020204" charset="-122"/>
+            </a:endParaRPr>
+          </a:p>
+        </p:txBody>
+      </p:sp>
+      <p:sp>
+        <p:nvSpPr>
+          <p:cNvPr id="5" name="文本框 4"/>
+          <p:cNvSpPr txBox="1"/>
+          <p:nvPr/>
+        </p:nvSpPr>
+        <p:spPr>
+          <a:xfrm>
+            <a:off x="1088390" y="2378710"/>
+            <a:ext cx="3463290" cy="4154170"/>
+          </a:xfrm>
+          <a:prstGeom prst="rect">
+            <a:avLst/>
+          </a:prstGeom>
+          <a:noFill/>
+        </p:spPr>
+        <p:txBody>
+          <a:bodyPr wrap="square" rtlCol="0">
+            <a:spAutoFit/>
+          </a:bodyPr>
+          <a:p>
+            <a:pPr algn="just"/>
+            <a:r>
+              <a:rPr lang="zh-CN" altLang="en-US" sz="2400">
+                <a:latin typeface="微软雅黑" panose="020B0503020204020204" charset="-122"/>
+                <a:ea typeface="微软雅黑" panose="020B0503020204020204" charset="-122"/>
+                <a:cs typeface="微软雅黑" panose="020B0503020204020204" charset="-122"/>
+              </a:rPr>
+              <a:t>栈（stack）是一种“</a:t>
+            </a:r>
+            <a:r>
+              <a:rPr lang="zh-CN" altLang="en-US" sz="2400" b="1">
+                <a:solidFill>
+                  <a:srgbClr val="FF0000"/>
+                </a:solidFill>
+                <a:latin typeface="微软雅黑" panose="020B0503020204020204" charset="-122"/>
+                <a:ea typeface="微软雅黑" panose="020B0503020204020204" charset="-122"/>
+                <a:cs typeface="微软雅黑" panose="020B0503020204020204" charset="-122"/>
+              </a:rPr>
+              <a:t>后进先出</a:t>
+            </a:r>
+            <a:r>
+              <a:rPr lang="zh-CN" altLang="en-US" sz="2400">
+                <a:latin typeface="微软雅黑" panose="020B0503020204020204" charset="-122"/>
+                <a:ea typeface="微软雅黑" panose="020B0503020204020204" charset="-122"/>
+                <a:cs typeface="微软雅黑" panose="020B0503020204020204" charset="-122"/>
+              </a:rPr>
+              <a:t>”（LIFO）的数据结构，它是一种运算受限的线性表，只允许在一端进行插入和删除元素的操作，这一端被称为栈顶(top)。另一端称为栈底(bottom)。向栈中添加元素称为入栈（push），移除元素称为出栈（pop）。﻿</a:t>
+            </a:r>
+            <a:endParaRPr lang="zh-CN" altLang="en-US" sz="2400">
+              <a:latin typeface="微软雅黑" panose="020B0503020204020204" charset="-122"/>
+              <a:ea typeface="微软雅黑" panose="020B0503020204020204" charset="-122"/>
+              <a:cs typeface="微软雅黑" panose="020B0503020204020204" charset="-122"/>
+            </a:endParaRPr>
+          </a:p>
+        </p:txBody>
+      </p:sp>
+    </p:spTree>
+  </p:cSld>
+  <p:clrMapOvr>
+    <a:masterClrMapping/>
+  </p:clrMapOvr>
+  <mc:AlternateContent xmlns:mc="http://schemas.openxmlformats.org/markup-compatibility/2006" xmlns:p159="http://schemas.microsoft.com/office/powerpoint/2015/09/main">
+    <mc:Choice Requires="p159">
+      <p:transition xmlns:p14="http://schemas.microsoft.com/office/powerpoint/2010/main" spd="slow" p14:dur="2000">
+        <p159:morph option="byObject"/>
+      </p:transition>
+    </mc:Choice>
+    <mc:Fallback>
+      <p:transition spd="slow">
+        <p:fade/>
+      </p:transition>
+    </mc:Fallback>
+  </mc:AlternateContent>
+</p:sld>
+</file>
+
+<file path=ppt/slides/slide5.xml><?xml version="1.0" encoding="utf-8"?>
+<p:sld xmlns:a="http://schemas.openxmlformats.org/drawingml/2006/main" xmlns:r="http://schemas.openxmlformats.org/officeDocument/2006/relationships" xmlns:p="http://schemas.openxmlformats.org/presentationml/2006/main">
+  <p:cSld>
+    <p:spTree>
+      <p:nvGrpSpPr>
+        <p:cNvPr id="1" name=""/>
+        <p:cNvGrpSpPr/>
+        <p:nvPr/>
+      </p:nvGrpSpPr>
+      <p:grpSpPr/>
+      <p:grpSp>
+        <p:nvGrpSpPr>
+          <p:cNvPr id="19" name="组合 18"/>
+          <p:cNvGrpSpPr/>
+          <p:nvPr/>
+        </p:nvGrpSpPr>
+        <p:grpSpPr>
+          <a:xfrm>
+            <a:off x="6654800" y="216535"/>
+            <a:ext cx="4204970" cy="6036310"/>
+            <a:chOff x="10480" y="341"/>
+            <a:chExt cx="6622" cy="9506"/>
+          </a:xfrm>
+        </p:grpSpPr>
+        <p:grpSp>
+          <p:nvGrpSpPr>
+            <p:cNvPr id="20" name="组合 19"/>
+            <p:cNvGrpSpPr/>
+            <p:nvPr/>
+          </p:nvGrpSpPr>
+          <p:grpSpPr>
+            <a:xfrm>
+              <a:off x="10480" y="341"/>
+              <a:ext cx="6622" cy="9506"/>
+              <a:chOff x="10480" y="341"/>
+              <a:chExt cx="6622" cy="9506"/>
+            </a:xfrm>
+          </p:grpSpPr>
+          <p:sp>
+            <p:nvSpPr>
+              <p:cNvPr id="21" name="矩形 20"/>
+              <p:cNvSpPr/>
+              <p:nvPr/>
+            </p:nvSpPr>
+            <p:spPr>
+              <a:xfrm>
+                <a:off x="10623" y="954"/>
+                <a:ext cx="6337" cy="8893"/>
+              </a:xfrm>
+              <a:prstGeom prst="rect">
+                <a:avLst/>
+              </a:prstGeom>
+              <a:noFill/>
+              <a:ln w="73025">
+                <a:solidFill>
+                  <a:schemeClr val="accent6"/>
+                </a:solidFill>
+              </a:ln>
+            </p:spPr>
+            <p:style>
+              <a:lnRef idx="2">
+                <a:schemeClr val="accent1">
+                  <a:lumMod val="75000"/>
+                </a:schemeClr>
+              </a:lnRef>
+              <a:fillRef idx="1">
+                <a:schemeClr val="accent1"/>
+              </a:fillRef>
+              <a:effectRef idx="0">
+                <a:srgbClr val="FFFFFF"/>
+              </a:effectRef>
+              <a:fontRef idx="minor">
+                <a:schemeClr val="lt1"/>
+              </a:fontRef>
+            </p:style>
+            <p:txBody>
+              <a:bodyPr rtlCol="0" anchor="ctr"/>
+              <a:p>
+                <a:pPr algn="ctr"/>
+                <a:endParaRPr lang="zh-CN" altLang="en-US"/>
+              </a:p>
+            </p:txBody>
+          </p:sp>
+          <p:sp>
+            <p:nvSpPr>
+              <p:cNvPr id="22" name="矩形 21"/>
+              <p:cNvSpPr/>
+              <p:nvPr/>
+            </p:nvSpPr>
+            <p:spPr>
+              <a:xfrm>
+                <a:off x="10480" y="341"/>
+                <a:ext cx="6622" cy="1286"/>
+              </a:xfrm>
+              <a:prstGeom prst="rect">
+                <a:avLst/>
+              </a:prstGeom>
+              <a:solidFill>
+                <a:schemeClr val="bg1"/>
+              </a:solidFill>
+              <a:ln>
+                <a:noFill/>
+              </a:ln>
+            </p:spPr>
+            <p:style>
+              <a:lnRef idx="2">
+                <a:schemeClr val="accent1">
+                  <a:lumMod val="75000"/>
+                </a:schemeClr>
+              </a:lnRef>
+              <a:fillRef idx="1">
+                <a:schemeClr val="accent1"/>
+              </a:fillRef>
+              <a:effectRef idx="0">
+                <a:srgbClr val="FFFFFF"/>
+              </a:effectRef>
+              <a:fontRef idx="minor">
+                <a:schemeClr val="lt1"/>
+              </a:fontRef>
+            </p:style>
+            <p:txBody>
+              <a:bodyPr rtlCol="0" anchor="ctr"/>
+              <a:p>
+                <a:pPr algn="ctr"/>
+                <a:endParaRPr lang="zh-CN" altLang="en-US"/>
+              </a:p>
+            </p:txBody>
+          </p:sp>
+        </p:grpSp>
+        <p:sp>
+          <p:nvSpPr>
+            <p:cNvPr id="23" name="圆角矩形 22"/>
+            <p:cNvSpPr/>
+            <p:nvPr/>
+          </p:nvSpPr>
+          <p:spPr>
+            <a:xfrm>
+              <a:off x="10766" y="8075"/>
+              <a:ext cx="6066" cy="1635"/>
+            </a:xfrm>
+            <a:prstGeom prst="roundRect">
+              <a:avLst/>
+            </a:prstGeom>
+            <a:solidFill>
+              <a:schemeClr val="accent6"/>
+            </a:solidFill>
+            <a:ln>
+              <a:solidFill>
+                <a:schemeClr val="accent6"/>
+              </a:solidFill>
+            </a:ln>
+          </p:spPr>
+          <p:style>
+            <a:lnRef idx="2">
+              <a:schemeClr val="accent1">
+                <a:lumMod val="75000"/>
+              </a:schemeClr>
+            </a:lnRef>
+            <a:fillRef idx="1">
+              <a:schemeClr val="accent1"/>
+            </a:fillRef>
+            <a:effectRef idx="0">
+              <a:srgbClr val="FFFFFF"/>
+            </a:effectRef>
+            <a:fontRef idx="minor">
+              <a:schemeClr val="lt1"/>
+            </a:fontRef>
+          </p:style>
+          <p:txBody>
+            <a:bodyPr rtlCol="0" anchor="ctr"/>
+            <a:p>
+              <a:pPr algn="ctr"/>
+              <a:endParaRPr lang="zh-CN" altLang="en-US"/>
+            </a:p>
+          </p:txBody>
+        </p:sp>
+        <p:sp>
+          <p:nvSpPr>
+            <p:cNvPr id="24" name="圆角矩形 23"/>
+            <p:cNvSpPr/>
+            <p:nvPr/>
+          </p:nvSpPr>
+          <p:spPr>
+            <a:xfrm>
+              <a:off x="10766" y="6211"/>
+              <a:ext cx="6066" cy="1635"/>
+            </a:xfrm>
+            <a:prstGeom prst="roundRect">
+              <a:avLst/>
+            </a:prstGeom>
+            <a:solidFill>
+              <a:schemeClr val="accent6"/>
+            </a:solidFill>
+            <a:ln>
+              <a:solidFill>
+                <a:schemeClr val="accent6"/>
+              </a:solidFill>
+            </a:ln>
+          </p:spPr>
+          <p:style>
+            <a:lnRef idx="2">
+              <a:schemeClr val="accent1">
+                <a:lumMod val="75000"/>
+              </a:schemeClr>
+            </a:lnRef>
+            <a:fillRef idx="1">
+              <a:schemeClr val="accent1"/>
+            </a:fillRef>
+            <a:effectRef idx="0">
+              <a:srgbClr val="FFFFFF"/>
+            </a:effectRef>
+            <a:fontRef idx="minor">
+              <a:schemeClr val="lt1"/>
+            </a:fontRef>
+          </p:style>
+          <p:txBody>
+            <a:bodyPr rtlCol="0" anchor="ctr"/>
+            <a:p>
+              <a:pPr algn="ctr"/>
+              <a:endParaRPr lang="zh-CN" altLang="en-US"/>
+            </a:p>
+          </p:txBody>
+        </p:sp>
+        <p:sp>
+          <p:nvSpPr>
+            <p:cNvPr id="25" name="圆角矩形 24"/>
+            <p:cNvSpPr/>
+            <p:nvPr/>
+          </p:nvSpPr>
+          <p:spPr>
+            <a:xfrm>
+              <a:off x="10766" y="4347"/>
+              <a:ext cx="6066" cy="1635"/>
+            </a:xfrm>
+            <a:prstGeom prst="roundRect">
+              <a:avLst/>
+            </a:prstGeom>
+            <a:solidFill>
+              <a:schemeClr val="accent6"/>
+            </a:solidFill>
+            <a:ln>
+              <a:solidFill>
+                <a:schemeClr val="accent6"/>
+              </a:solidFill>
+            </a:ln>
+          </p:spPr>
+          <p:style>
+            <a:lnRef idx="2">
+              <a:schemeClr val="accent1">
+                <a:lumMod val="75000"/>
+              </a:schemeClr>
+            </a:lnRef>
+            <a:fillRef idx="1">
+              <a:schemeClr val="accent1"/>
+            </a:fillRef>
+            <a:effectRef idx="0">
+              <a:srgbClr val="FFFFFF"/>
+            </a:effectRef>
+            <a:fontRef idx="minor">
+              <a:schemeClr val="lt1"/>
+            </a:fontRef>
+          </p:style>
+          <p:txBody>
+            <a:bodyPr rtlCol="0" anchor="ctr"/>
+            <a:p>
+              <a:pPr algn="ctr"/>
+              <a:endParaRPr lang="zh-CN" altLang="en-US"/>
+            </a:p>
+          </p:txBody>
+        </p:sp>
+      </p:grpSp>
+      <p:sp>
+        <p:nvSpPr>
+          <p:cNvPr id="26" name="左箭头 25"/>
+          <p:cNvSpPr/>
+          <p:nvPr/>
+        </p:nvSpPr>
+        <p:spPr>
+          <a:xfrm>
+            <a:off x="4776470" y="5389245"/>
+            <a:ext cx="1718945" cy="776605"/>
+          </a:xfrm>
+          <a:prstGeom prst="leftArrow">
+            <a:avLst/>
+          </a:prstGeom>
+          <a:solidFill>
+            <a:schemeClr val="accent6"/>
+          </a:solidFill>
+          <a:ln>
+            <a:solidFill>
+              <a:schemeClr val="accent6"/>
+            </a:solidFill>
+          </a:ln>
+        </p:spPr>
+        <p:style>
+          <a:lnRef idx="2">
+            <a:schemeClr val="accent1">
+              <a:lumMod val="75000"/>
+            </a:schemeClr>
+          </a:lnRef>
+          <a:fillRef idx="1">
+            <a:schemeClr val="accent1"/>
+          </a:fillRef>
+          <a:effectRef idx="0">
+            <a:srgbClr val="FFFFFF"/>
+          </a:effectRef>
+          <a:fontRef idx="minor">
+            <a:schemeClr val="lt1"/>
+          </a:fontRef>
+        </p:style>
+        <p:txBody>
+          <a:bodyPr rtlCol="0" anchor="ctr"/>
+          <a:p>
+            <a:pPr algn="ctr"/>
+            <a:endParaRPr lang="zh-CN" altLang="en-US"/>
+          </a:p>
+        </p:txBody>
+      </p:sp>
+      <p:sp>
+        <p:nvSpPr>
+          <p:cNvPr id="27" name="文本框 26"/>
+          <p:cNvSpPr txBox="1"/>
+          <p:nvPr/>
+        </p:nvSpPr>
+        <p:spPr>
+          <a:xfrm>
+            <a:off x="1618615" y="5516880"/>
+            <a:ext cx="2763520" cy="521970"/>
+          </a:xfrm>
+          <a:prstGeom prst="rect">
+            <a:avLst/>
+          </a:prstGeom>
+          <a:noFill/>
+        </p:spPr>
+        <p:txBody>
+          <a:bodyPr wrap="square" rtlCol="0">
+            <a:spAutoFit/>
+          </a:bodyPr>
+          <a:p>
+            <a:r>
+              <a:rPr lang="zh-CN" altLang="en-US" sz="2800" b="1">
+                <a:latin typeface="微软雅黑" panose="020B0503020204020204" charset="-122"/>
+                <a:ea typeface="微软雅黑" panose="020B0503020204020204" charset="-122"/>
+                <a:cs typeface="微软雅黑" panose="020B0503020204020204" charset="-122"/>
+              </a:rPr>
+              <a:t>栈底（</a:t>
+            </a:r>
+            <a:r>
+              <a:rPr lang="en-US" altLang="zh-CN" sz="2800" b="1">
+                <a:latin typeface="微软雅黑" panose="020B0503020204020204" charset="-122"/>
+                <a:ea typeface="微软雅黑" panose="020B0503020204020204" charset="-122"/>
+                <a:cs typeface="微软雅黑" panose="020B0503020204020204" charset="-122"/>
+              </a:rPr>
+              <a:t>bottom</a:t>
+            </a:r>
+            <a:r>
+              <a:rPr lang="zh-CN" altLang="en-US" sz="2800" b="1">
+                <a:latin typeface="微软雅黑" panose="020B0503020204020204" charset="-122"/>
+                <a:ea typeface="微软雅黑" panose="020B0503020204020204" charset="-122"/>
+                <a:cs typeface="微软雅黑" panose="020B0503020204020204" charset="-122"/>
+              </a:rPr>
+              <a:t>）</a:t>
+            </a:r>
+            <a:endParaRPr lang="zh-CN" altLang="en-US" sz="2800" b="1">
+              <a:latin typeface="微软雅黑" panose="020B0503020204020204" charset="-122"/>
+              <a:ea typeface="微软雅黑" panose="020B0503020204020204" charset="-122"/>
+              <a:cs typeface="微软雅黑" panose="020B0503020204020204" charset="-122"/>
+            </a:endParaRPr>
+          </a:p>
+        </p:txBody>
+      </p:sp>
+      <p:sp>
+        <p:nvSpPr>
+          <p:cNvPr id="28" name="左箭头 27"/>
+          <p:cNvSpPr/>
+          <p:nvPr/>
+        </p:nvSpPr>
+        <p:spPr>
+          <a:xfrm>
+            <a:off x="4776470" y="1163320"/>
+            <a:ext cx="1718945" cy="776605"/>
+          </a:xfrm>
+          <a:prstGeom prst="leftArrow">
+            <a:avLst/>
+          </a:prstGeom>
+          <a:solidFill>
+            <a:schemeClr val="accent6"/>
+          </a:solidFill>
+          <a:ln>
+            <a:solidFill>
+              <a:schemeClr val="accent6"/>
+            </a:solidFill>
+          </a:ln>
+        </p:spPr>
+        <p:style>
+          <a:lnRef idx="2">
+            <a:schemeClr val="accent1">
+              <a:lumMod val="75000"/>
+            </a:schemeClr>
+          </a:lnRef>
+          <a:fillRef idx="1">
+            <a:schemeClr val="accent1"/>
+          </a:fillRef>
+          <a:effectRef idx="0">
+            <a:srgbClr val="FFFFFF"/>
+          </a:effectRef>
+          <a:fontRef idx="minor">
+            <a:schemeClr val="lt1"/>
+          </a:fontRef>
+        </p:style>
+        <p:txBody>
+          <a:bodyPr rtlCol="0" anchor="ctr"/>
+          <a:p>
+            <a:pPr algn="ctr"/>
+            <a:endParaRPr lang="zh-CN" altLang="en-US"/>
+          </a:p>
+        </p:txBody>
+      </p:sp>
+      <p:sp>
+        <p:nvSpPr>
+          <p:cNvPr id="29" name="文本框 28"/>
+          <p:cNvSpPr txBox="1"/>
+          <p:nvPr/>
+        </p:nvSpPr>
+        <p:spPr>
+          <a:xfrm>
+            <a:off x="2569210" y="1290955"/>
+            <a:ext cx="2763520" cy="521970"/>
+          </a:xfrm>
+          <a:prstGeom prst="rect">
+            <a:avLst/>
+          </a:prstGeom>
+          <a:noFill/>
+        </p:spPr>
+        <p:txBody>
+          <a:bodyPr wrap="square" rtlCol="0">
+            <a:spAutoFit/>
+          </a:bodyPr>
+          <a:p>
+            <a:r>
+              <a:rPr lang="zh-CN" altLang="en-US" sz="2800" b="1">
+                <a:latin typeface="微软雅黑" panose="020B0503020204020204" charset="-122"/>
+                <a:ea typeface="微软雅黑" panose="020B0503020204020204" charset="-122"/>
+                <a:cs typeface="微软雅黑" panose="020B0503020204020204" charset="-122"/>
+              </a:rPr>
+              <a:t>栈顶（</a:t>
+            </a:r>
+            <a:r>
+              <a:rPr lang="en-US" altLang="zh-CN" sz="2800" b="1">
+                <a:latin typeface="微软雅黑" panose="020B0503020204020204" charset="-122"/>
+                <a:ea typeface="微软雅黑" panose="020B0503020204020204" charset="-122"/>
+                <a:cs typeface="微软雅黑" panose="020B0503020204020204" charset="-122"/>
+              </a:rPr>
+              <a:t>top</a:t>
+            </a:r>
+            <a:r>
+              <a:rPr lang="zh-CN" altLang="en-US" sz="2800" b="1">
+                <a:latin typeface="微软雅黑" panose="020B0503020204020204" charset="-122"/>
+                <a:ea typeface="微软雅黑" panose="020B0503020204020204" charset="-122"/>
+                <a:cs typeface="微软雅黑" panose="020B0503020204020204" charset="-122"/>
+              </a:rPr>
+              <a:t>）</a:t>
+            </a:r>
+            <a:endParaRPr lang="zh-CN" altLang="en-US" sz="2800" b="1">
+              <a:latin typeface="微软雅黑" panose="020B0503020204020204" charset="-122"/>
+              <a:ea typeface="微软雅黑" panose="020B0503020204020204" charset="-122"/>
+              <a:cs typeface="微软雅黑" panose="020B0503020204020204" charset="-122"/>
+            </a:endParaRPr>
+          </a:p>
+        </p:txBody>
+      </p:sp>
+      <p:sp>
+        <p:nvSpPr>
+          <p:cNvPr id="30" name="文本框 29"/>
+          <p:cNvSpPr txBox="1"/>
+          <p:nvPr/>
+        </p:nvSpPr>
+        <p:spPr>
+          <a:xfrm>
+            <a:off x="2568575" y="1291590"/>
+            <a:ext cx="2763520" cy="521970"/>
+          </a:xfrm>
+          <a:prstGeom prst="rect">
+            <a:avLst/>
+          </a:prstGeom>
+          <a:noFill/>
+        </p:spPr>
+        <p:txBody>
+          <a:bodyPr wrap="square" rtlCol="0">
+            <a:spAutoFit/>
+          </a:bodyPr>
+          <a:p>
+            <a:r>
+              <a:rPr lang="zh-CN" altLang="en-US" sz="2800" b="1">
+                <a:solidFill>
+                  <a:srgbClr val="FF0000"/>
+                </a:solidFill>
+                <a:latin typeface="微软雅黑" panose="020B0503020204020204" charset="-122"/>
+                <a:ea typeface="微软雅黑" panose="020B0503020204020204" charset="-122"/>
+                <a:cs typeface="微软雅黑" panose="020B0503020204020204" charset="-122"/>
+              </a:rPr>
+              <a:t>栈顶（</a:t>
+            </a:r>
+            <a:r>
+              <a:rPr lang="en-US" altLang="zh-CN" sz="2800" b="1">
+                <a:solidFill>
+                  <a:srgbClr val="FF0000"/>
+                </a:solidFill>
+                <a:latin typeface="微软雅黑" panose="020B0503020204020204" charset="-122"/>
+                <a:ea typeface="微软雅黑" panose="020B0503020204020204" charset="-122"/>
+                <a:cs typeface="微软雅黑" panose="020B0503020204020204" charset="-122"/>
+              </a:rPr>
+              <a:t>top</a:t>
+            </a:r>
+            <a:r>
+              <a:rPr lang="zh-CN" altLang="en-US" sz="2800" b="1">
+                <a:solidFill>
+                  <a:srgbClr val="FF0000"/>
+                </a:solidFill>
+                <a:latin typeface="微软雅黑" panose="020B0503020204020204" charset="-122"/>
+                <a:ea typeface="微软雅黑" panose="020B0503020204020204" charset="-122"/>
+                <a:cs typeface="微软雅黑" panose="020B0503020204020204" charset="-122"/>
+              </a:rPr>
+              <a:t>）</a:t>
+            </a:r>
+            <a:endParaRPr lang="zh-CN" altLang="en-US" sz="2800" b="1">
+              <a:solidFill>
+                <a:srgbClr val="FF0000"/>
+              </a:solidFill>
+              <a:latin typeface="微软雅黑" panose="020B0503020204020204" charset="-122"/>
+              <a:ea typeface="微软雅黑" panose="020B0503020204020204" charset="-122"/>
+              <a:cs typeface="微软雅黑" panose="020B0503020204020204" charset="-122"/>
+            </a:endParaRPr>
+          </a:p>
+        </p:txBody>
+      </p:sp>
+    </p:spTree>
+  </p:cSld>
+  <p:clrMapOvr>
+    <a:masterClrMapping/>
+  </p:clrMapOvr>
+  <p:timing>
+    <p:tnLst>
+      <p:par>
+        <p:cTn id="1" dur="indefinite" restart="never" nodeType="tmRoot">
+          <p:childTnLst>
+            <p:seq concurrent="1" nextAc="seek">
+              <p:cTn id="2" dur="indefinite" nodeType="mainSeq">
+                <p:childTnLst>
+                  <p:par>
+                    <p:cTn id="3" fill="hold">
+                      <p:stCondLst>
+                        <p:cond delay="indefinite"/>
+                      </p:stCondLst>
+                      <p:childTnLst>
+                        <p:par>
+                          <p:cTn id="4" fill="hold">
+                            <p:stCondLst>
+                              <p:cond delay="0"/>
+                            </p:stCondLst>
+                            <p:childTnLst>
+                              <p:par>
+                                <p:cTn id="5" presetID="22" presetClass="entr" presetSubtype="4" fill="hold" grpId="0" nodeType="clickEffect">
+                                  <p:stCondLst>
+                                    <p:cond delay="0"/>
+                                  </p:stCondLst>
+                                  <p:childTnLst>
+                                    <p:set>
+                                      <p:cBhvr>
+                                        <p:cTn id="6" dur="1" fill="hold">
+                                          <p:stCondLst>
+                                            <p:cond delay="0"/>
+                                          </p:stCondLst>
+                                        </p:cTn>
+                                        <p:tgtEl>
+                                          <p:spTgt spid="26"/>
+                                        </p:tgtEl>
+                                        <p:attrNameLst>
+                                          <p:attrName>style.visibility</p:attrName>
+                                        </p:attrNameLst>
+                                      </p:cBhvr>
+                                      <p:to>
+                                        <p:strVal val="visible"/>
+                                      </p:to>
+                                    </p:set>
+                                    <p:animEffect transition="in" filter="wipe(down)">
+                                      <p:cBhvr>
+                                        <p:cTn id="7" dur="500"/>
+                                        <p:tgtEl>
+                                          <p:spTgt spid="26"/>
+                                        </p:tgtEl>
+                                      </p:cBhvr>
+                                    </p:animEffect>
+                                  </p:childTnLst>
+                                </p:cTn>
+                              </p:par>
+                              <p:par>
+                                <p:cTn id="8" presetID="22" presetClass="entr" presetSubtype="4" fill="hold" grpId="0" nodeType="withEffect">
+                                  <p:stCondLst>
+                                    <p:cond delay="0"/>
+                                  </p:stCondLst>
+                                  <p:childTnLst>
+                                    <p:set>
+                                      <p:cBhvr>
+                                        <p:cTn id="9" dur="1" fill="hold">
+                                          <p:stCondLst>
+                                            <p:cond delay="0"/>
+                                          </p:stCondLst>
+                                        </p:cTn>
+                                        <p:tgtEl>
+                                          <p:spTgt spid="27"/>
+                                        </p:tgtEl>
+                                        <p:attrNameLst>
+                                          <p:attrName>style.visibility</p:attrName>
+                                        </p:attrNameLst>
+                                      </p:cBhvr>
+                                      <p:to>
+                                        <p:strVal val="visible"/>
+                                      </p:to>
+                                    </p:set>
+                                    <p:animEffect transition="in" filter="wipe(down)">
+                                      <p:cBhvr>
+                                        <p:cTn id="10" dur="500"/>
+                                        <p:tgtEl>
+                                          <p:spTgt spid="27"/>
+                                        </p:tgtEl>
+                                      </p:cBhvr>
+                                    </p:animEffect>
+                                  </p:childTnLst>
+                                </p:cTn>
+                              </p:par>
+                            </p:childTnLst>
+                          </p:cTn>
+                        </p:par>
+                      </p:childTnLst>
+                    </p:cTn>
+                  </p:par>
+                  <p:par>
+                    <p:cTn id="11" fill="hold">
+                      <p:stCondLst>
+                        <p:cond delay="indefinite"/>
+                      </p:stCondLst>
+                      <p:childTnLst>
+                        <p:par>
+                          <p:cTn id="12" fill="hold">
+                            <p:stCondLst>
+                              <p:cond delay="0"/>
+                            </p:stCondLst>
+                            <p:childTnLst>
+                              <p:par>
+                                <p:cTn id="13" presetID="22" presetClass="entr" presetSubtype="4" fill="hold" grpId="0" nodeType="clickEffect">
+                                  <p:stCondLst>
+                                    <p:cond delay="0"/>
+                                  </p:stCondLst>
+                                  <p:childTnLst>
+                                    <p:set>
+                                      <p:cBhvr>
+                                        <p:cTn id="14" dur="1" fill="hold">
+                                          <p:stCondLst>
+                                            <p:cond delay="0"/>
+                                          </p:stCondLst>
+                                        </p:cTn>
+                                        <p:tgtEl>
+                                          <p:spTgt spid="28"/>
+                                        </p:tgtEl>
+                                        <p:attrNameLst>
+                                          <p:attrName>style.visibility</p:attrName>
+                                        </p:attrNameLst>
+                                      </p:cBhvr>
+                                      <p:to>
+                                        <p:strVal val="visible"/>
+                                      </p:to>
+                                    </p:set>
+                                    <p:animEffect transition="in" filter="wipe(down)">
+                                      <p:cBhvr>
+                                        <p:cTn id="15" dur="500"/>
+                                        <p:tgtEl>
+                                          <p:spTgt spid="28"/>
+                                        </p:tgtEl>
+                                      </p:cBhvr>
+                                    </p:animEffect>
+                                  </p:childTnLst>
+                                </p:cTn>
+                              </p:par>
+                              <p:par>
+                                <p:cTn id="16" presetID="22" presetClass="entr" presetSubtype="4" fill="hold" grpId="0" nodeType="withEffect">
+                                  <p:stCondLst>
+                                    <p:cond delay="0"/>
+                                  </p:stCondLst>
+                                  <p:childTnLst>
+                                    <p:set>
+                                      <p:cBhvr>
+                                        <p:cTn id="17" dur="1" fill="hold">
+                                          <p:stCondLst>
+                                            <p:cond delay="0"/>
+                                          </p:stCondLst>
+                                        </p:cTn>
+                                        <p:tgtEl>
+                                          <p:spTgt spid="29"/>
+                                        </p:tgtEl>
+                                        <p:attrNameLst>
+                                          <p:attrName>style.visibility</p:attrName>
+                                        </p:attrNameLst>
+                                      </p:cBhvr>
+                                      <p:to>
+                                        <p:strVal val="visible"/>
+                                      </p:to>
+                                    </p:set>
+                                    <p:animEffect transition="in" filter="wipe(down)">
+                                      <p:cBhvr>
+                                        <p:cTn id="18" dur="500"/>
+                                        <p:tgtEl>
+                                          <p:spTgt spid="29"/>
+                                        </p:tgtEl>
+                                      </p:cBhvr>
+                                    </p:animEffect>
+                                  </p:childTnLst>
+                                </p:cTn>
+                              </p:par>
+                            </p:childTnLst>
+                          </p:cTn>
+                        </p:par>
+                      </p:childTnLst>
+                    </p:cTn>
+                  </p:par>
+                  <p:par>
+                    <p:cTn id="19" fill="hold">
+                      <p:stCondLst>
+                        <p:cond delay="indefinite"/>
+                      </p:stCondLst>
+                      <p:childTnLst>
+                        <p:par>
+                          <p:cTn id="20" fill="hold">
+                            <p:stCondLst>
+                              <p:cond delay="0"/>
+                            </p:stCondLst>
+                            <p:childTnLst>
+                              <p:par>
+                                <p:cTn id="21" presetID="1" presetClass="entr" presetSubtype="0" fill="hold" grpId="1" nodeType="clickEffect">
+                                  <p:stCondLst>
+                                    <p:cond delay="0"/>
+                                  </p:stCondLst>
+                                  <p:childTnLst>
+                                    <p:set>
+                                      <p:cBhvr>
+                                        <p:cTn id="22" dur="1" fill="hold">
+                                          <p:stCondLst>
+                                            <p:cond delay="0"/>
+                                          </p:stCondLst>
+                                        </p:cTn>
+                                        <p:tgtEl>
+                                          <p:spTgt spid="30"/>
+                                        </p:tgtEl>
+                                        <p:attrNameLst>
+                                          <p:attrName>style.visibility</p:attrName>
+                                        </p:attrNameLst>
+                                      </p:cBhvr>
+                                      <p:to>
+                                        <p:strVal val="visible"/>
+                                      </p:to>
+                                    </p:set>
+                                  </p:childTnLst>
+                                </p:cTn>
+                              </p:par>
+                            </p:childTnLst>
+                          </p:cTn>
+                        </p:par>
+                      </p:childTnLst>
+                    </p:cTn>
+                  </p:par>
+                </p:childTnLst>
+              </p:cTn>
+              <p:prevCondLst>
+                <p:cond evt="onPrev" delay="0">
+                  <p:tgtEl>
+                    <p:sldTgt/>
+                  </p:tgtEl>
+                </p:cond>
+              </p:prevCondLst>
+              <p:nextCondLst>
+                <p:cond evt="onNext" delay="0">
+                  <p:tgtEl>
+                    <p:sldTgt/>
+                  </p:tgtEl>
+                </p:cond>
+              </p:nextCondLst>
+            </p:seq>
+          </p:childTnLst>
+        </p:cTn>
+      </p:par>
+    </p:tnLst>
+    <p:bldLst>
+      <p:bldP spid="26" grpId="0" animBg="1"/>
+      <p:bldP spid="27" grpId="0"/>
+      <p:bldP spid="28" grpId="0" animBg="1"/>
+      <p:bldP spid="29" grpId="0"/>
+      <p:bldP spid="30" grpId="1"/>
+    </p:bldLst>
+  </p:timing>
+</p:sld>
+</file>
+
+<file path=ppt/slides/slide6.xml><?xml version="1.0" encoding="utf-8"?>
+<p:sld xmlns:a="http://schemas.openxmlformats.org/drawingml/2006/main" xmlns:r="http://schemas.openxmlformats.org/officeDocument/2006/relationships" xmlns:p="http://schemas.openxmlformats.org/presentationml/2006/main">
+  <p:cSld>
+    <p:spTree>
+      <p:nvGrpSpPr>
+        <p:cNvPr id="1" name=""/>
+        <p:cNvGrpSpPr/>
+        <p:nvPr/>
+      </p:nvGrpSpPr>
+      <p:grpSpPr/>
+      <p:grpSp>
+        <p:nvGrpSpPr>
+          <p:cNvPr id="19" name="组合 18"/>
+          <p:cNvGrpSpPr/>
+          <p:nvPr/>
+        </p:nvGrpSpPr>
+        <p:grpSpPr>
+          <a:xfrm>
+            <a:off x="1316990" y="216535"/>
+            <a:ext cx="4204970" cy="6036310"/>
+            <a:chOff x="10480" y="341"/>
+            <a:chExt cx="6622" cy="9506"/>
+          </a:xfrm>
+        </p:grpSpPr>
+        <p:grpSp>
+          <p:nvGrpSpPr>
+            <p:cNvPr id="20" name="组合 19"/>
+            <p:cNvGrpSpPr/>
+            <p:nvPr/>
+          </p:nvGrpSpPr>
+          <p:grpSpPr>
+            <a:xfrm>
+              <a:off x="10480" y="341"/>
+              <a:ext cx="6622" cy="9506"/>
+              <a:chOff x="10480" y="341"/>
+              <a:chExt cx="6622" cy="9506"/>
+            </a:xfrm>
+          </p:grpSpPr>
+          <p:sp>
+            <p:nvSpPr>
+              <p:cNvPr id="21" name="矩形 20"/>
+              <p:cNvSpPr/>
+              <p:nvPr/>
+            </p:nvSpPr>
+            <p:spPr>
+              <a:xfrm>
+                <a:off x="10623" y="954"/>
+                <a:ext cx="6337" cy="8893"/>
+              </a:xfrm>
+              <a:prstGeom prst="rect">
+                <a:avLst/>
+              </a:prstGeom>
+              <a:noFill/>
+              <a:ln w="73025">
+                <a:solidFill>
+                  <a:schemeClr val="accent6"/>
+                </a:solidFill>
+              </a:ln>
+            </p:spPr>
+            <p:style>
+              <a:lnRef idx="2">
+                <a:schemeClr val="accent1">
+                  <a:lumMod val="75000"/>
+                </a:schemeClr>
+              </a:lnRef>
+              <a:fillRef idx="1">
+                <a:schemeClr val="accent1"/>
+              </a:fillRef>
+              <a:effectRef idx="0">
+                <a:srgbClr val="FFFFFF"/>
+              </a:effectRef>
+              <a:fontRef idx="minor">
+                <a:schemeClr val="lt1"/>
+              </a:fontRef>
+            </p:style>
+            <p:txBody>
+              <a:bodyPr rtlCol="0" anchor="ctr"/>
+              <a:p>
+                <a:pPr algn="ctr"/>
+                <a:endParaRPr lang="zh-CN" altLang="en-US"/>
+              </a:p>
+            </p:txBody>
+          </p:sp>
+          <p:sp>
+            <p:nvSpPr>
+              <p:cNvPr id="22" name="矩形 21"/>
+              <p:cNvSpPr/>
+              <p:nvPr/>
+            </p:nvSpPr>
+            <p:spPr>
+              <a:xfrm>
+                <a:off x="10480" y="341"/>
+                <a:ext cx="6622" cy="1286"/>
+              </a:xfrm>
+              <a:prstGeom prst="rect">
+                <a:avLst/>
+              </a:prstGeom>
+              <a:solidFill>
+                <a:schemeClr val="bg1"/>
+              </a:solidFill>
+              <a:ln>
+                <a:noFill/>
+              </a:ln>
+            </p:spPr>
+            <p:style>
+              <a:lnRef idx="2">
+                <a:schemeClr val="accent1">
+                  <a:lumMod val="75000"/>
+                </a:schemeClr>
+              </a:lnRef>
+              <a:fillRef idx="1">
+                <a:schemeClr val="accent1"/>
+              </a:fillRef>
+              <a:effectRef idx="0">
+                <a:srgbClr val="FFFFFF"/>
+              </a:effectRef>
+              <a:fontRef idx="minor">
+                <a:schemeClr val="lt1"/>
+              </a:fontRef>
+            </p:style>
+            <p:txBody>
+              <a:bodyPr rtlCol="0" anchor="ctr"/>
+              <a:p>
+                <a:pPr algn="ctr"/>
+                <a:endParaRPr lang="zh-CN" altLang="en-US"/>
+              </a:p>
+            </p:txBody>
+          </p:sp>
+        </p:grpSp>
+        <p:sp>
+          <p:nvSpPr>
+            <p:cNvPr id="23" name="圆角矩形 22"/>
+            <p:cNvSpPr/>
+            <p:nvPr/>
+          </p:nvSpPr>
+          <p:spPr>
+            <a:xfrm>
+              <a:off x="10766" y="8075"/>
+              <a:ext cx="6066" cy="1635"/>
+            </a:xfrm>
+            <a:prstGeom prst="roundRect">
+              <a:avLst/>
+            </a:prstGeom>
+            <a:solidFill>
+              <a:schemeClr val="accent6"/>
+            </a:solidFill>
+            <a:ln>
+              <a:solidFill>
+                <a:schemeClr val="accent6"/>
+              </a:solidFill>
+            </a:ln>
+          </p:spPr>
+          <p:style>
+            <a:lnRef idx="2">
+              <a:schemeClr val="accent1">
+                <a:lumMod val="75000"/>
+              </a:schemeClr>
+            </a:lnRef>
+            <a:fillRef idx="1">
+              <a:schemeClr val="accent1"/>
+            </a:fillRef>
+            <a:effectRef idx="0">
+              <a:srgbClr val="FFFFFF"/>
+            </a:effectRef>
+            <a:fontRef idx="minor">
+              <a:schemeClr val="lt1"/>
+            </a:fontRef>
+          </p:style>
+          <p:txBody>
+            <a:bodyPr rtlCol="0" anchor="ctr"/>
+            <a:p>
+              <a:pPr algn="ctr"/>
+              <a:endParaRPr lang="zh-CN" altLang="en-US"/>
+            </a:p>
+          </p:txBody>
+        </p:sp>
+        <p:sp>
+          <p:nvSpPr>
+            <p:cNvPr id="24" name="圆角矩形 23"/>
+            <p:cNvSpPr/>
+            <p:nvPr/>
+          </p:nvSpPr>
+          <p:spPr>
+            <a:xfrm>
+              <a:off x="10766" y="6211"/>
+              <a:ext cx="6066" cy="1635"/>
+            </a:xfrm>
+            <a:prstGeom prst="roundRect">
+              <a:avLst/>
+            </a:prstGeom>
+            <a:solidFill>
+              <a:schemeClr val="accent6"/>
+            </a:solidFill>
+            <a:ln>
+              <a:solidFill>
+                <a:schemeClr val="accent6"/>
+              </a:solidFill>
+            </a:ln>
+          </p:spPr>
+          <p:style>
+            <a:lnRef idx="2">
+              <a:schemeClr val="accent1">
+                <a:lumMod val="75000"/>
+              </a:schemeClr>
+            </a:lnRef>
+            <a:fillRef idx="1">
+              <a:schemeClr val="accent1"/>
+            </a:fillRef>
+            <a:effectRef idx="0">
+              <a:srgbClr val="FFFFFF"/>
+            </a:effectRef>
+            <a:fontRef idx="minor">
+              <a:schemeClr val="lt1"/>
+            </a:fontRef>
+          </p:style>
+          <p:txBody>
+            <a:bodyPr rtlCol="0" anchor="ctr"/>
+            <a:p>
+              <a:pPr algn="ctr"/>
+              <a:endParaRPr lang="zh-CN" altLang="en-US"/>
+            </a:p>
+          </p:txBody>
+        </p:sp>
+        <p:sp>
+          <p:nvSpPr>
+            <p:cNvPr id="25" name="圆角矩形 24"/>
+            <p:cNvSpPr/>
+            <p:nvPr/>
+          </p:nvSpPr>
+          <p:spPr>
+            <a:xfrm>
+              <a:off x="10766" y="4347"/>
+              <a:ext cx="6066" cy="1635"/>
+            </a:xfrm>
+            <a:prstGeom prst="roundRect">
+              <a:avLst/>
+            </a:prstGeom>
+            <a:solidFill>
+              <a:schemeClr val="accent6"/>
+            </a:solidFill>
+            <a:ln>
+              <a:solidFill>
+                <a:schemeClr val="accent6"/>
+              </a:solidFill>
+            </a:ln>
+          </p:spPr>
+          <p:style>
+            <a:lnRef idx="2">
+              <a:schemeClr val="accent1">
+                <a:lumMod val="75000"/>
+              </a:schemeClr>
+            </a:lnRef>
+            <a:fillRef idx="1">
+              <a:schemeClr val="accent1"/>
+            </a:fillRef>
+            <a:effectRef idx="0">
+              <a:srgbClr val="FFFFFF"/>
+            </a:effectRef>
+            <a:fontRef idx="minor">
+              <a:schemeClr val="lt1"/>
+            </a:fontRef>
+          </p:style>
+          <p:txBody>
+            <a:bodyPr rtlCol="0" anchor="ctr"/>
+            <a:p>
+              <a:pPr algn="ctr"/>
+              <a:endParaRPr lang="zh-CN" altLang="en-US"/>
+            </a:p>
+          </p:txBody>
+        </p:sp>
+      </p:grpSp>
+      <p:sp>
+        <p:nvSpPr>
+          <p:cNvPr id="2" name="圆角矩形 1"/>
+          <p:cNvSpPr/>
+          <p:nvPr/>
+        </p:nvSpPr>
+        <p:spPr>
+          <a:xfrm>
+            <a:off x="7020560" y="5127625"/>
+            <a:ext cx="3851910" cy="1038225"/>
+          </a:xfrm>
+          <a:prstGeom prst="roundRect">
+            <a:avLst/>
+          </a:prstGeom>
+          <a:solidFill>
+            <a:srgbClr val="FFFF00"/>
+          </a:solidFill>
+          <a:ln>
+            <a:solidFill>
+              <a:srgbClr val="FFFF00"/>
+            </a:solidFill>
+          </a:ln>
+        </p:spPr>
+        <p:style>
+          <a:lnRef idx="2">
+            <a:schemeClr val="accent1">
+              <a:lumMod val="75000"/>
+            </a:schemeClr>
+          </a:lnRef>
+          <a:fillRef idx="1">
+            <a:schemeClr val="accent1"/>
+          </a:fillRef>
+          <a:effectRef idx="0">
+            <a:srgbClr val="FFFFFF"/>
+          </a:effectRef>
+          <a:fontRef idx="minor">
+            <a:schemeClr val="lt1"/>
+          </a:fontRef>
+        </p:style>
+        <p:txBody>
+          <a:bodyPr rtlCol="0" anchor="ctr"/>
+          <a:p>
+            <a:pPr algn="ctr"/>
+            <a:endParaRPr lang="zh-CN" altLang="en-US"/>
+          </a:p>
+        </p:txBody>
+      </p:sp>
+      <p:sp>
+        <p:nvSpPr>
+          <p:cNvPr id="4" name="文本框 3"/>
+          <p:cNvSpPr txBox="1"/>
+          <p:nvPr/>
+        </p:nvSpPr>
+        <p:spPr>
+          <a:xfrm>
+            <a:off x="7020560" y="1113790"/>
+            <a:ext cx="3851910" cy="1322070"/>
+          </a:xfrm>
+          <a:prstGeom prst="rect">
+            <a:avLst/>
+          </a:prstGeom>
+          <a:noFill/>
+        </p:spPr>
+        <p:txBody>
+          <a:bodyPr wrap="square" rtlCol="0">
+            <a:spAutoFit/>
+          </a:bodyPr>
+          <a:p>
+            <a:r>
+              <a:rPr lang="zh-CN" altLang="en-US" sz="4000" b="1">
+                <a:latin typeface="微软雅黑" panose="020B0503020204020204" charset="-122"/>
+                <a:ea typeface="微软雅黑" panose="020B0503020204020204" charset="-122"/>
+                <a:cs typeface="微软雅黑" panose="020B0503020204020204" charset="-122"/>
+              </a:rPr>
+              <a:t>入栈（</a:t>
+            </a:r>
+            <a:r>
+              <a:rPr lang="en-US" altLang="zh-CN" sz="4000" b="1">
+                <a:latin typeface="微软雅黑" panose="020B0503020204020204" charset="-122"/>
+                <a:ea typeface="微软雅黑" panose="020B0503020204020204" charset="-122"/>
+                <a:cs typeface="微软雅黑" panose="020B0503020204020204" charset="-122"/>
+              </a:rPr>
+              <a:t>push</a:t>
+            </a:r>
+            <a:r>
+              <a:rPr lang="zh-CN" altLang="en-US" sz="4000" b="1">
+                <a:latin typeface="微软雅黑" panose="020B0503020204020204" charset="-122"/>
+                <a:ea typeface="微软雅黑" panose="020B0503020204020204" charset="-122"/>
+                <a:cs typeface="微软雅黑" panose="020B0503020204020204" charset="-122"/>
+              </a:rPr>
+              <a:t>）：将元素压入</a:t>
+            </a:r>
+            <a:r>
+              <a:rPr lang="zh-CN" altLang="en-US" sz="4000" b="1">
+                <a:solidFill>
+                  <a:srgbClr val="FF0000"/>
+                </a:solidFill>
+                <a:latin typeface="微软雅黑" panose="020B0503020204020204" charset="-122"/>
+                <a:ea typeface="微软雅黑" panose="020B0503020204020204" charset="-122"/>
+                <a:cs typeface="微软雅黑" panose="020B0503020204020204" charset="-122"/>
+              </a:rPr>
+              <a:t>栈顶</a:t>
+            </a:r>
+            <a:endParaRPr lang="zh-CN" altLang="en-US" sz="4000" b="1">
+              <a:solidFill>
+                <a:srgbClr val="FF0000"/>
+              </a:solidFill>
+              <a:latin typeface="微软雅黑" panose="020B0503020204020204" charset="-122"/>
+              <a:ea typeface="微软雅黑" panose="020B0503020204020204" charset="-122"/>
+              <a:cs typeface="微软雅黑" panose="020B0503020204020204" charset="-122"/>
+            </a:endParaRPr>
+          </a:p>
+        </p:txBody>
+      </p:sp>
+    </p:spTree>
+  </p:cSld>
+  <p:clrMapOvr>
+    <a:masterClrMapping/>
+  </p:clrMapOvr>
+  <mc:AlternateContent xmlns:mc="http://schemas.openxmlformats.org/markup-compatibility/2006" xmlns:p159="http://schemas.microsoft.com/office/powerpoint/2015/09/main">
+    <mc:Choice Requires="p159">
+      <p:transition xmlns:p14="http://schemas.microsoft.com/office/powerpoint/2010/main" spd="slow" p14:dur="2000">
+        <p159:morph option="byObject"/>
+      </p:transition>
+    </mc:Choice>
+    <mc:Fallback>
+      <p:transition spd="slow">
+        <p:fade/>
+      </p:transition>
+    </mc:Fallback>
+  </mc:AlternateContent>
+  <p:timing>
+    <p:tnLst>
+      <p:par>
+        <p:cTn id="1" dur="indefinite" restart="never" nodeType="tmRoot">
+          <p:childTnLst>
+            <p:seq concurrent="1" nextAc="seek">
+              <p:cTn id="2" dur="indefinite" nodeType="mainSeq">
+                <p:childTnLst>
+                  <p:par>
+                    <p:cTn id="3" fill="hold">
+                      <p:stCondLst>
+                        <p:cond delay="indefinite"/>
+                      </p:stCondLst>
+                      <p:childTnLst>
+                        <p:par>
+                          <p:cTn id="4" fill="hold">
+                            <p:stCondLst>
+                              <p:cond delay="0"/>
+                            </p:stCondLst>
+                            <p:childTnLst>
+                              <p:par>
+                                <p:cTn id="5" presetID="0" presetClass="path" presetSubtype="0" accel="50000" decel="50000" fill="hold" grpId="0" nodeType="clickEffect">
+                                  <p:stCondLst>
+                                    <p:cond delay="0"/>
+                                  </p:stCondLst>
+                                  <p:childTnLst>
+                                    <p:animMotion origin="layout" path="M -0.00234374 -0.0712035 L 0.000156253 -0.083148 L 0.00182292 -0.0994475 L 0.00348959 -0.117319 L 0.00348959 -0.129262 L 0.00515626 -0.150097 L 0.00682292 -0.166392 L 0.00682292 -0.185743 L 0.00682292 -0.206577 L 0.00682292 -0.227409 L 0.00682292 -0.239355 L 0.00682292 -0.255652 L 0.00682292 -0.277966 L 0.00515626 -0.28991 L 0.00515626 -0.306299 L 0.00432292 -0.319632 L 0.00432292 -0.330095 L 0.00265626 -0.344909 L 0.00265626 -0.356854 L 0.00182292 -0.367225 L 0.000989586 -0.377685 L 0.000989586 -0.389537 L -0.00067708 -0.401482 L -0.00234374 -0.413335 L -0.00234374 -0.423798 L -0.00317708 -0.435649 L -0.00656249 -0.462501 L -0.00822916 -0.477317 L -0.00906249 -0.49815 L -0.0123958 -0.523427 L -0.0148958 -0.53537 L -0.0157291 -0.551763 L -0.0174479 -0.563614 L -0.0199479 -0.578521 L -0.0216146 -0.588892 L -0.0232812 -0.599355 L -0.0257812 -0.614168 L -0.0266146 -0.624633 L -0.0291667 -0.635001 L -0.0316666 -0.645464 L -0.0341667 -0.658799 L -0.0366666 -0.670742 L -0.04 -0.68417 L -0.0417187 -0.694539 L -0.0442187 -0.705002 L -0.0467187 -0.715374 L -0.0525521 -0.725743 L -0.0584375 -0.731761 L -0.0651042 -0.736205 L -0.0718229 -0.739167 L -0.0810417 -0.742132 L -0.086875 -0.743614 L -0.0960937 -0.743614 L -0.101927 -0.743614 L -0.108646 -0.743614 L -0.114479 -0.743614 L -0.121198 -0.742132 L -0.127031 -0.742132 L -0.134583 -0.742132 L -0.140417 -0.742132 L -0.146302 -0.742132 L -0.153802 -0.742132 L -0.160521 -0.742132 L -0.166406 -0.740649 L -0.17224 -0.739167 L -0.178073 -0.739167 L -0.183958 -0.736205 L -0.189792 -0.736205 L -0.195677 -0.736205 L -0.202344 -0.736205 L -0.208229 -0.736205 L -0.214063 -0.736205 L -0.220781 -0.736205 L -0.227448 -0.736205 L -0.233333 -0.739167 L -0.24 -0.739167 L -0.245885 -0.739167 L -0.251719 -0.740649 L -0.257604 -0.740649 L -0.263438 -0.743614 L -0.27099 -0.743614 L -0.277656 -0.743614 L -0.283542 -0.743614 L -0.290208 -0.746576 L -0.296094 -0.746576 L -0.301927 -0.746576 L -0.307813 -0.743614 L -0.313646 -0.742132 L -0.319531 -0.739167 L -0.325365 -0.734724 L -0.33125 -0.73028 L -0.337917 -0.725743 L -0.344635 -0.719818 L -0.352136 -0.715374 L -0.358854 -0.709445 L -0.364688 -0.706483 L -0.370573 -0.703427 L -0.37724 -0.700464 L -0.383125 -0.696021 L -0.389792 -0.687133 L -0.39651 -0.676667 L -0.402344 -0.670742 L -0.408229 -0.657318 L -0.414063 -0.645464 L -0.419115 -0.635001 L -0.424115 -0.624633 L -0.428281 -0.614168 L -0.433333 -0.602318 L -0.435 -0.591855 L -0.4375 -0.581484 L -0.440833 -0.569539 L -0.444219 -0.55917 L -0.448386 -0.547224 L -0.450886 -0.536855 L -0.452552 -0.526392 L -0.453386 -0.516021 " pathEditMode="relative" rAng="0" ptsTypes="">
+                                      <p:cBhvr>
+                                        <p:cTn id="6" dur="2000" fill="hold"/>
+                                        <p:tgtEl>
+                                          <p:spTgt spid="2"/>
+                                        </p:tgtEl>
+                                        <p:attrNameLst>
+                                          <p:attrName>ppt_x</p:attrName>
+                                          <p:attrName>ppt_y</p:attrName>
+                                        </p:attrNameLst>
+                                      </p:cBhvr>
+                                      <p:rCtr x="-220" y="-337"/>
+                                    </p:animMotion>
+                                  </p:childTnLst>
+                                </p:cTn>
+                              </p:par>
+                              <p:par>
+                                <p:cTn id="7" presetID="10" presetClass="exit" presetSubtype="0" fill="hold" grpId="0" nodeType="withEffect">
+                                  <p:stCondLst>
+                                    <p:cond delay="0"/>
+                                  </p:stCondLst>
+                                  <p:childTnLst>
+                                    <p:animEffect transition="out" filter="fade">
+                                      <p:cBhvr>
+                                        <p:cTn id="8" dur="500"/>
+                                        <p:tgtEl>
+                                          <p:spTgt spid="4"/>
+                                        </p:tgtEl>
+                                      </p:cBhvr>
+                                    </p:animEffect>
+                                    <p:set>
+                                      <p:cBhvr>
+                                        <p:cTn id="9" dur="1" fill="hold">
+                                          <p:stCondLst>
+                                            <p:cond delay="499"/>
+                                          </p:stCondLst>
+                                        </p:cTn>
+                                        <p:tgtEl>
+                                          <p:spTgt spid="4"/>
+                                        </p:tgtEl>
+                                        <p:attrNameLst>
+                                          <p:attrName>style.visibility</p:attrName>
+                                        </p:attrNameLst>
+                                      </p:cBhvr>
+                                      <p:to>
+                                        <p:strVal val="hidden"/>
+                                      </p:to>
+                                    </p:set>
+                                  </p:childTnLst>
+                                </p:cTn>
+                              </p:par>
+                            </p:childTnLst>
+                          </p:cTn>
+                        </p:par>
+                      </p:childTnLst>
+                    </p:cTn>
+                  </p:par>
+                </p:childTnLst>
+              </p:cTn>
+              <p:prevCondLst>
+                <p:cond evt="onPrev" delay="0">
+                  <p:tgtEl>
+                    <p:sldTgt/>
+                  </p:tgtEl>
+                </p:cond>
+              </p:prevCondLst>
+              <p:nextCondLst>
+                <p:cond evt="onNext" delay="0">
+                  <p:tgtEl>
+                    <p:sldTgt/>
+                  </p:tgtEl>
+                </p:cond>
+              </p:nextCondLst>
+            </p:seq>
+          </p:childTnLst>
+        </p:cTn>
+      </p:par>
+    </p:tnLst>
+    <p:bldLst>
+      <p:bldP spid="2" grpId="0" animBg="1"/>
+      <p:bldP spid="4" grpId="0"/>
+    </p:bldLst>
+  </p:timing>
+</p:sld>
+</file>
+
+<file path=ppt/slides/slide7.xml><?xml version="1.0" encoding="utf-8"?>
+<p:sld xmlns:a="http://schemas.openxmlformats.org/drawingml/2006/main" xmlns:r="http://schemas.openxmlformats.org/officeDocument/2006/relationships" xmlns:p="http://schemas.openxmlformats.org/presentationml/2006/main">
+  <p:cSld>
+    <p:spTree>
+      <p:nvGrpSpPr>
+        <p:cNvPr id="1" name=""/>
+        <p:cNvGrpSpPr/>
+        <p:nvPr/>
+      </p:nvGrpSpPr>
+      <p:grpSpPr/>
+      <p:grpSp>
+        <p:nvGrpSpPr>
+          <p:cNvPr id="19" name="组合 18"/>
+          <p:cNvGrpSpPr/>
+          <p:nvPr/>
+        </p:nvGrpSpPr>
+        <p:grpSpPr>
+          <a:xfrm>
+            <a:off x="1316990" y="216535"/>
+            <a:ext cx="4204970" cy="6036310"/>
+            <a:chOff x="10480" y="341"/>
+            <a:chExt cx="6622" cy="9506"/>
+          </a:xfrm>
+        </p:grpSpPr>
+        <p:grpSp>
+          <p:nvGrpSpPr>
+            <p:cNvPr id="20" name="组合 19"/>
+            <p:cNvGrpSpPr/>
+            <p:nvPr/>
+          </p:nvGrpSpPr>
+          <p:grpSpPr>
+            <a:xfrm>
+              <a:off x="10480" y="341"/>
+              <a:ext cx="6622" cy="9506"/>
+              <a:chOff x="10480" y="341"/>
+              <a:chExt cx="6622" cy="9506"/>
+            </a:xfrm>
+          </p:grpSpPr>
+          <p:sp>
+            <p:nvSpPr>
+              <p:cNvPr id="21" name="矩形 20"/>
+              <p:cNvSpPr/>
+              <p:nvPr/>
+            </p:nvSpPr>
+            <p:spPr>
+              <a:xfrm>
+                <a:off x="10623" y="954"/>
+                <a:ext cx="6337" cy="8893"/>
+              </a:xfrm>
+              <a:prstGeom prst="rect">
+                <a:avLst/>
+              </a:prstGeom>
+              <a:noFill/>
+              <a:ln w="73025">
+                <a:solidFill>
+                  <a:schemeClr val="accent6"/>
+                </a:solidFill>
+              </a:ln>
+            </p:spPr>
+            <p:style>
+              <a:lnRef idx="2">
+                <a:schemeClr val="accent1">
+                  <a:lumMod val="75000"/>
+                </a:schemeClr>
+              </a:lnRef>
+              <a:fillRef idx="1">
+                <a:schemeClr val="accent1"/>
+              </a:fillRef>
+              <a:effectRef idx="0">
+                <a:srgbClr val="FFFFFF"/>
+              </a:effectRef>
+              <a:fontRef idx="minor">
+                <a:schemeClr val="lt1"/>
+              </a:fontRef>
+            </p:style>
+            <p:txBody>
+              <a:bodyPr rtlCol="0" anchor="ctr"/>
+              <a:p>
+                <a:pPr algn="ctr"/>
+                <a:endParaRPr lang="zh-CN" altLang="en-US"/>
+              </a:p>
+            </p:txBody>
+          </p:sp>
+          <p:sp>
+            <p:nvSpPr>
+              <p:cNvPr id="22" name="矩形 21"/>
+              <p:cNvSpPr/>
+              <p:nvPr/>
+            </p:nvSpPr>
+            <p:spPr>
+              <a:xfrm>
+                <a:off x="10480" y="341"/>
+                <a:ext cx="6622" cy="1286"/>
+              </a:xfrm>
+              <a:prstGeom prst="rect">
+                <a:avLst/>
+              </a:prstGeom>
+              <a:solidFill>
+                <a:schemeClr val="bg1"/>
+              </a:solidFill>
+              <a:ln>
+                <a:noFill/>
+              </a:ln>
+            </p:spPr>
+            <p:style>
+              <a:lnRef idx="2">
+                <a:schemeClr val="accent1">
+                  <a:lumMod val="75000"/>
+                </a:schemeClr>
+              </a:lnRef>
+              <a:fillRef idx="1">
+                <a:schemeClr val="accent1"/>
+              </a:fillRef>
+              <a:effectRef idx="0">
+                <a:srgbClr val="FFFFFF"/>
+              </a:effectRef>
+              <a:fontRef idx="minor">
+                <a:schemeClr val="lt1"/>
+              </a:fontRef>
+            </p:style>
+            <p:txBody>
+              <a:bodyPr rtlCol="0" anchor="ctr"/>
+              <a:p>
+                <a:pPr algn="ctr"/>
+                <a:endParaRPr lang="zh-CN" altLang="en-US"/>
+              </a:p>
+            </p:txBody>
+          </p:sp>
+        </p:grpSp>
+        <p:sp>
+          <p:nvSpPr>
+            <p:cNvPr id="23" name="圆角矩形 22"/>
+            <p:cNvSpPr/>
+            <p:nvPr/>
+          </p:nvSpPr>
+          <p:spPr>
+            <a:xfrm>
+              <a:off x="10766" y="8075"/>
+              <a:ext cx="6066" cy="1635"/>
+            </a:xfrm>
+            <a:prstGeom prst="roundRect">
+              <a:avLst/>
+            </a:prstGeom>
+            <a:solidFill>
+              <a:schemeClr val="accent6"/>
+            </a:solidFill>
+            <a:ln>
+              <a:solidFill>
+                <a:schemeClr val="accent6"/>
+              </a:solidFill>
+            </a:ln>
+          </p:spPr>
+          <p:style>
+            <a:lnRef idx="2">
+              <a:schemeClr val="accent1">
+                <a:lumMod val="75000"/>
+              </a:schemeClr>
+            </a:lnRef>
+            <a:fillRef idx="1">
+              <a:schemeClr val="accent1"/>
+            </a:fillRef>
+            <a:effectRef idx="0">
+              <a:srgbClr val="FFFFFF"/>
+            </a:effectRef>
+            <a:fontRef idx="minor">
+              <a:schemeClr val="lt1"/>
+            </a:fontRef>
+          </p:style>
+          <p:txBody>
+            <a:bodyPr rtlCol="0" anchor="ctr"/>
+            <a:p>
+              <a:pPr algn="ctr"/>
+              <a:endParaRPr lang="zh-CN" altLang="en-US"/>
+            </a:p>
+          </p:txBody>
+        </p:sp>
+        <p:sp>
+          <p:nvSpPr>
+            <p:cNvPr id="24" name="圆角矩形 23"/>
+            <p:cNvSpPr/>
+            <p:nvPr/>
+          </p:nvSpPr>
+          <p:spPr>
+            <a:xfrm>
+              <a:off x="10766" y="6211"/>
+              <a:ext cx="6066" cy="1635"/>
+            </a:xfrm>
+            <a:prstGeom prst="roundRect">
+              <a:avLst/>
+            </a:prstGeom>
+            <a:solidFill>
+              <a:schemeClr val="accent6"/>
+            </a:solidFill>
+            <a:ln>
+              <a:solidFill>
+                <a:schemeClr val="accent6"/>
+              </a:solidFill>
+            </a:ln>
+          </p:spPr>
+          <p:style>
+            <a:lnRef idx="2">
+              <a:schemeClr val="accent1">
+                <a:lumMod val="75000"/>
+              </a:schemeClr>
+            </a:lnRef>
+            <a:fillRef idx="1">
+              <a:schemeClr val="accent1"/>
+            </a:fillRef>
+            <a:effectRef idx="0">
+              <a:srgbClr val="FFFFFF"/>
+            </a:effectRef>
+            <a:fontRef idx="minor">
+              <a:schemeClr val="lt1"/>
+            </a:fontRef>
+          </p:style>
+          <p:txBody>
+            <a:bodyPr rtlCol="0" anchor="ctr"/>
+            <a:p>
+              <a:pPr algn="ctr"/>
+              <a:endParaRPr lang="zh-CN" altLang="en-US"/>
+            </a:p>
+          </p:txBody>
+        </p:sp>
+        <p:sp>
+          <p:nvSpPr>
+            <p:cNvPr id="25" name="圆角矩形 24"/>
+            <p:cNvSpPr/>
+            <p:nvPr/>
+          </p:nvSpPr>
+          <p:spPr>
+            <a:xfrm>
+              <a:off x="10766" y="4347"/>
+              <a:ext cx="6066" cy="1635"/>
+            </a:xfrm>
+            <a:prstGeom prst="roundRect">
+              <a:avLst/>
+            </a:prstGeom>
+            <a:solidFill>
+              <a:schemeClr val="accent6"/>
+            </a:solidFill>
+            <a:ln>
+              <a:solidFill>
+                <a:schemeClr val="accent6"/>
+              </a:solidFill>
+            </a:ln>
+          </p:spPr>
+          <p:style>
+            <a:lnRef idx="2">
+              <a:schemeClr val="accent1">
+                <a:lumMod val="75000"/>
+              </a:schemeClr>
+            </a:lnRef>
+            <a:fillRef idx="1">
+              <a:schemeClr val="accent1"/>
+            </a:fillRef>
+            <a:effectRef idx="0">
+              <a:srgbClr val="FFFFFF"/>
+            </a:effectRef>
+            <a:fontRef idx="minor">
+              <a:schemeClr val="lt1"/>
+            </a:fontRef>
+          </p:style>
+          <p:txBody>
+            <a:bodyPr rtlCol="0" anchor="ctr"/>
+            <a:p>
+              <a:pPr algn="ctr"/>
+              <a:endParaRPr lang="zh-CN" altLang="en-US"/>
+            </a:p>
+          </p:txBody>
+        </p:sp>
+      </p:grpSp>
+      <p:sp>
+        <p:nvSpPr>
+          <p:cNvPr id="2" name="圆角矩形 1"/>
+          <p:cNvSpPr/>
+          <p:nvPr/>
+        </p:nvSpPr>
+        <p:spPr>
+          <a:xfrm>
+            <a:off x="1498600" y="1576705"/>
+            <a:ext cx="3851910" cy="1038225"/>
+          </a:xfrm>
+          <a:prstGeom prst="roundRect">
+            <a:avLst/>
+          </a:prstGeom>
+          <a:solidFill>
+            <a:srgbClr val="FFFF00"/>
+          </a:solidFill>
+          <a:ln>
+            <a:solidFill>
+              <a:srgbClr val="FFFF00"/>
+            </a:solidFill>
+          </a:ln>
+        </p:spPr>
+        <p:style>
+          <a:lnRef idx="2">
+            <a:schemeClr val="accent1">
+              <a:lumMod val="75000"/>
+            </a:schemeClr>
+          </a:lnRef>
+          <a:fillRef idx="1">
+            <a:schemeClr val="accent1"/>
+          </a:fillRef>
+          <a:effectRef idx="0">
+            <a:srgbClr val="FFFFFF"/>
+          </a:effectRef>
+          <a:fontRef idx="minor">
+            <a:schemeClr val="lt1"/>
+          </a:fontRef>
+        </p:style>
+        <p:txBody>
+          <a:bodyPr rtlCol="0" anchor="ctr"/>
+          <a:p>
+            <a:pPr algn="ctr"/>
+            <a:endParaRPr lang="zh-CN" altLang="en-US"/>
+          </a:p>
+        </p:txBody>
+      </p:sp>
+      <p:sp>
+        <p:nvSpPr>
+          <p:cNvPr id="4" name="文本框 3"/>
+          <p:cNvSpPr txBox="1"/>
+          <p:nvPr/>
+        </p:nvSpPr>
+        <p:spPr>
+          <a:xfrm>
+            <a:off x="7020560" y="1113790"/>
+            <a:ext cx="4249420" cy="1322070"/>
+          </a:xfrm>
+          <a:prstGeom prst="rect">
+            <a:avLst/>
+          </a:prstGeom>
+          <a:noFill/>
+        </p:spPr>
+        <p:txBody>
+          <a:bodyPr wrap="square" rtlCol="0">
+            <a:spAutoFit/>
+          </a:bodyPr>
+          <a:p>
+            <a:r>
+              <a:rPr lang="zh-CN" altLang="en-US" sz="4000" b="1">
+                <a:latin typeface="微软雅黑" panose="020B0503020204020204" charset="-122"/>
+                <a:ea typeface="微软雅黑" panose="020B0503020204020204" charset="-122"/>
+                <a:cs typeface="微软雅黑" panose="020B0503020204020204" charset="-122"/>
+              </a:rPr>
+              <a:t>出栈（</a:t>
+            </a:r>
+            <a:r>
+              <a:rPr lang="en-US" altLang="zh-CN" sz="4000" b="1">
+                <a:latin typeface="微软雅黑" panose="020B0503020204020204" charset="-122"/>
+                <a:ea typeface="微软雅黑" panose="020B0503020204020204" charset="-122"/>
+                <a:cs typeface="微软雅黑" panose="020B0503020204020204" charset="-122"/>
+              </a:rPr>
+              <a:t>pop</a:t>
+            </a:r>
+            <a:r>
+              <a:rPr lang="zh-CN" altLang="en-US" sz="4000" b="1">
+                <a:latin typeface="微软雅黑" panose="020B0503020204020204" charset="-122"/>
+                <a:ea typeface="微软雅黑" panose="020B0503020204020204" charset="-122"/>
+                <a:cs typeface="微软雅黑" panose="020B0503020204020204" charset="-122"/>
+              </a:rPr>
+              <a:t>）：将元素从</a:t>
+            </a:r>
+            <a:r>
+              <a:rPr lang="zh-CN" altLang="en-US" sz="4000" b="1">
+                <a:solidFill>
+                  <a:srgbClr val="FF0000"/>
+                </a:solidFill>
+                <a:latin typeface="微软雅黑" panose="020B0503020204020204" charset="-122"/>
+                <a:ea typeface="微软雅黑" panose="020B0503020204020204" charset="-122"/>
+                <a:cs typeface="微软雅黑" panose="020B0503020204020204" charset="-122"/>
+              </a:rPr>
+              <a:t>栈顶</a:t>
+            </a:r>
+            <a:r>
+              <a:rPr lang="zh-CN" altLang="en-US" sz="4000" b="1">
+                <a:solidFill>
+                  <a:schemeClr val="tx1"/>
+                </a:solidFill>
+                <a:latin typeface="微软雅黑" panose="020B0503020204020204" charset="-122"/>
+                <a:ea typeface="微软雅黑" panose="020B0503020204020204" charset="-122"/>
+                <a:cs typeface="微软雅黑" panose="020B0503020204020204" charset="-122"/>
+              </a:rPr>
+              <a:t>弹出</a:t>
+            </a:r>
+            <a:endParaRPr lang="zh-CN" altLang="en-US" sz="4000" b="1">
+              <a:solidFill>
+                <a:schemeClr val="tx1"/>
+              </a:solidFill>
+              <a:latin typeface="微软雅黑" panose="020B0503020204020204" charset="-122"/>
+              <a:ea typeface="微软雅黑" panose="020B0503020204020204" charset="-122"/>
+              <a:cs typeface="微软雅黑" panose="020B0503020204020204" charset="-122"/>
+            </a:endParaRPr>
+          </a:p>
+        </p:txBody>
+      </p:sp>
+    </p:spTree>
+  </p:cSld>
+  <p:clrMapOvr>
+    <a:masterClrMapping/>
+  </p:clrMapOvr>
+  <mc:AlternateContent xmlns:mc="http://schemas.openxmlformats.org/markup-compatibility/2006" xmlns:p159="http://schemas.microsoft.com/office/powerpoint/2015/09/main">
+    <mc:Choice Requires="p159">
+      <p:transition xmlns:p14="http://schemas.microsoft.com/office/powerpoint/2010/main" spd="slow" p14:dur="2000">
+        <p159:morph option="byObject"/>
+      </p:transition>
+    </mc:Choice>
+    <mc:Fallback>
+      <p:transition spd="slow">
+        <p:fade/>
+      </p:transition>
+    </mc:Fallback>
+  </mc:AlternateContent>
+  <p:timing>
+    <p:tnLst>
+      <p:par>
+        <p:cTn id="1" dur="indefinite" restart="never" nodeType="tmRoot">
+          <p:childTnLst>
+            <p:seq concurrent="1" nextAc="seek">
+              <p:cTn id="2" dur="indefinite" nodeType="mainSeq">
+                <p:childTnLst>
+                  <p:par>
+                    <p:cTn id="3" fill="hold">
+                      <p:stCondLst>
+                        <p:cond delay="indefinite"/>
+                      </p:stCondLst>
+                      <p:childTnLst>
+                        <p:par>
+                          <p:cTn id="4" fill="hold">
+                            <p:stCondLst>
+                              <p:cond delay="0"/>
+                            </p:stCondLst>
+                            <p:childTnLst>
+                              <p:par>
+                                <p:cTn id="5" presetID="0" presetClass="path" presetSubtype="0" accel="50000" decel="50000" fill="hold" grpId="0" nodeType="clickEffect">
+                                  <p:stCondLst>
+                                    <p:cond delay="0"/>
+                                  </p:stCondLst>
+                                  <p:childTnLst>
+                                    <p:animMotion origin="layout" path="M -3.17175e-05 0.0249516 L 0.000948885 0.0134839 L 0.0029101 -0.00112973 L 0.00487131 -0.0142211 L 0.00781314 -0.0304586 L 0.00879374 -0.0467974 L 0.00983563 -0.0631363 L 0.00983563 -0.0793737 L 0.0108163 -0.0924655 L 0.0108163 -0.105455 L 0.0108163 -0.116923 L 0.0117969 -0.131637 L 0.0127774 -0.144627 L 0.0127774 -0.156095 L 0.0127774 -0.167462 L 0.0127774 -0.178828 L 0.0137581 -0.191919 L 0.0147386 -0.203286 L 0.0147386 -0.214753 L 0.0157192 -0.226119 L 0.0176805 -0.237587 L 0.0246061 -0.240835 L 0.0324509 -0.244082 L 0.0413377 -0.248953 L 0.0482019 -0.2522 L 0.0590498 -0.257173 L 0.0678752 -0.257173 L 0.0806844 -0.260421 L 0.092513 -0.260421 L 0.100419 -0.260421 L 0.110225 -0.260421 L 0.124996 -0.260421 L 0.133882 -0.260421 L 0.14375 -0.260421 L 0.151594 -0.260421 L 0.159501 -0.260421 L 0.175251 -0.260421 L 0.186099 -0.260421 L 0.194925 -0.257173 L 0.203812 -0.257173 L 0.211657 -0.257173 L 0.220544 -0.257173 L 0.229369 -0.257173 L 0.238256 -0.253925 L 0.246162 -0.250577 L 0.254987 -0.250577 L 0.261912 -0.250577 L 0.268777 -0.247329 L 0.276683 -0.247329 L 0.293414 -0.245705 L 0.304263 -0.245705 L 0.311126 -0.245705 L 0.323937 -0.245705 L 0.3308 -0.242457 L 0.341649 -0.242457 L 0.348574 -0.242457 L 0.356419 -0.240835 L 0.363344 -0.240835 L 0.371189 -0.240835 L 0.380076 -0.237587 L 0.386939 -0.237587 L 0.393866 -0.235964 L 0.40073 -0.235964 L 0.407655 -0.235964 L 0.41452 -0.234339 L 0.421445 -0.231091 L 0.428309 -0.229469 L 0.436215 -0.227744 L 0.443081 -0.224496 L 0.449944 -0.218001 L 0.453927 -0.206634 L 0.45785 -0.195167 L 0.461773 -0.183801 L 0.464715 -0.17071 L 0.466737 -0.157719 L 0.468698 -0.146252 L 0.469679 -0.133261 L 0.472621 -0.113675 L 0.474582 -0.0973362 L 0.477523 -0.0745024 L 0.479485 -0.058265 L 0.479485 -0.0435499 L 0.479485 -0.0320823 L 0.479485 -0.0174686 L 0.479485 -0.00112973 L 0.481508 0.0134839 L 0.483468 0.0510329 L 0.483468 0.0754905 L 0.483468 0.0902056 L 0.483468 0.116287 L 0.48543 0.137496 L 0.48543 0.148863 L 0.48543 0.16845 L 0.48543 0.184687 L 0.48543 0.196155 L 0.48641 0.209145 L 0.48641 0.220613 L 0.48641 0.233602 L 0.48641 0.246694 L 0.488372 0.259784 L 0.488372 0.271151 L 0.488372 0.285867 L 0.488372 0.297232 L 0.488372 0.310324 L 0.488372 0.32169 L 0.490333 0.334782 L 0.490333 0.347771 L 0.490333 0.360862 L 0.490333 0.3771 L 0.490333 0.390192 L 0.490333 0.403182 L 0.490333 0.424392 L 0.490333 0.439106 L 0.489351 0.450473 L 0.489351 0.461941 L 0.489351 0.473306 L 0.488372 0.486399 L 0.487392 0.497764 L 0.48641 0.509232 L 0.48543 0.520598 " pathEditMode="relative" rAng="0" ptsTypes="">
+                                      <p:cBhvr>
+                                        <p:cTn id="6" dur="2000" fill="hold"/>
+                                        <p:tgtEl>
+                                          <p:spTgt spid="2"/>
+                                        </p:tgtEl>
+                                        <p:attrNameLst>
+                                          <p:attrName>ppt_x</p:attrName>
+                                          <p:attrName>ppt_y</p:attrName>
+                                        </p:attrNameLst>
+                                      </p:cBhvr>
+                                      <p:rCtr x="245" y="105"/>
+                                    </p:animMotion>
+                                  </p:childTnLst>
+                                </p:cTn>
+                              </p:par>
+                              <p:par>
+                                <p:cTn id="7" presetID="10" presetClass="exit" presetSubtype="0" fill="hold" grpId="0" nodeType="withEffect">
+                                  <p:stCondLst>
+                                    <p:cond delay="0"/>
+                                  </p:stCondLst>
+                                  <p:childTnLst>
+                                    <p:animEffect transition="out" filter="fade">
+                                      <p:cBhvr>
+                                        <p:cTn id="8" dur="500"/>
+                                        <p:tgtEl>
+                                          <p:spTgt spid="4"/>
+                                        </p:tgtEl>
+                                      </p:cBhvr>
+                                    </p:animEffect>
+                                    <p:set>
+                                      <p:cBhvr>
+                                        <p:cTn id="9" dur="1" fill="hold">
+                                          <p:stCondLst>
+                                            <p:cond delay="499"/>
+                                          </p:stCondLst>
+                                        </p:cTn>
+                                        <p:tgtEl>
+                                          <p:spTgt spid="4"/>
+                                        </p:tgtEl>
+                                        <p:attrNameLst>
+                                          <p:attrName>style.visibility</p:attrName>
+                                        </p:attrNameLst>
+                                      </p:cBhvr>
+                                      <p:to>
+                                        <p:strVal val="hidden"/>
+                                      </p:to>
+                                    </p:set>
+                                  </p:childTnLst>
+                                </p:cTn>
+                              </p:par>
+                            </p:childTnLst>
+                          </p:cTn>
+                        </p:par>
+                      </p:childTnLst>
+                    </p:cTn>
+                  </p:par>
+                </p:childTnLst>
+              </p:cTn>
+              <p:prevCondLst>
+                <p:cond evt="onPrev" delay="0">
+                  <p:tgtEl>
+                    <p:sldTgt/>
+                  </p:tgtEl>
+                </p:cond>
+              </p:prevCondLst>
+              <p:nextCondLst>
+                <p:cond evt="onNext" delay="0">
+                  <p:tgtEl>
+                    <p:sldTgt/>
+                  </p:tgtEl>
+                </p:cond>
+              </p:nextCondLst>
+            </p:seq>
+          </p:childTnLst>
+        </p:cTn>
+      </p:par>
+    </p:tnLst>
+    <p:bldLst>
+      <p:bldP spid="4" grpId="0"/>
+      <p:bldP spid="2" grpId="0" animBg="1"/>
+    </p:bldLst>
+  </p:timing>
+</p:sld>
+</file>
+
+<file path=ppt/slides/slide8.xml><?xml version="1.0" encoding="utf-8"?>
+<p:sld xmlns:a="http://schemas.openxmlformats.org/drawingml/2006/main" xmlns:r="http://schemas.openxmlformats.org/officeDocument/2006/relationships" xmlns:p="http://schemas.openxmlformats.org/presentationml/2006/main">
+  <p:cSld>
+    <p:spTree>
+      <p:nvGrpSpPr>
+        <p:cNvPr id="1" name=""/>
+        <p:cNvGrpSpPr/>
+        <p:nvPr/>
+      </p:nvGrpSpPr>
+      <p:grpSpPr/>
+      <p:sp>
+        <p:nvSpPr>
+          <p:cNvPr id="5" name="文本框 4"/>
+          <p:cNvSpPr txBox="1"/>
+          <p:nvPr/>
+        </p:nvSpPr>
+        <p:spPr>
+          <a:xfrm>
+            <a:off x="7712075" y="957580"/>
+            <a:ext cx="3377565" cy="1014730"/>
+          </a:xfrm>
+          <a:prstGeom prst="rect">
+            <a:avLst/>
+          </a:prstGeom>
+          <a:noFill/>
+        </p:spPr>
+        <p:txBody>
+          <a:bodyPr wrap="square" rtlCol="0">
+            <a:spAutoFit/>
+          </a:bodyPr>
+          <a:p>
+            <a:r>
+              <a:rPr lang="zh-CN" altLang="en-US" sz="6000" b="1">
+                <a:latin typeface="思源黑体" panose="020B0500000000000000" charset="-122"/>
+                <a:ea typeface="思源黑体" panose="020B0500000000000000" charset="-122"/>
+              </a:rPr>
+              <a:t>代码实现</a:t>
+            </a:r>
+            <a:endParaRPr lang="zh-CN" altLang="en-US" sz="6000" b="1">
+              <a:latin typeface="思源黑体" panose="020B0500000000000000" charset="-122"/>
+              <a:ea typeface="思源黑体" panose="020B0500000000000000" charset="-122"/>
+            </a:endParaRPr>
+          </a:p>
+        </p:txBody>
+      </p:sp>
+      <p:sp>
+        <p:nvSpPr>
+          <p:cNvPr id="8" name="任意多边形 7"/>
+          <p:cNvSpPr/>
+          <p:nvPr/>
+        </p:nvSpPr>
+        <p:spPr>
+          <a:xfrm>
+            <a:off x="7414895" y="2233930"/>
+            <a:ext cx="3883025" cy="62230"/>
+          </a:xfrm>
+          <a:custGeom>
+            <a:avLst/>
+            <a:gdLst>
+              <a:gd name="connisteX0" fmla="*/ 0 w 3883025"/>
+              <a:gd name="connsiteY0" fmla="*/ 36830 h 62197"/>
+              <a:gd name="connisteX1" fmla="*/ 535940 w 3883025"/>
+              <a:gd name="connsiteY1" fmla="*/ 42545 h 62197"/>
+              <a:gd name="connisteX2" fmla="*/ 926465 w 3883025"/>
+              <a:gd name="connsiteY2" fmla="*/ 0 h 62197"/>
+              <a:gd name="connisteX3" fmla="*/ 1536065 w 3883025"/>
+              <a:gd name="connsiteY3" fmla="*/ 42545 h 62197"/>
+              <a:gd name="connisteX4" fmla="*/ 2078355 w 3883025"/>
+              <a:gd name="connsiteY4" fmla="*/ 60960 h 62197"/>
+              <a:gd name="connisteX5" fmla="*/ 2785745 w 3883025"/>
+              <a:gd name="connsiteY5" fmla="*/ 18415 h 62197"/>
+              <a:gd name="connisteX6" fmla="*/ 3371215 w 3883025"/>
+              <a:gd name="connsiteY6" fmla="*/ 24765 h 62197"/>
+              <a:gd name="connisteX7" fmla="*/ 3632835 w 3883025"/>
+              <a:gd name="connsiteY7" fmla="*/ 55245 h 62197"/>
+              <a:gd name="connisteX8" fmla="*/ 3883025 w 3883025"/>
+              <a:gd name="connsiteY8" fmla="*/ 36830 h 62197"/>
+            </a:gdLst>
+            <a:ahLst/>
+            <a:cxnLst>
+              <a:cxn ang="0">
+                <a:pos x="connisteX0" y="connsiteY0"/>
+              </a:cxn>
+              <a:cxn ang="0">
+                <a:pos x="connisteX1" y="connsiteY1"/>
+              </a:cxn>
+              <a:cxn ang="0">
+                <a:pos x="connisteX2" y="connsiteY2"/>
+              </a:cxn>
+              <a:cxn ang="0">
+                <a:pos x="connisteX3" y="connsiteY3"/>
+              </a:cxn>
+              <a:cxn ang="0">
+                <a:pos x="connisteX4" y="connsiteY4"/>
+              </a:cxn>
+              <a:cxn ang="0">
+                <a:pos x="connisteX5" y="connsiteY5"/>
+              </a:cxn>
+              <a:cxn ang="0">
+                <a:pos x="connisteX6" y="connsiteY6"/>
+              </a:cxn>
+              <a:cxn ang="0">
+                <a:pos x="connisteX7" y="connsiteY7"/>
+              </a:cxn>
+              <a:cxn ang="0">
+                <a:pos x="connisteX8" y="connsiteY8"/>
+              </a:cxn>
+            </a:cxnLst>
+            <a:rect l="l" t="t" r="r" b="b"/>
+            <a:pathLst>
+              <a:path w="3883025" h="62198">
+                <a:moveTo>
+                  <a:pt x="0" y="36830"/>
+                </a:moveTo>
+                <a:cubicBezTo>
+                  <a:pt x="99060" y="38735"/>
+                  <a:pt x="350520" y="50165"/>
+                  <a:pt x="535940" y="42545"/>
+                </a:cubicBezTo>
+                <a:cubicBezTo>
+                  <a:pt x="721360" y="34925"/>
+                  <a:pt x="726440" y="0"/>
+                  <a:pt x="926465" y="0"/>
+                </a:cubicBezTo>
+                <a:cubicBezTo>
+                  <a:pt x="1126490" y="0"/>
+                  <a:pt x="1305560" y="30480"/>
+                  <a:pt x="1536065" y="42545"/>
+                </a:cubicBezTo>
+                <a:cubicBezTo>
+                  <a:pt x="1766570" y="54610"/>
+                  <a:pt x="1828165" y="66040"/>
+                  <a:pt x="2078355" y="60960"/>
+                </a:cubicBezTo>
+                <a:cubicBezTo>
+                  <a:pt x="2328545" y="55880"/>
+                  <a:pt x="2527300" y="25400"/>
+                  <a:pt x="2785745" y="18415"/>
+                </a:cubicBezTo>
+                <a:cubicBezTo>
+                  <a:pt x="3044190" y="11430"/>
+                  <a:pt x="3201670" y="17145"/>
+                  <a:pt x="3371215" y="24765"/>
+                </a:cubicBezTo>
+                <a:cubicBezTo>
+                  <a:pt x="3540760" y="32385"/>
+                  <a:pt x="3530600" y="52705"/>
+                  <a:pt x="3632835" y="55245"/>
+                </a:cubicBezTo>
+                <a:cubicBezTo>
+                  <a:pt x="3735070" y="57785"/>
+                  <a:pt x="3837940" y="41275"/>
+                  <a:pt x="3883025" y="36830"/>
+                </a:cubicBezTo>
+              </a:path>
+            </a:pathLst>
+          </a:custGeom>
+          <a:solidFill>
+            <a:schemeClr val="accent6"/>
+          </a:solidFill>
+          <a:ln w="44450" cap="rnd">
+            <a:solidFill>
+              <a:schemeClr val="accent6"/>
+            </a:solidFill>
+          </a:ln>
+        </p:spPr>
+        <p:style>
+          <a:lnRef idx="2">
+            <a:schemeClr val="accent1">
+              <a:lumMod val="75000"/>
+            </a:schemeClr>
+          </a:lnRef>
+          <a:fillRef idx="1">
+            <a:schemeClr val="accent1"/>
+          </a:fillRef>
+          <a:effectRef idx="0">
+            <a:srgbClr val="FFFFFF"/>
+          </a:effectRef>
+          <a:fontRef idx="minor">
+            <a:schemeClr val="lt1"/>
+          </a:fontRef>
+        </p:style>
+        <p:txBody>
+          <a:bodyPr rtlCol="0" anchor="ctr"/>
+          <a:p>
+            <a:pPr algn="ctr"/>
+            <a:endParaRPr lang="zh-CN" altLang="en-US"/>
+          </a:p>
+        </p:txBody>
+      </p:sp>
+      <p:sp>
+        <p:nvSpPr>
+          <p:cNvPr id="11" name="文本框 10"/>
+          <p:cNvSpPr txBox="1"/>
+          <p:nvPr/>
+        </p:nvSpPr>
+        <p:spPr>
+          <a:xfrm>
+            <a:off x="7649845" y="2693035"/>
+            <a:ext cx="3749040" cy="866140"/>
+          </a:xfrm>
+          <a:prstGeom prst="rect">
+            <a:avLst/>
+          </a:prstGeom>
+          <a:noFill/>
+        </p:spPr>
+        <p:txBody>
+          <a:bodyPr wrap="square" rtlCol="0">
+            <a:spAutoFit/>
+          </a:bodyPr>
+          <a:p>
+            <a:pPr marL="285750" indent="-285750">
+              <a:lnSpc>
+                <a:spcPct val="180000"/>
+              </a:lnSpc>
+              <a:buFont typeface="Arial" panose="020B0604020202020204" pitchFamily="34" charset="0"/>
+              <a:buChar char="•"/>
+            </a:pPr>
+            <a:r>
+              <a:rPr lang="en-US" altLang="zh-CN" sz="2800">
+                <a:latin typeface="楷体" panose="02010609060101010101" charset="-122"/>
+                <a:ea typeface="楷体" panose="02010609060101010101" charset="-122"/>
+                <a:cs typeface="楷体" panose="02010609060101010101" charset="-122"/>
+              </a:rPr>
+              <a:t>C</a:t>
+            </a:r>
+            <a:r>
+              <a:rPr lang="zh-CN" altLang="en-US" sz="2800">
+                <a:latin typeface="楷体" panose="02010609060101010101" charset="-122"/>
+                <a:ea typeface="楷体" panose="02010609060101010101" charset="-122"/>
+                <a:cs typeface="楷体" panose="02010609060101010101" charset="-122"/>
+              </a:rPr>
+              <a:t>语言数组模拟</a:t>
+            </a:r>
+            <a:endParaRPr lang="zh-CN" altLang="en-US" sz="2800">
+              <a:latin typeface="楷体" panose="02010609060101010101" charset="-122"/>
+              <a:ea typeface="楷体" panose="02010609060101010101" charset="-122"/>
+              <a:cs typeface="楷体" panose="02010609060101010101" charset="-122"/>
+            </a:endParaRPr>
+          </a:p>
+        </p:txBody>
+      </p:sp>
+      <p:sp>
+        <p:nvSpPr>
+          <p:cNvPr id="2" name="文本框 1"/>
+          <p:cNvSpPr txBox="1"/>
+          <p:nvPr/>
+        </p:nvSpPr>
+        <p:spPr>
+          <a:xfrm>
+            <a:off x="7649845" y="3622040"/>
+            <a:ext cx="3830955" cy="866140"/>
+          </a:xfrm>
+          <a:prstGeom prst="rect">
+            <a:avLst/>
+          </a:prstGeom>
+          <a:noFill/>
+        </p:spPr>
+        <p:txBody>
+          <a:bodyPr wrap="square" rtlCol="0">
+            <a:spAutoFit/>
+          </a:bodyPr>
+          <a:p>
+            <a:pPr marL="285750" lvl="0" indent="-285750" algn="l">
+              <a:lnSpc>
+                <a:spcPct val="180000"/>
+              </a:lnSpc>
+              <a:buClrTx/>
+              <a:buSzTx/>
+              <a:buFont typeface="Arial" panose="020B0604020202020204" pitchFamily="34" charset="0"/>
+              <a:buChar char="•"/>
+            </a:pPr>
+            <a:r>
+              <a:rPr lang="en-US" altLang="zh-CN" sz="2800">
+                <a:latin typeface="楷体" panose="02010609060101010101" charset="-122"/>
+                <a:ea typeface="楷体" panose="02010609060101010101" charset="-122"/>
+                <a:cs typeface="楷体" panose="02010609060101010101" charset="-122"/>
+                <a:sym typeface="+mn-ea"/>
+              </a:rPr>
+              <a:t>C</a:t>
+            </a:r>
+            <a:r>
+              <a:rPr lang="zh-CN" altLang="en-US" sz="2800">
+                <a:latin typeface="楷体" panose="02010609060101010101" charset="-122"/>
+                <a:ea typeface="楷体" panose="02010609060101010101" charset="-122"/>
+                <a:cs typeface="楷体" panose="02010609060101010101" charset="-122"/>
+                <a:sym typeface="+mn-ea"/>
+              </a:rPr>
+              <a:t>语言结构体</a:t>
+            </a:r>
+            <a:endParaRPr lang="en-US" altLang="zh-CN" sz="2800">
+              <a:latin typeface="楷体" panose="02010609060101010101" charset="-122"/>
+              <a:ea typeface="楷体" panose="02010609060101010101" charset="-122"/>
+              <a:cs typeface="楷体" panose="02010609060101010101" charset="-122"/>
+              <a:sym typeface="+mn-ea"/>
+            </a:endParaRPr>
+          </a:p>
+        </p:txBody>
+      </p:sp>
+      <p:sp>
+        <p:nvSpPr>
+          <p:cNvPr id="3" name="文本框 2"/>
+          <p:cNvSpPr txBox="1"/>
+          <p:nvPr/>
+        </p:nvSpPr>
+        <p:spPr>
+          <a:xfrm>
+            <a:off x="7649845" y="4551045"/>
+            <a:ext cx="3337560" cy="866140"/>
+          </a:xfrm>
+          <a:prstGeom prst="rect">
+            <a:avLst/>
+          </a:prstGeom>
+          <a:noFill/>
+        </p:spPr>
+        <p:txBody>
+          <a:bodyPr wrap="square" rtlCol="0">
+            <a:spAutoFit/>
+          </a:bodyPr>
+          <a:p>
+            <a:pPr marL="285750" indent="-285750" algn="l">
+              <a:lnSpc>
+                <a:spcPct val="180000"/>
+              </a:lnSpc>
+              <a:buClrTx/>
+              <a:buSzTx/>
+              <a:buFont typeface="Arial" panose="020B0604020202020204" pitchFamily="34" charset="0"/>
+              <a:buChar char="•"/>
+            </a:pPr>
+            <a:r>
+              <a:rPr lang="en-US" altLang="zh-CN" sz="2800">
+                <a:latin typeface="楷体" panose="02010609060101010101" charset="-122"/>
+                <a:ea typeface="楷体" panose="02010609060101010101" charset="-122"/>
+                <a:cs typeface="楷体" panose="02010609060101010101" charset="-122"/>
+              </a:rPr>
+              <a:t>C++</a:t>
+            </a:r>
+            <a:r>
+              <a:rPr lang="zh-CN" altLang="en-US" sz="2800">
+                <a:latin typeface="楷体" panose="02010609060101010101" charset="-122"/>
+                <a:ea typeface="楷体" panose="02010609060101010101" charset="-122"/>
+                <a:cs typeface="楷体" panose="02010609060101010101" charset="-122"/>
+              </a:rPr>
+              <a:t>模板类实现</a:t>
+            </a:r>
+            <a:endParaRPr lang="zh-CN" altLang="en-US" sz="2800">
+              <a:latin typeface="楷体" panose="02010609060101010101" charset="-122"/>
+              <a:ea typeface="楷体" panose="02010609060101010101" charset="-122"/>
+              <a:cs typeface="楷体" panose="02010609060101010101" charset="-122"/>
+            </a:endParaRPr>
+          </a:p>
+        </p:txBody>
+      </p:sp>
+      <p:sp>
+        <p:nvSpPr>
+          <p:cNvPr id="10" name="任意多边形 9"/>
+          <p:cNvSpPr/>
+          <p:nvPr/>
+        </p:nvSpPr>
+        <p:spPr>
+          <a:xfrm>
+            <a:off x="-882015" y="-66675"/>
+            <a:ext cx="8296910" cy="7776210"/>
+          </a:xfrm>
+          <a:custGeom>
+            <a:avLst/>
+            <a:gdLst>
+              <a:gd name="connsiteX0" fmla="*/ 0 w 13066"/>
+              <a:gd name="connsiteY0" fmla="*/ 0 h 12246"/>
+              <a:gd name="connsiteX1" fmla="*/ 13066 w 13066"/>
+              <a:gd name="connsiteY1" fmla="*/ 92 h 12246"/>
+              <a:gd name="connsiteX2" fmla="*/ 9314 w 13066"/>
+              <a:gd name="connsiteY2" fmla="*/ 11195 h 12246"/>
+              <a:gd name="connsiteX3" fmla="*/ 0 w 13066"/>
+              <a:gd name="connsiteY3" fmla="*/ 12246 h 12246"/>
+              <a:gd name="connsiteX4" fmla="*/ 0 w 13066"/>
+              <a:gd name="connsiteY4" fmla="*/ 0 h 12246"/>
+            </a:gdLst>
+            <a:ahLst/>
+            <a:cxnLst>
+              <a:cxn ang="0">
+                <a:pos x="connsiteX0" y="connsiteY0"/>
+              </a:cxn>
+              <a:cxn ang="0">
+                <a:pos x="connsiteX1" y="connsiteY1"/>
+              </a:cxn>
+              <a:cxn ang="0">
+                <a:pos x="connsiteX2" y="connsiteY2"/>
+              </a:cxn>
+              <a:cxn ang="0">
+                <a:pos x="connsiteX3" y="connsiteY3"/>
+              </a:cxn>
+              <a:cxn ang="0">
+                <a:pos x="connsiteX4" y="connsiteY4"/>
+              </a:cxn>
+            </a:cxnLst>
+            <a:rect l="l" t="t" r="r" b="b"/>
+            <a:pathLst>
+              <a:path w="13066" h="12246">
+                <a:moveTo>
+                  <a:pt x="0" y="0"/>
+                </a:moveTo>
+                <a:lnTo>
+                  <a:pt x="13066" y="92"/>
+                </a:lnTo>
+                <a:cubicBezTo>
+                  <a:pt x="12540" y="8055"/>
+                  <a:pt x="11481" y="7174"/>
+                  <a:pt x="9314" y="11195"/>
+                </a:cubicBezTo>
+                <a:lnTo>
+                  <a:pt x="0" y="12246"/>
+                </a:lnTo>
+                <a:lnTo>
+                  <a:pt x="0" y="0"/>
+                </a:lnTo>
+                <a:close/>
+              </a:path>
+            </a:pathLst>
+          </a:custGeom>
+          <a:blipFill rotWithShape="1">
+            <a:blip r:embed="rId1"/>
+            <a:stretch>
+              <a:fillRect/>
+            </a:stretch>
+          </a:blipFill>
+          <a:ln>
+            <a:noFill/>
+          </a:ln>
+        </p:spPr>
+        <p:style>
+          <a:lnRef idx="2">
+            <a:schemeClr val="accent1">
+              <a:lumMod val="75000"/>
+            </a:schemeClr>
+          </a:lnRef>
+          <a:fillRef idx="1">
+            <a:schemeClr val="accent1"/>
+          </a:fillRef>
+          <a:effectRef idx="0">
+            <a:srgbClr val="FFFFFF"/>
+          </a:effectRef>
+          <a:fontRef idx="minor">
+            <a:schemeClr val="lt1"/>
+          </a:fontRef>
+        </p:style>
+        <p:txBody>
+          <a:bodyPr rtlCol="0" anchor="ctr"/>
+          <a:p>
+            <a:pPr algn="ctr"/>
+            <a:endParaRPr lang="zh-CN" altLang="en-US"/>
+          </a:p>
+        </p:txBody>
+      </p:sp>
+    </p:spTree>
+  </p:cSld>
+  <p:clrMapOvr>
+    <a:masterClrMapping/>
+  </p:clrMapOvr>
+  <mc:AlternateContent xmlns:mc="http://schemas.openxmlformats.org/markup-compatibility/2006" xmlns:p159="http://schemas.microsoft.com/office/powerpoint/2015/09/main">
+    <mc:Choice Requires="p159">
+      <p:transition xmlns:p14="http://schemas.microsoft.com/office/powerpoint/2010/main" spd="slow" p14:dur="2000">
+        <p159:morph option="byObject"/>
+      </p:transition>
+    </mc:Choice>
+    <mc:Fallback>
+      <p:transition spd="slow">
+        <p:fade/>
+      </p:transition>
+    </mc:Fallback>
+  </mc:AlternateContent>
+  <p:timing>
+    <p:tnLst>
+      <p:par>
+        <p:cTn id="1" dur="indefinite" restart="never" nodeType="tmRoot">
+          <p:childTnLst>
+            <p:seq concurrent="1" nextAc="seek">
+              <p:cTn id="2" dur="indefinite" nodeType="mainSeq">
+                <p:childTnLst>
+                  <p:par>
+                    <p:cTn id="3" fill="hold">
+                      <p:stCondLst>
+                        <p:cond delay="indefinite"/>
+                      </p:stCondLst>
+                      <p:childTnLst>
+                        <p:par>
+                          <p:cTn id="4" fill="hold">
+                            <p:stCondLst>
+                              <p:cond delay="0"/>
+                            </p:stCondLst>
+                            <p:childTnLst>
+                              <p:par>
+                                <p:cTn id="5" presetID="22" presetClass="entr" presetSubtype="4" fill="hold" grpId="0" nodeType="clickEffect">
+                                  <p:stCondLst>
+                                    <p:cond delay="0"/>
+                                  </p:stCondLst>
+                                  <p:childTnLst>
+                                    <p:set>
+                                      <p:cBhvr>
+                                        <p:cTn id="6" dur="1" fill="hold">
+                                          <p:stCondLst>
+                                            <p:cond delay="0"/>
+                                          </p:stCondLst>
+                                        </p:cTn>
+                                        <p:tgtEl>
+                                          <p:spTgt spid="11"/>
+                                        </p:tgtEl>
+                                        <p:attrNameLst>
+                                          <p:attrName>style.visibility</p:attrName>
+                                        </p:attrNameLst>
+                                      </p:cBhvr>
+                                      <p:to>
+                                        <p:strVal val="visible"/>
+                                      </p:to>
+                                    </p:set>
+                                    <p:animEffect transition="in" filter="wipe(down)">
+                                      <p:cBhvr>
+                                        <p:cTn id="7" dur="500"/>
+                                        <p:tgtEl>
+                                          <p:spTgt spid="11"/>
+                                        </p:tgtEl>
+                                      </p:cBhvr>
+                                    </p:animEffect>
+                                  </p:childTnLst>
+                                </p:cTn>
+                              </p:par>
+                            </p:childTnLst>
+                          </p:cTn>
+                        </p:par>
+                      </p:childTnLst>
+                    </p:cTn>
+                  </p:par>
+                  <p:par>
+                    <p:cTn id="8" fill="hold">
+                      <p:stCondLst>
+                        <p:cond delay="indefinite"/>
+                      </p:stCondLst>
+                      <p:childTnLst>
+                        <p:par>
+                          <p:cTn id="9" fill="hold">
+                            <p:stCondLst>
+                              <p:cond delay="0"/>
+                            </p:stCondLst>
+                            <p:childTnLst>
+                              <p:par>
+                                <p:cTn id="10" presetID="22" presetClass="entr" presetSubtype="4" fill="hold" grpId="0" nodeType="clickEffect">
+                                  <p:stCondLst>
+                                    <p:cond delay="0"/>
+                                  </p:stCondLst>
+                                  <p:childTnLst>
+                                    <p:set>
+                                      <p:cBhvr>
+                                        <p:cTn id="11" dur="1" fill="hold">
+                                          <p:stCondLst>
+                                            <p:cond delay="0"/>
+                                          </p:stCondLst>
+                                        </p:cTn>
+                                        <p:tgtEl>
+                                          <p:spTgt spid="2"/>
+                                        </p:tgtEl>
+                                        <p:attrNameLst>
+                                          <p:attrName>style.visibility</p:attrName>
+                                        </p:attrNameLst>
+                                      </p:cBhvr>
+                                      <p:to>
+                                        <p:strVal val="visible"/>
+                                      </p:to>
+                                    </p:set>
+                                    <p:animEffect transition="in" filter="wipe(down)">
+                                      <p:cBhvr>
+                                        <p:cTn id="12" dur="500"/>
+                                        <p:tgtEl>
+                                          <p:spTgt spid="2"/>
+                                        </p:tgtEl>
+                                      </p:cBhvr>
+                                    </p:animEffect>
+                                  </p:childTnLst>
+                                </p:cTn>
+                              </p:par>
+                            </p:childTnLst>
+                          </p:cTn>
+                        </p:par>
+                      </p:childTnLst>
+                    </p:cTn>
+                  </p:par>
+                  <p:par>
+                    <p:cTn id="13" fill="hold">
+                      <p:stCondLst>
+                        <p:cond delay="indefinite"/>
+                      </p:stCondLst>
+                      <p:childTnLst>
+                        <p:par>
+                          <p:cTn id="14" fill="hold">
+                            <p:stCondLst>
+                              <p:cond delay="0"/>
+                            </p:stCondLst>
+                            <p:childTnLst>
+                              <p:par>
+                                <p:cTn id="15" presetID="22" presetClass="entr" presetSubtype="4" fill="hold" grpId="0" nodeType="clickEffect">
+                                  <p:stCondLst>
+                                    <p:cond delay="0"/>
+                                  </p:stCondLst>
+                                  <p:childTnLst>
+                                    <p:set>
+                                      <p:cBhvr>
+                                        <p:cTn id="16" dur="1" fill="hold">
+                                          <p:stCondLst>
+                                            <p:cond delay="0"/>
+                                          </p:stCondLst>
+                                        </p:cTn>
+                                        <p:tgtEl>
+                                          <p:spTgt spid="3"/>
+                                        </p:tgtEl>
+                                        <p:attrNameLst>
+                                          <p:attrName>style.visibility</p:attrName>
+                                        </p:attrNameLst>
+                                      </p:cBhvr>
+                                      <p:to>
+                                        <p:strVal val="visible"/>
+                                      </p:to>
+                                    </p:set>
+                                    <p:animEffect transition="in" filter="wipe(down)">
+                                      <p:cBhvr>
+                                        <p:cTn id="17" dur="500"/>
+                                        <p:tgtEl>
+                                          <p:spTgt spid="3"/>
+                                        </p:tgtEl>
+                                      </p:cBhvr>
+                                    </p:animEffect>
+                                  </p:childTnLst>
+                                </p:cTn>
+                              </p:par>
+                            </p:childTnLst>
+                          </p:cTn>
+                        </p:par>
+                      </p:childTnLst>
+                    </p:cTn>
+                  </p:par>
+                </p:childTnLst>
+              </p:cTn>
+              <p:prevCondLst>
+                <p:cond evt="onPrev" delay="0">
+                  <p:tgtEl>
+                    <p:sldTgt/>
+                  </p:tgtEl>
+                </p:cond>
+              </p:prevCondLst>
+              <p:nextCondLst>
+                <p:cond evt="onNext" delay="0">
+                  <p:tgtEl>
+                    <p:sldTgt/>
+                  </p:tgtEl>
+                </p:cond>
+              </p:nextCondLst>
+            </p:seq>
+          </p:childTnLst>
+        </p:cTn>
+      </p:par>
+    </p:tnLst>
+    <p:bldLst>
+      <p:bldP spid="11" grpId="0"/>
+      <p:bldP spid="2" grpId="0"/>
+      <p:bldP spid="3" grpId="0"/>
+    </p:bldLst>
+  </p:timing>
+</p:sld>
+</file>
+
+<file path=ppt/slides/slide9.xml><?xml version="1.0" encoding="utf-8"?>
+<p:sld xmlns:a="http://schemas.openxmlformats.org/drawingml/2006/main" xmlns:r="http://schemas.openxmlformats.org/officeDocument/2006/relationships" xmlns:p="http://schemas.openxmlformats.org/presentationml/2006/main">
+  <p:cSld>
+    <p:spTree>
+      <p:nvGrpSpPr>
+        <p:cNvPr id="1" name=""/>
+        <p:cNvGrpSpPr/>
+        <p:nvPr/>
+      </p:nvGrpSpPr>
+      <p:grpSpPr/>
+      <p:sp>
+        <p:nvSpPr>
+          <p:cNvPr id="11" name="文本框 10"/>
+          <p:cNvSpPr txBox="1"/>
+          <p:nvPr/>
+        </p:nvSpPr>
+        <p:spPr>
+          <a:xfrm>
+            <a:off x="285115" y="0"/>
+            <a:ext cx="3749040" cy="866140"/>
+          </a:xfrm>
+          <a:prstGeom prst="rect">
+            <a:avLst/>
+          </a:prstGeom>
+          <a:noFill/>
+        </p:spPr>
+        <p:txBody>
+          <a:bodyPr wrap="square" rtlCol="0">
+            <a:spAutoFit/>
+          </a:bodyPr>
+          <a:p>
+            <a:pPr indent="0">
+              <a:lnSpc>
+                <a:spcPct val="180000"/>
+              </a:lnSpc>
+              <a:buFont typeface="Arial" panose="020B0604020202020204" pitchFamily="34" charset="0"/>
+              <a:buNone/>
+            </a:pPr>
+            <a:r>
+              <a:rPr lang="en-US" altLang="zh-CN" sz="2800">
+                <a:latin typeface="楷体" panose="02010609060101010101" charset="-122"/>
+                <a:ea typeface="楷体" panose="02010609060101010101" charset="-122"/>
+                <a:cs typeface="楷体" panose="02010609060101010101" charset="-122"/>
+              </a:rPr>
+              <a:t>C</a:t>
+            </a:r>
+            <a:r>
+              <a:rPr lang="zh-CN" altLang="en-US" sz="2800">
+                <a:latin typeface="楷体" panose="02010609060101010101" charset="-122"/>
+                <a:ea typeface="楷体" panose="02010609060101010101" charset="-122"/>
+                <a:cs typeface="楷体" panose="02010609060101010101" charset="-122"/>
+              </a:rPr>
+              <a:t>语言数组模拟</a:t>
+            </a:r>
+            <a:endParaRPr lang="zh-CN" altLang="en-US" sz="2800">
+              <a:latin typeface="楷体" panose="02010609060101010101" charset="-122"/>
+              <a:ea typeface="楷体" panose="02010609060101010101" charset="-122"/>
+              <a:cs typeface="楷体" panose="02010609060101010101" charset="-122"/>
+            </a:endParaRPr>
+          </a:p>
+        </p:txBody>
+      </p:sp>
+      <p:sp>
+        <p:nvSpPr>
+          <p:cNvPr id="6" name="圆角矩形 5"/>
+          <p:cNvSpPr/>
+          <p:nvPr/>
+        </p:nvSpPr>
+        <p:spPr>
+          <a:xfrm>
+            <a:off x="3265170" y="2924175"/>
+            <a:ext cx="1418590" cy="1009650"/>
+          </a:xfrm>
+          <a:prstGeom prst="roundRect">
+            <a:avLst/>
+          </a:prstGeom>
+          <a:solidFill>
+            <a:srgbClr val="FFFF00"/>
+          </a:solidFill>
+          <a:ln w="73025">
+            <a:solidFill>
+              <a:srgbClr val="FFFF00"/>
+            </a:solidFill>
+          </a:ln>
+        </p:spPr>
+        <p:style>
+          <a:lnRef idx="2">
+            <a:schemeClr val="accent1">
+              <a:lumMod val="75000"/>
+            </a:schemeClr>
+          </a:lnRef>
+          <a:fillRef idx="1">
+            <a:schemeClr val="accent1"/>
+          </a:fillRef>
+          <a:effectRef idx="0">
+            <a:srgbClr val="FFFFFF"/>
+          </a:effectRef>
+          <a:fontRef idx="minor">
+            <a:schemeClr val="lt1"/>
+          </a:fontRef>
+        </p:style>
+        <p:txBody>
+          <a:bodyPr rtlCol="0" anchor="ctr"/>
+          <a:p>
+            <a:pPr algn="ctr"/>
+            <a:r>
+              <a:rPr lang="en-US" altLang="zh-CN" sz="2400" b="1">
+                <a:solidFill>
+                  <a:schemeClr val="tx1"/>
+                </a:solidFill>
+                <a:latin typeface="Franklin Gothic Medium" panose="020B0603020102020204" charset="0"/>
+                <a:cs typeface="Franklin Gothic Medium" panose="020B0603020102020204" charset="0"/>
+              </a:rPr>
+              <a:t>Head</a:t>
+            </a:r>
+            <a:endParaRPr lang="en-US" altLang="zh-CN" sz="2400" b="1">
+              <a:solidFill>
+                <a:schemeClr val="tx1"/>
+              </a:solidFill>
+              <a:latin typeface="Franklin Gothic Medium" panose="020B0603020102020204" charset="0"/>
+              <a:cs typeface="Franklin Gothic Medium" panose="020B0603020102020204" charset="0"/>
+            </a:endParaRPr>
+          </a:p>
+        </p:txBody>
+      </p:sp>
+      <p:sp>
+        <p:nvSpPr>
+          <p:cNvPr id="7" name="圆角矩形 6"/>
+          <p:cNvSpPr/>
+          <p:nvPr/>
+        </p:nvSpPr>
+        <p:spPr>
+          <a:xfrm>
+            <a:off x="4683760" y="2924175"/>
+            <a:ext cx="1418590" cy="1009650"/>
+          </a:xfrm>
+          <a:prstGeom prst="roundRect">
+            <a:avLst/>
+          </a:prstGeom>
+          <a:solidFill>
+            <a:schemeClr val="bg1"/>
+          </a:solidFill>
+          <a:ln w="73025">
+            <a:solidFill>
+              <a:schemeClr val="accent6"/>
+            </a:solidFill>
+          </a:ln>
+        </p:spPr>
+        <p:style>
+          <a:lnRef idx="2">
+            <a:schemeClr val="accent1">
+              <a:lumMod val="75000"/>
+            </a:schemeClr>
+          </a:lnRef>
+          <a:fillRef idx="1">
+            <a:schemeClr val="accent1"/>
+          </a:fillRef>
+          <a:effectRef idx="0">
+            <a:srgbClr val="FFFFFF"/>
+          </a:effectRef>
+          <a:fontRef idx="minor">
+            <a:schemeClr val="lt1"/>
+          </a:fontRef>
+        </p:style>
+        <p:txBody>
+          <a:bodyPr rtlCol="0" anchor="ctr"/>
+          <a:p>
+            <a:pPr algn="ctr"/>
+            <a:endParaRPr lang="zh-CN" altLang="en-US"/>
+          </a:p>
+        </p:txBody>
+      </p:sp>
+      <p:sp>
+        <p:nvSpPr>
+          <p:cNvPr id="8" name="圆角矩形 7"/>
+          <p:cNvSpPr/>
+          <p:nvPr/>
+        </p:nvSpPr>
+        <p:spPr>
+          <a:xfrm>
+            <a:off x="6102350" y="2924175"/>
+            <a:ext cx="1418590" cy="1009650"/>
+          </a:xfrm>
+          <a:prstGeom prst="roundRect">
+            <a:avLst/>
+          </a:prstGeom>
+          <a:solidFill>
+            <a:schemeClr val="bg1"/>
+          </a:solidFill>
+          <a:ln w="73025">
+            <a:solidFill>
+              <a:schemeClr val="accent6"/>
+            </a:solidFill>
+          </a:ln>
+        </p:spPr>
+        <p:style>
+          <a:lnRef idx="2">
+            <a:schemeClr val="accent1">
+              <a:lumMod val="75000"/>
+            </a:schemeClr>
+          </a:lnRef>
+          <a:fillRef idx="1">
+            <a:schemeClr val="accent1"/>
+          </a:fillRef>
+          <a:effectRef idx="0">
+            <a:srgbClr val="FFFFFF"/>
+          </a:effectRef>
+          <a:fontRef idx="minor">
+            <a:schemeClr val="lt1"/>
+          </a:fontRef>
+        </p:style>
+        <p:txBody>
+          <a:bodyPr rtlCol="0" anchor="ctr"/>
+          <a:p>
+            <a:pPr algn="ctr"/>
+            <a:endParaRPr lang="zh-CN" altLang="en-US"/>
+          </a:p>
+        </p:txBody>
+      </p:sp>
+      <p:sp>
+        <p:nvSpPr>
+          <p:cNvPr id="9" name="圆角矩形 8"/>
+          <p:cNvSpPr/>
+          <p:nvPr/>
+        </p:nvSpPr>
+        <p:spPr>
+          <a:xfrm>
+            <a:off x="7520940" y="2924175"/>
+            <a:ext cx="1418590" cy="1009650"/>
+          </a:xfrm>
+          <a:prstGeom prst="roundRect">
+            <a:avLst/>
+          </a:prstGeom>
+          <a:solidFill>
+            <a:schemeClr val="bg1"/>
+          </a:solidFill>
+          <a:ln w="73025">
+            <a:solidFill>
+              <a:schemeClr val="accent6"/>
+            </a:solidFill>
+          </a:ln>
+        </p:spPr>
+        <p:style>
+          <a:lnRef idx="2">
+            <a:schemeClr val="accent1">
+              <a:lumMod val="75000"/>
+            </a:schemeClr>
+          </a:lnRef>
+          <a:fillRef idx="1">
+            <a:schemeClr val="accent1"/>
+          </a:fillRef>
+          <a:effectRef idx="0">
+            <a:srgbClr val="FFFFFF"/>
+          </a:effectRef>
+          <a:fontRef idx="minor">
+            <a:schemeClr val="lt1"/>
+          </a:fontRef>
+        </p:style>
+        <p:txBody>
+          <a:bodyPr rtlCol="0" anchor="ctr"/>
+          <a:p>
+            <a:pPr algn="ctr"/>
+            <a:endParaRPr lang="zh-CN" altLang="en-US"/>
+          </a:p>
+        </p:txBody>
+      </p:sp>
+      <p:grpSp>
+        <p:nvGrpSpPr>
+          <p:cNvPr id="17" name="组合 16"/>
+          <p:cNvGrpSpPr/>
+          <p:nvPr/>
+        </p:nvGrpSpPr>
+        <p:grpSpPr>
+          <a:xfrm>
+            <a:off x="3615055" y="4214495"/>
+            <a:ext cx="765810" cy="1095375"/>
+            <a:chOff x="2141" y="6637"/>
+            <a:chExt cx="1206" cy="1725"/>
+          </a:xfrm>
+        </p:grpSpPr>
+        <p:sp>
+          <p:nvSpPr>
+            <p:cNvPr id="15" name="上箭头 14"/>
+            <p:cNvSpPr/>
+            <p:nvPr/>
+          </p:nvSpPr>
+          <p:spPr>
+            <a:xfrm>
+              <a:off x="2553" y="6637"/>
+              <a:ext cx="307" cy="845"/>
+            </a:xfrm>
+            <a:prstGeom prst="upArrow">
+              <a:avLst/>
+            </a:prstGeom>
+            <a:solidFill>
+              <a:schemeClr val="accent6"/>
+            </a:solidFill>
+            <a:ln>
+              <a:solidFill>
+                <a:schemeClr val="accent6"/>
+              </a:solidFill>
+            </a:ln>
+          </p:spPr>
+          <p:style>
+            <a:lnRef idx="2">
+              <a:schemeClr val="accent1">
+                <a:lumMod val="75000"/>
+              </a:schemeClr>
+            </a:lnRef>
+            <a:fillRef idx="1">
+              <a:schemeClr val="accent1"/>
+            </a:fillRef>
+            <a:effectRef idx="0">
+              <a:srgbClr val="FFFFFF"/>
+            </a:effectRef>
+            <a:fontRef idx="minor">
+              <a:schemeClr val="lt1"/>
+            </a:fontRef>
+          </p:style>
+          <p:txBody>
+            <a:bodyPr rtlCol="0" anchor="ctr"/>
+            <a:p>
+              <a:pPr algn="ctr"/>
+              <a:endParaRPr lang="zh-CN" altLang="en-US"/>
+            </a:p>
+          </p:txBody>
+        </p:sp>
+        <p:sp>
+          <p:nvSpPr>
+            <p:cNvPr id="16" name="文本框 15"/>
+            <p:cNvSpPr txBox="1"/>
+            <p:nvPr/>
+          </p:nvSpPr>
+          <p:spPr>
+            <a:xfrm>
+              <a:off x="2141" y="7540"/>
+              <a:ext cx="1206" cy="822"/>
+            </a:xfrm>
+            <a:prstGeom prst="rect">
+              <a:avLst/>
+            </a:prstGeom>
+            <a:noFill/>
+          </p:spPr>
+          <p:txBody>
+            <a:bodyPr wrap="square" rtlCol="0">
+              <a:spAutoFit/>
+            </a:bodyPr>
+            <a:p>
+              <a:r>
+                <a:rPr lang="en-US" altLang="zh-CN" sz="2800">
+                  <a:latin typeface="Comic Sans MS" panose="030F0702030302020204" charset="0"/>
+                  <a:cs typeface="Comic Sans MS" panose="030F0702030302020204" charset="0"/>
+                </a:rPr>
+                <a:t>idx</a:t>
+              </a:r>
+              <a:endParaRPr lang="en-US" altLang="zh-CN" sz="2800">
+                <a:latin typeface="Comic Sans MS" panose="030F0702030302020204" charset="0"/>
+                <a:cs typeface="Comic Sans MS" panose="030F0702030302020204" charset="0"/>
+              </a:endParaRPr>
+            </a:p>
+          </p:txBody>
+        </p:sp>
+      </p:grpSp>
+      <p:pic>
+        <p:nvPicPr>
+          <p:cNvPr id="21" name="图片 20"/>
+          <p:cNvPicPr>
+            <a:picLocks noChangeAspect="1"/>
+          </p:cNvPicPr>
+          <p:nvPr/>
+        </p:nvPicPr>
+        <p:blipFill>
+          <a:blip r:embed="rId1"/>
+          <a:stretch>
+            <a:fillRect/>
+          </a:stretch>
+        </p:blipFill>
+        <p:spPr>
+          <a:xfrm>
+            <a:off x="7399020" y="1815465"/>
+            <a:ext cx="4251960" cy="3227705"/>
+          </a:xfrm>
+          <a:prstGeom prst="rect">
+            <a:avLst/>
+          </a:prstGeom>
+        </p:spPr>
+      </p:pic>
+    </p:spTree>
+  </p:cSld>
+  <p:clrMapOvr>
+    <a:masterClrMapping/>
+  </p:clrMapOvr>
+  <mc:AlternateContent xmlns:mc="http://schemas.openxmlformats.org/markup-compatibility/2006" xmlns:p159="http://schemas.microsoft.com/office/powerpoint/2015/09/main">
+    <mc:Choice Requires="p159">
+      <p:transition xmlns:p14="http://schemas.microsoft.com/office/powerpoint/2010/main" spd="slow" p14:dur="2000">
+        <p159:morph option="byObject"/>
+      </p:transition>
+    </mc:Choice>
+    <mc:Fallback>
+      <p:transition spd="slow">
+        <p:fade/>
+      </p:transition>
+    </mc:Fallback>
+  </mc:AlternateContent>
+  <p:timing>
+    <p:tnLst>
+      <p:par>
+        <p:cTn id="1" dur="indefinite" restart="never" nodeType="tmRoot">
+          <p:childTnLst>
+            <p:seq concurrent="1" nextAc="seek">
+              <p:cTn id="2" dur="indefinite" nodeType="mainSeq">
+                <p:childTnLst>
+                  <p:par>
+                    <p:cTn id="3" fill="hold">
+                      <p:stCondLst>
+                        <p:cond delay="indefinite"/>
+                      </p:stCondLst>
+                      <p:childTnLst>
+                        <p:par>
+                          <p:cTn id="4" fill="hold">
+                            <p:stCondLst>
+                              <p:cond delay="0"/>
+                            </p:stCondLst>
+                            <p:childTnLst>
+                              <p:par>
+                                <p:cTn id="5" presetID="63" presetClass="path" presetSubtype="0" accel="50000" decel="50000" fill="hold" nodeType="clickEffect">
+                                  <p:stCondLst>
+                                    <p:cond delay="0"/>
+                                  </p:stCondLst>
+                                  <p:childTnLst>
+                                    <p:animMotion origin="layout" path="M -0.00192708 0 L 0.115521 0 " pathEditMode="relative" rAng="0" ptsTypes="">
+                                      <p:cBhvr>
+                                        <p:cTn id="6" dur="2000" fill="hold"/>
+                                        <p:tgtEl>
+                                          <p:spTgt spid="17"/>
+                                        </p:tgtEl>
+                                        <p:attrNameLst>
+                                          <p:attrName>ppt_x</p:attrName>
+                                          <p:attrName>ppt_y</p:attrName>
+                                        </p:attrNameLst>
+                                      </p:cBhvr>
+                                      <p:rCtr x="60" y="0"/>
+                                    </p:animMotion>
+                                  </p:childTnLst>
+                                </p:cTn>
+                              </p:par>
+                            </p:childTnLst>
+                          </p:cTn>
+                        </p:par>
+                        <p:par>
+                          <p:cTn id="7" fill="hold">
+                            <p:stCondLst>
+                              <p:cond delay="2000"/>
+                            </p:stCondLst>
+                            <p:childTnLst>
+                              <p:par>
+                                <p:cTn id="8" presetID="1" presetClass="emph" presetSubtype="2" fill="hold" nodeType="afterEffect">
+                                  <p:stCondLst>
+                                    <p:cond delay="0"/>
+                                  </p:stCondLst>
+                                  <p:childTnLst>
+                                    <p:animClr clrSpc="rgb" dir="cw">
+                                      <p:cBhvr>
+                                        <p:cTn id="9" dur="500" fill="hold"/>
+                                        <p:tgtEl>
+                                          <p:spTgt spid="7"/>
+                                        </p:tgtEl>
+                                        <p:attrNameLst>
+                                          <p:attrName>fillcolor</p:attrName>
+                                        </p:attrNameLst>
+                                      </p:cBhvr>
+                                      <p:to>
+                                        <a:srgbClr val="f5fd1f"/>
+                                      </p:to>
+                                    </p:animClr>
+                                    <p:set>
+                                      <p:cBhvr>
+                                        <p:cTn id="10" dur="500" fill="hold"/>
+                                        <p:tgtEl>
+                                          <p:spTgt spid="7"/>
+                                        </p:tgtEl>
+                                        <p:attrNameLst>
+                                          <p:attrName>fill.type</p:attrName>
+                                        </p:attrNameLst>
+                                      </p:cBhvr>
+                                      <p:to>
+                                        <p:strVal val="solid"/>
+                                      </p:to>
+                                    </p:set>
+                                    <p:set>
+                                      <p:cBhvr>
+                                        <p:cTn id="11" dur="500" fill="hold"/>
+                                        <p:tgtEl>
+                                          <p:spTgt spid="7"/>
+                                        </p:tgtEl>
+                                        <p:attrNameLst>
+                                          <p:attrName>fill.on</p:attrName>
+                                        </p:attrNameLst>
+                                      </p:cBhvr>
+                                      <p:to>
+                                        <p:strVal val="true"/>
+                                      </p:to>
+                                    </p:set>
+                                  </p:childTnLst>
+                                </p:cTn>
+                              </p:par>
+                            </p:childTnLst>
+                          </p:cTn>
+                        </p:par>
+                      </p:childTnLst>
+                    </p:cTn>
+                  </p:par>
+                  <p:par>
+                    <p:cTn id="12" fill="hold">
+                      <p:stCondLst>
+                        <p:cond delay="indefinite"/>
+                      </p:stCondLst>
+                      <p:childTnLst>
+                        <p:par>
+                          <p:cTn id="13" fill="hold">
+                            <p:stCondLst>
+                              <p:cond delay="0"/>
+                            </p:stCondLst>
+                            <p:childTnLst>
+                              <p:par>
+                                <p:cTn id="14" presetID="63" presetClass="path" presetSubtype="0" accel="50000" decel="50000" fill="hold" nodeType="clickEffect">
+                                  <p:stCondLst>
+                                    <p:cond delay="0"/>
+                                  </p:stCondLst>
+                                  <p:childTnLst>
+                                    <p:animMotion origin="layout" path="M 0.115781 0 L 0.231562 0 " pathEditMode="relative" rAng="0" ptsTypes="">
+                                      <p:cBhvr>
+                                        <p:cTn id="15" dur="2000" fill="hold"/>
+                                        <p:tgtEl>
+                                          <p:spTgt spid="17"/>
+                                        </p:tgtEl>
+                                        <p:attrNameLst>
+                                          <p:attrName>ppt_x</p:attrName>
+                                          <p:attrName>ppt_y</p:attrName>
+                                        </p:attrNameLst>
+                                      </p:cBhvr>
+                                      <p:rCtr x="67" y="0"/>
+                                    </p:animMotion>
+                                  </p:childTnLst>
+                                </p:cTn>
+                              </p:par>
+                            </p:childTnLst>
+                          </p:cTn>
+                        </p:par>
+                        <p:par>
+                          <p:cTn id="16" fill="hold">
+                            <p:stCondLst>
+                              <p:cond delay="2000"/>
+                            </p:stCondLst>
+                            <p:childTnLst>
+                              <p:par>
+                                <p:cTn id="17" presetID="1" presetClass="emph" presetSubtype="2" fill="hold" nodeType="afterEffect">
+                                  <p:stCondLst>
+                                    <p:cond delay="0"/>
+                                  </p:stCondLst>
+                                  <p:childTnLst>
+                                    <p:animClr clrSpc="rgb" dir="cw">
+                                      <p:cBhvr>
+                                        <p:cTn id="18" dur="500" fill="hold"/>
+                                        <p:tgtEl>
+                                          <p:spTgt spid="8"/>
+                                        </p:tgtEl>
+                                        <p:attrNameLst>
+                                          <p:attrName>fillcolor</p:attrName>
+                                        </p:attrNameLst>
+                                      </p:cBhvr>
+                                      <p:to>
+                                        <a:srgbClr val="f5fd1f"/>
+                                      </p:to>
+                                    </p:animClr>
+                                    <p:set>
+                                      <p:cBhvr>
+                                        <p:cTn id="19" dur="500" fill="hold"/>
+                                        <p:tgtEl>
+                                          <p:spTgt spid="8"/>
+                                        </p:tgtEl>
+                                        <p:attrNameLst>
+                                          <p:attrName>fill.type</p:attrName>
+                                        </p:attrNameLst>
+                                      </p:cBhvr>
+                                      <p:to>
+                                        <p:strVal val="solid"/>
+                                      </p:to>
+                                    </p:set>
+                                    <p:set>
+                                      <p:cBhvr>
+                                        <p:cTn id="20" dur="500" fill="hold"/>
+                                        <p:tgtEl>
+                                          <p:spTgt spid="8"/>
+                                        </p:tgtEl>
+                                        <p:attrNameLst>
+                                          <p:attrName>fill.on</p:attrName>
+                                        </p:attrNameLst>
+                                      </p:cBhvr>
+                                      <p:to>
+                                        <p:strVal val="true"/>
+                                      </p:to>
+                                    </p:set>
+                                  </p:childTnLst>
+                                </p:cTn>
+                              </p:par>
+                            </p:childTnLst>
+                          </p:cTn>
+                        </p:par>
+                      </p:childTnLst>
+                    </p:cTn>
+                  </p:par>
+                  <p:par>
+                    <p:cTn id="21" fill="hold">
+                      <p:stCondLst>
+                        <p:cond delay="indefinite"/>
+                      </p:stCondLst>
+                      <p:childTnLst>
+                        <p:par>
+                          <p:cTn id="22" fill="hold">
+                            <p:stCondLst>
+                              <p:cond delay="0"/>
+                            </p:stCondLst>
+                            <p:childTnLst>
+                              <p:par>
+                                <p:cTn id="23" presetID="63" presetClass="path" presetSubtype="0" accel="50000" decel="50000" fill="hold" nodeType="clickEffect">
+                                  <p:stCondLst>
+                                    <p:cond delay="0"/>
+                                  </p:stCondLst>
+                                  <p:childTnLst>
+                                    <p:animMotion origin="layout" path="M 0.23276 0 L 0.347448 0 " pathEditMode="relative" rAng="0" ptsTypes="">
+                                      <p:cBhvr>
+                                        <p:cTn id="24" dur="2000" fill="hold"/>
+                                        <p:tgtEl>
+                                          <p:spTgt spid="17"/>
+                                        </p:tgtEl>
+                                        <p:attrNameLst>
+                                          <p:attrName>ppt_x</p:attrName>
+                                          <p:attrName>ppt_y</p:attrName>
+                                        </p:attrNameLst>
+                                      </p:cBhvr>
+                                      <p:rCtr x="141" y="0"/>
+                                    </p:animMotion>
+                                  </p:childTnLst>
+                                </p:cTn>
+                              </p:par>
+                            </p:childTnLst>
+                          </p:cTn>
+                        </p:par>
+                        <p:par>
+                          <p:cTn id="25" fill="hold">
+                            <p:stCondLst>
+                              <p:cond delay="2000"/>
+                            </p:stCondLst>
+                            <p:childTnLst>
+                              <p:par>
+                                <p:cTn id="26" presetID="1" presetClass="emph" presetSubtype="2" fill="hold" nodeType="afterEffect">
+                                  <p:stCondLst>
+                                    <p:cond delay="0"/>
+                                  </p:stCondLst>
+                                  <p:childTnLst>
+                                    <p:animClr clrSpc="rgb" dir="cw">
+                                      <p:cBhvr>
+                                        <p:cTn id="27" dur="500" fill="hold"/>
+                                        <p:tgtEl>
+                                          <p:spTgt spid="9"/>
+                                        </p:tgtEl>
+                                        <p:attrNameLst>
+                                          <p:attrName>fillcolor</p:attrName>
+                                        </p:attrNameLst>
+                                      </p:cBhvr>
+                                      <p:to>
+                                        <a:srgbClr val="f5fd1f"/>
+                                      </p:to>
+                                    </p:animClr>
+                                    <p:set>
+                                      <p:cBhvr>
+                                        <p:cTn id="28" dur="500" fill="hold"/>
+                                        <p:tgtEl>
+                                          <p:spTgt spid="9"/>
+                                        </p:tgtEl>
+                                        <p:attrNameLst>
+                                          <p:attrName>fill.type</p:attrName>
+                                        </p:attrNameLst>
+                                      </p:cBhvr>
+                                      <p:to>
+                                        <p:strVal val="solid"/>
+                                      </p:to>
+                                    </p:set>
+                                    <p:set>
+                                      <p:cBhvr>
+                                        <p:cTn id="29" dur="500" fill="hold"/>
+                                        <p:tgtEl>
+                                          <p:spTgt spid="9"/>
+                                        </p:tgtEl>
+                                        <p:attrNameLst>
+                                          <p:attrName>fill.on</p:attrName>
+                                        </p:attrNameLst>
+                                      </p:cBhvr>
+                                      <p:to>
+                                        <p:strVal val="true"/>
+                                      </p:to>
+                                    </p:set>
+                                  </p:childTnLst>
+                                </p:cTn>
+                              </p:par>
+                            </p:childTnLst>
+                          </p:cTn>
+                        </p:par>
+                      </p:childTnLst>
+                    </p:cTn>
+                  </p:par>
+                  <p:par>
+                    <p:cTn id="30" fill="hold">
+                      <p:stCondLst>
+                        <p:cond delay="indefinite"/>
+                      </p:stCondLst>
+                      <p:childTnLst>
+                        <p:par>
+                          <p:cTn id="31" fill="hold">
+                            <p:stCondLst>
+                              <p:cond delay="0"/>
+                            </p:stCondLst>
+                            <p:childTnLst>
+                              <p:par>
+                                <p:cTn id="32" presetID="35" presetClass="path" presetSubtype="0" accel="50000" decel="50000" fill="hold" nodeType="clickEffect">
+                                  <p:stCondLst>
+                                    <p:cond delay="0"/>
+                                  </p:stCondLst>
+                                  <p:childTnLst>
+                                    <p:animMotion origin="layout" path="M 0.347396 -0.00111111 L 0.232917 -0.00111111 " pathEditMode="relative" rAng="0" ptsTypes="">
+                                      <p:cBhvr>
+                                        <p:cTn id="33" dur="2000" fill="hold"/>
+                                        <p:tgtEl>
+                                          <p:spTgt spid="17"/>
+                                        </p:tgtEl>
+                                        <p:attrNameLst>
+                                          <p:attrName>ppt_x</p:attrName>
+                                          <p:attrName>ppt_y</p:attrName>
+                                        </p:attrNameLst>
+                                      </p:cBhvr>
+                                      <p:rCtr x="-56" y="0"/>
+                                    </p:animMotion>
+                                  </p:childTnLst>
+                                </p:cTn>
+                              </p:par>
+                              <p:par>
+                                <p:cTn id="34" presetID="1" presetClass="emph" presetSubtype="2" fill="hold" nodeType="withEffect">
+                                  <p:stCondLst>
+                                    <p:cond delay="0"/>
+                                  </p:stCondLst>
+                                  <p:childTnLst>
+                                    <p:animClr clrSpc="rgb" dir="cw">
+                                      <p:cBhvr>
+                                        <p:cTn id="35" dur="500" fill="hold"/>
+                                        <p:tgtEl>
+                                          <p:spTgt spid="9"/>
+                                        </p:tgtEl>
+                                        <p:attrNameLst>
+                                          <p:attrName>fillcolor</p:attrName>
+                                        </p:attrNameLst>
+                                      </p:cBhvr>
+                                      <p:to>
+                                        <a:schemeClr val="bg1"/>
+                                      </p:to>
+                                    </p:animClr>
+                                    <p:set>
+                                      <p:cBhvr>
+                                        <p:cTn id="36" dur="500" fill="hold"/>
+                                        <p:tgtEl>
+                                          <p:spTgt spid="9"/>
+                                        </p:tgtEl>
+                                        <p:attrNameLst>
+                                          <p:attrName>fill.type</p:attrName>
+                                        </p:attrNameLst>
+                                      </p:cBhvr>
+                                      <p:to>
+                                        <p:strVal val="solid"/>
+                                      </p:to>
+                                    </p:set>
+                                    <p:set>
+                                      <p:cBhvr>
+                                        <p:cTn id="37" dur="500" fill="hold"/>
+                                        <p:tgtEl>
+                                          <p:spTgt spid="9"/>
+                                        </p:tgtEl>
+                                        <p:attrNameLst>
+                                          <p:attrName>fill.on</p:attrName>
+                                        </p:attrNameLst>
+                                      </p:cBhvr>
+                                      <p:to>
+                                        <p:strVal val="true"/>
+                                      </p:to>
+                                    </p:set>
+                                  </p:childTnLst>
+                                </p:cTn>
+                              </p:par>
+                            </p:childTnLst>
+                          </p:cTn>
+                        </p:par>
+                      </p:childTnLst>
+                    </p:cTn>
+                  </p:par>
+                  <p:par>
+                    <p:cTn id="38" fill="hold">
+                      <p:stCondLst>
+                        <p:cond delay="indefinite"/>
+                      </p:stCondLst>
+                      <p:childTnLst>
+                        <p:par>
+                          <p:cTn id="39" fill="hold">
+                            <p:stCondLst>
+                              <p:cond delay="0"/>
+                            </p:stCondLst>
+                            <p:childTnLst>
+                              <p:par>
+                                <p:cTn id="40" presetID="35" presetClass="path" presetSubtype="0" accel="50000" decel="50000" fill="hold" nodeType="clickEffect">
+                                  <p:stCondLst>
+                                    <p:cond delay="0"/>
+                                  </p:stCondLst>
+                                  <p:childTnLst>
+                                    <p:animMotion origin="layout" path="M 0.231927 0.000740888 L 0.114844 0.000740888 " pathEditMode="relative" rAng="0" ptsTypes="">
+                                      <p:cBhvr>
+                                        <p:cTn id="41" dur="2000" fill="hold"/>
+                                        <p:tgtEl>
+                                          <p:spTgt spid="17"/>
+                                        </p:tgtEl>
+                                        <p:attrNameLst>
+                                          <p:attrName>ppt_x</p:attrName>
+                                          <p:attrName>ppt_y</p:attrName>
+                                        </p:attrNameLst>
+                                      </p:cBhvr>
+                                      <p:rCtr x="-58" y="0"/>
+                                    </p:animMotion>
+                                  </p:childTnLst>
+                                </p:cTn>
+                              </p:par>
+                              <p:par>
+                                <p:cTn id="42" presetID="1" presetClass="emph" presetSubtype="2" fill="hold" nodeType="withEffect">
+                                  <p:stCondLst>
+                                    <p:cond delay="0"/>
+                                  </p:stCondLst>
+                                  <p:childTnLst>
+                                    <p:animClr clrSpc="rgb" dir="cw">
+                                      <p:cBhvr>
+                                        <p:cTn id="43" dur="500" fill="hold"/>
+                                        <p:tgtEl>
+                                          <p:spTgt spid="8"/>
+                                        </p:tgtEl>
+                                        <p:attrNameLst>
+                                          <p:attrName>fillcolor</p:attrName>
+                                        </p:attrNameLst>
+                                      </p:cBhvr>
+                                      <p:to>
+                                        <a:schemeClr val="bg1"/>
+                                      </p:to>
+                                    </p:animClr>
+                                    <p:set>
+                                      <p:cBhvr>
+                                        <p:cTn id="44" dur="500" fill="hold"/>
+                                        <p:tgtEl>
+                                          <p:spTgt spid="8"/>
+                                        </p:tgtEl>
+                                        <p:attrNameLst>
+                                          <p:attrName>fill.type</p:attrName>
+                                        </p:attrNameLst>
+                                      </p:cBhvr>
+                                      <p:to>
+                                        <p:strVal val="solid"/>
+                                      </p:to>
+                                    </p:set>
+                                    <p:set>
+                                      <p:cBhvr>
+                                        <p:cTn id="45" dur="500" fill="hold"/>
+                                        <p:tgtEl>
+                                          <p:spTgt spid="8"/>
+                                        </p:tgtEl>
+                                        <p:attrNameLst>
+                                          <p:attrName>fill.on</p:attrName>
+                                        </p:attrNameLst>
+                                      </p:cBhvr>
+                                      <p:to>
+                                        <p:strVal val="true"/>
+                                      </p:to>
+                                    </p:set>
+                                  </p:childTnLst>
+                                </p:cTn>
+                              </p:par>
+                            </p:childTnLst>
+                          </p:cTn>
+                        </p:par>
+                      </p:childTnLst>
+                    </p:cTn>
+                  </p:par>
+                  <p:par>
+                    <p:cTn id="46" fill="hold">
+                      <p:stCondLst>
+                        <p:cond delay="indefinite"/>
+                      </p:stCondLst>
+                      <p:childTnLst>
+                        <p:par>
+                          <p:cTn id="47" fill="hold">
+                            <p:stCondLst>
+                              <p:cond delay="0"/>
+                            </p:stCondLst>
+                            <p:childTnLst>
+                              <p:par>
+                                <p:cTn id="48" presetID="35" presetClass="path" presetSubtype="0" accel="50000" decel="50000" fill="hold" nodeType="clickEffect">
+                                  <p:stCondLst>
+                                    <p:cond delay="0"/>
+                                  </p:stCondLst>
+                                  <p:childTnLst>
+                                    <p:animMotion origin="layout" path="M 0.114479 0.000833354 L -0.00166667 0.000833354 " pathEditMode="relative" rAng="0" ptsTypes="">
+                                      <p:cBhvr>
+                                        <p:cTn id="49" dur="2000" fill="hold"/>
+                                        <p:tgtEl>
+                                          <p:spTgt spid="17"/>
+                                        </p:tgtEl>
+                                        <p:attrNameLst>
+                                          <p:attrName>ppt_x</p:attrName>
+                                          <p:attrName>ppt_y</p:attrName>
+                                        </p:attrNameLst>
+                                      </p:cBhvr>
+                                      <p:rCtr x="-58" y="0"/>
+                                    </p:animMotion>
+                                  </p:childTnLst>
+                                </p:cTn>
+                              </p:par>
+                              <p:par>
+                                <p:cTn id="50" presetID="1" presetClass="emph" presetSubtype="2" fill="hold" nodeType="withEffect">
+                                  <p:stCondLst>
+                                    <p:cond delay="0"/>
+                                  </p:stCondLst>
+                                  <p:childTnLst>
+                                    <p:animClr clrSpc="rgb" dir="cw">
+                                      <p:cBhvr>
+                                        <p:cTn id="51" dur="500" fill="hold"/>
+                                        <p:tgtEl>
+                                          <p:spTgt spid="7"/>
+                                        </p:tgtEl>
+                                        <p:attrNameLst>
+                                          <p:attrName>fillcolor</p:attrName>
+                                        </p:attrNameLst>
+                                      </p:cBhvr>
+                                      <p:to>
+                                        <a:schemeClr val="bg1"/>
+                                      </p:to>
+                                    </p:animClr>
+                                    <p:set>
+                                      <p:cBhvr>
+                                        <p:cTn id="52" dur="500" fill="hold"/>
+                                        <p:tgtEl>
+                                          <p:spTgt spid="7"/>
+                                        </p:tgtEl>
+                                        <p:attrNameLst>
+                                          <p:attrName>fill.type</p:attrName>
+                                        </p:attrNameLst>
+                                      </p:cBhvr>
+                                      <p:to>
+                                        <p:strVal val="solid"/>
+                                      </p:to>
+                                    </p:set>
+                                    <p:set>
+                                      <p:cBhvr>
+                                        <p:cTn id="53" dur="500" fill="hold"/>
+                                        <p:tgtEl>
+                                          <p:spTgt spid="7"/>
+                                        </p:tgtEl>
+                                        <p:attrNameLst>
+                                          <p:attrName>fill.on</p:attrName>
+                                        </p:attrNameLst>
+                                      </p:cBhvr>
+                                      <p:to>
+                                        <p:strVal val="true"/>
+                                      </p:to>
+                                    </p:set>
+                                  </p:childTnLst>
+                                </p:cTn>
+                              </p:par>
+                            </p:childTnLst>
+                          </p:cTn>
+                        </p:par>
+                      </p:childTnLst>
+                    </p:cTn>
+                  </p:par>
+                  <p:par>
+                    <p:cTn id="54" fill="hold">
+                      <p:stCondLst>
+                        <p:cond delay="indefinite"/>
+                      </p:stCondLst>
+                      <p:childTnLst>
+                        <p:par>
+                          <p:cTn id="55" fill="hold">
+                            <p:stCondLst>
+                              <p:cond delay="0"/>
+                            </p:stCondLst>
+                            <p:childTnLst>
+                              <p:par>
+                                <p:cTn id="56" presetID="35" presetClass="path" presetSubtype="0" accel="50000" decel="50000" fill="hold" grpId="0" nodeType="clickEffect">
+                                  <p:stCondLst>
+                                    <p:cond delay="0"/>
+                                  </p:stCondLst>
+                                  <p:childTnLst>
+                                    <p:animMotion origin="layout" path="M 0 0  L -0.25 0  E" pathEditMode="relative" ptsTypes="">
+                                      <p:cBhvr>
+                                        <p:cTn id="57" dur="2000" fill="hold"/>
+                                        <p:tgtEl>
+                                          <p:spTgt spid="6"/>
+                                        </p:tgtEl>
+                                        <p:attrNameLst>
+                                          <p:attrName>ppt_x</p:attrName>
+                                          <p:attrName>ppt_y</p:attrName>
+                                        </p:attrNameLst>
+                                      </p:cBhvr>
+                                    </p:animMotion>
+                                  </p:childTnLst>
+                                </p:cTn>
+                              </p:par>
+                              <p:par>
+                                <p:cTn id="58" presetID="35" presetClass="path" presetSubtype="0" accel="50000" decel="50000" fill="hold" grpId="0" nodeType="withEffect">
+                                  <p:stCondLst>
+                                    <p:cond delay="0"/>
+                                  </p:stCondLst>
+                                  <p:childTnLst>
+                                    <p:animMotion origin="layout" path="M 0 0  L -0.25 0  E" pathEditMode="relative" ptsTypes="">
+                                      <p:cBhvr>
+                                        <p:cTn id="59" dur="2000" fill="hold"/>
+                                        <p:tgtEl>
+                                          <p:spTgt spid="7"/>
+                                        </p:tgtEl>
+                                        <p:attrNameLst>
+                                          <p:attrName>ppt_x</p:attrName>
+                                          <p:attrName>ppt_y</p:attrName>
+                                        </p:attrNameLst>
+                                      </p:cBhvr>
+                                    </p:animMotion>
+                                  </p:childTnLst>
+                                </p:cTn>
+                              </p:par>
+                              <p:par>
+                                <p:cTn id="60" presetID="35" presetClass="path" presetSubtype="0" accel="50000" decel="50000" fill="hold" grpId="0" nodeType="withEffect">
+                                  <p:stCondLst>
+                                    <p:cond delay="0"/>
+                                  </p:stCondLst>
+                                  <p:childTnLst>
+                                    <p:animMotion origin="layout" path="M 0 0  L -0.25 0  E" pathEditMode="relative" ptsTypes="">
+                                      <p:cBhvr>
+                                        <p:cTn id="61" dur="2000" fill="hold"/>
+                                        <p:tgtEl>
+                                          <p:spTgt spid="8"/>
+                                        </p:tgtEl>
+                                        <p:attrNameLst>
+                                          <p:attrName>ppt_x</p:attrName>
+                                          <p:attrName>ppt_y</p:attrName>
+                                        </p:attrNameLst>
+                                      </p:cBhvr>
+                                    </p:animMotion>
+                                  </p:childTnLst>
+                                </p:cTn>
+                              </p:par>
+                              <p:par>
+                                <p:cTn id="62" presetID="35" presetClass="path" presetSubtype="0" accel="50000" decel="50000" fill="hold" grpId="0" nodeType="withEffect">
+                                  <p:stCondLst>
+                                    <p:cond delay="0"/>
+                                  </p:stCondLst>
+                                  <p:childTnLst>
+                                    <p:animMotion origin="layout" path="M 0 0  L -0.25 0  E" pathEditMode="relative" ptsTypes="">
+                                      <p:cBhvr>
+                                        <p:cTn id="63" dur="2000" fill="hold"/>
+                                        <p:tgtEl>
+                                          <p:spTgt spid="9"/>
+                                        </p:tgtEl>
+                                        <p:attrNameLst>
+                                          <p:attrName>ppt_x</p:attrName>
+                                          <p:attrName>ppt_y</p:attrName>
+                                        </p:attrNameLst>
+                                      </p:cBhvr>
+                                    </p:animMotion>
+                                  </p:childTnLst>
+                                </p:cTn>
+                              </p:par>
+                              <p:par>
+                                <p:cTn id="64" presetID="35" presetClass="path" presetSubtype="0" accel="50000" decel="50000" fill="hold" nodeType="withEffect">
+                                  <p:stCondLst>
+                                    <p:cond delay="0"/>
+                                  </p:stCondLst>
+                                  <p:childTnLst>
+                                    <p:animMotion origin="layout" path="M 0 0  L -0.25 0  E" pathEditMode="relative" ptsTypes="">
+                                      <p:cBhvr>
+                                        <p:cTn id="65" dur="2000" fill="hold"/>
+                                        <p:tgtEl>
+                                          <p:spTgt spid="17"/>
+                                        </p:tgtEl>
+                                        <p:attrNameLst>
+                                          <p:attrName>ppt_x</p:attrName>
+                                          <p:attrName>ppt_y</p:attrName>
+                                        </p:attrNameLst>
+                                      </p:cBhvr>
+                                    </p:animMotion>
+                                  </p:childTnLst>
+                                </p:cTn>
+                              </p:par>
+                            </p:childTnLst>
+                          </p:cTn>
+                        </p:par>
+                      </p:childTnLst>
+                    </p:cTn>
+                  </p:par>
+                  <p:par>
+                    <p:cTn id="66" fill="hold">
+                      <p:stCondLst>
+                        <p:cond delay="indefinite"/>
+                      </p:stCondLst>
+                      <p:childTnLst>
+                        <p:par>
+                          <p:cTn id="67" fill="hold">
+                            <p:stCondLst>
+                              <p:cond delay="0"/>
+                            </p:stCondLst>
+                            <p:childTnLst>
+                              <p:par>
+                                <p:cTn id="68" presetID="1" presetClass="entr" presetSubtype="0" fill="hold" nodeType="clickEffect">
+                                  <p:stCondLst>
+                                    <p:cond delay="0"/>
+                                  </p:stCondLst>
+                                  <p:childTnLst>
+                                    <p:set>
+                                      <p:cBhvr>
+                                        <p:cTn id="69" dur="1" fill="hold">
+                                          <p:stCondLst>
+                                            <p:cond delay="0"/>
+                                          </p:stCondLst>
+                                        </p:cTn>
+                                        <p:tgtEl>
+                                          <p:spTgt spid="21"/>
+                                        </p:tgtEl>
+                                        <p:attrNameLst>
+                                          <p:attrName>style.visibility</p:attrName>
+                                        </p:attrNameLst>
+                                      </p:cBhvr>
+                                      <p:to>
+                                        <p:strVal val="visible"/>
+                                      </p:to>
+                                    </p:set>
+                                  </p:childTnLst>
+                                </p:cTn>
+                              </p:par>
+                            </p:childTnLst>
+                          </p:cTn>
+                        </p:par>
+                      </p:childTnLst>
+                    </p:cTn>
+                  </p:par>
+                </p:childTnLst>
+              </p:cTn>
+              <p:prevCondLst>
+                <p:cond evt="onPrev" delay="0">
+                  <p:tgtEl>
+                    <p:sldTgt/>
+                  </p:tgtEl>
+                </p:cond>
+              </p:prevCondLst>
+              <p:nextCondLst>
+                <p:cond evt="onNext" delay="0">
+                  <p:tgtEl>
+                    <p:sldTgt/>
+                  </p:tgtEl>
+                </p:cond>
+              </p:nextCondLst>
+            </p:seq>
+          </p:childTnLst>
+        </p:cTn>
+      </p:par>
+    </p:tnLst>
+    <p:bldLst>
+      <p:bldP spid="6" grpId="0" animBg="1"/>
+      <p:bldP spid="7" grpId="0" animBg="1"/>
+      <p:bldP spid="8" grpId="0" animBg="1"/>
+      <p:bldP spid="9" grpId="0" animBg="1"/>
+    </p:bldLst>
+  </p:timing>
 </p:sld>
 </file>
 
